--- a/content/05-teaching-resources/slides/core/03-data-types-variables-and-data-structures.pptx
+++ b/content/05-teaching-resources/slides/core/03-data-types-variables-and-data-structures.pptx
@@ -8,13 +8,19 @@
     <p:sldId id="256" r:id="rId7"/>
     <p:sldId id="257" r:id="rId8"/>
     <p:sldId id="258" r:id="rId9"/>
-    <p:sldId id="259" r:id="rId11"/>
+    <p:sldId id="259" r:id="rId10"/>
     <p:sldId id="260" r:id="rId12"/>
     <p:sldId id="261" r:id="rId13"/>
     <p:sldId id="262" r:id="rId14"/>
     <p:sldId id="263" r:id="rId15"/>
     <p:sldId id="264" r:id="rId16"/>
     <p:sldId id="265" r:id="rId17"/>
+    <p:sldId id="266" r:id="rId18"/>
+    <p:sldId id="267" r:id="rId19"/>
+    <p:sldId id="268" r:id="rId20"/>
+    <p:sldId id="269" r:id="rId21"/>
+    <p:sldId id="270" r:id="rId22"/>
+    <p:sldId id="271" r:id="rId23"/>
   </p:sldIdLst>
   <p:sldSz cx="12191695" cy="6858000" type="screen4x3"/>
   <p:notesSz cx="6858000" cy="9144000"/>
@@ -581,7 +587,22 @@
           <a:lstStyle/>
           <a:p>
             <a:r>
-              <a:t>Give students a few minutes to answer on mini whiteboards or paper, then reveal the answers on the next slide.</a:t>
+              <a:t>Answers:</a:t>
+            </a:r>
+          </a:p>
+          <a:p>
+            <a:r>
+              <a:t>1. '55'.</a:t>
+            </a:r>
+          </a:p>
+          <a:p>
+            <a:r>
+              <a:t>2. Float.</a:t>
+            </a:r>
+          </a:p>
+          <a:p>
+            <a:r>
+              <a:t>3. To keep leading zeros and because no maths is done on it.</a:t>
             </a:r>
           </a:p>
         </p:txBody>
@@ -651,7 +672,22 @@
           <a:lstStyle/>
           <a:p>
             <a:r>
-              <a:t>Talk through any answers the class found difficult.</a:t>
+              <a:t>Answers:</a:t>
+            </a:r>
+          </a:p>
+          <a:p>
+            <a:r>
+              <a:t>1. A string.</a:t>
+            </a:r>
+          </a:p>
+          <a:p>
+            <a:r>
+              <a:t>2. A variable created inside a function and only usable there.</a:t>
+            </a:r>
+          </a:p>
+          <a:p>
+            <a:r>
+              <a:t>3. Functions can't accidentally change each other's data.</a:t>
             </a:r>
           </a:p>
         </p:txBody>
@@ -677,6 +713,231 @@
 </file>
 
 <file path=ppt/notesSlides/notesSlide4.xml><?xml version="1.0" encoding="utf-8"?>
+<p:notes xmlns:a="http://schemas.openxmlformats.org/drawingml/2006/main" xmlns:p="http://schemas.openxmlformats.org/presentationml/2006/main" xmlns:r="http://schemas.openxmlformats.org/officeDocument/2006/relationships">
+  <p:cSld>
+    <p:spTree>
+      <p:nvGrpSpPr>
+        <p:cNvPr id="1" name=""/>
+        <p:cNvGrpSpPr/>
+        <p:nvPr/>
+      </p:nvGrpSpPr>
+      <p:grpSpPr>
+        <a:xfrm>
+          <a:off x="0" y="0"/>
+          <a:ext cx="0" cy="0"/>
+          <a:chOff x="0" y="0"/>
+          <a:chExt cx="0" cy="0"/>
+        </a:xfrm>
+      </p:grpSpPr>
+      <p:sp>
+        <p:nvSpPr>
+          <p:cNvPr id="2" name="Slide Image Placeholder 1"/>
+          <p:cNvSpPr>
+            <a:spLocks noGrp="1"/>
+          </p:cNvSpPr>
+          <p:nvPr>
+            <p:ph type="sldImg" idx="2"/>
+          </p:nvPr>
+        </p:nvSpPr>
+        <p:spPr/>
+      </p:sp>
+      <p:sp>
+        <p:nvSpPr>
+          <p:cNvPr id="3" name="Notes Placeholder 2"/>
+          <p:cNvSpPr>
+            <a:spLocks noGrp="1"/>
+          </p:cNvSpPr>
+          <p:nvPr>
+            <p:ph type="body" idx="3" sz="quarter"/>
+          </p:nvPr>
+        </p:nvSpPr>
+        <p:spPr/>
+        <p:txBody>
+          <a:bodyPr/>
+          <a:lstStyle/>
+          <a:p>
+            <a:r>
+              <a:t>Answers:</a:t>
+            </a:r>
+          </a:p>
+          <a:p>
+            <a:r>
+              <a:t>1. 0.</a:t>
+            </a:r>
+          </a:p>
+          <a:p>
+            <a:r>
+              <a:t>2. list.append(item).</a:t>
+            </a:r>
+          </a:p>
+          <a:p>
+            <a:r>
+              <a:t>3. When you want to look values up by a key.</a:t>
+            </a:r>
+          </a:p>
+        </p:txBody>
+      </p:sp>
+      <p:sp>
+        <p:nvSpPr>
+          <p:cNvPr id="4" name="Slide Number Placeholder 3"/>
+          <p:cNvSpPr>
+            <a:spLocks noGrp="1"/>
+          </p:cNvSpPr>
+          <p:nvPr>
+            <p:ph type="sldNum" idx="5" sz="quarter"/>
+          </p:nvPr>
+        </p:nvSpPr>
+        <p:spPr/>
+      </p:sp>
+    </p:spTree>
+  </p:cSld>
+  <p:clrMapOvr>
+    <a:masterClrMapping/>
+  </p:clrMapOvr>
+</p:notes>
+</file>
+
+<file path=ppt/notesSlides/notesSlide5.xml><?xml version="1.0" encoding="utf-8"?>
+<p:notes xmlns:a="http://schemas.openxmlformats.org/drawingml/2006/main" xmlns:p="http://schemas.openxmlformats.org/presentationml/2006/main" xmlns:r="http://schemas.openxmlformats.org/officeDocument/2006/relationships">
+  <p:cSld>
+    <p:spTree>
+      <p:nvGrpSpPr>
+        <p:cNvPr id="1" name=""/>
+        <p:cNvGrpSpPr/>
+        <p:nvPr/>
+      </p:nvGrpSpPr>
+      <p:grpSpPr>
+        <a:xfrm>
+          <a:off x="0" y="0"/>
+          <a:ext cx="0" cy="0"/>
+          <a:chOff x="0" y="0"/>
+          <a:chExt cx="0" cy="0"/>
+        </a:xfrm>
+      </p:grpSpPr>
+      <p:sp>
+        <p:nvSpPr>
+          <p:cNvPr id="2" name="Slide Image Placeholder 1"/>
+          <p:cNvSpPr>
+            <a:spLocks noGrp="1"/>
+          </p:cNvSpPr>
+          <p:nvPr>
+            <p:ph type="sldImg" idx="2"/>
+          </p:nvPr>
+        </p:nvSpPr>
+        <p:spPr/>
+      </p:sp>
+      <p:sp>
+        <p:nvSpPr>
+          <p:cNvPr id="3" name="Notes Placeholder 2"/>
+          <p:cNvSpPr>
+            <a:spLocks noGrp="1"/>
+          </p:cNvSpPr>
+          <p:nvPr>
+            <p:ph type="body" idx="3" sz="quarter"/>
+          </p:nvPr>
+        </p:nvSpPr>
+        <p:spPr/>
+        <p:txBody>
+          <a:bodyPr/>
+          <a:lstStyle/>
+          <a:p>
+            <a:r>
+              <a:t>Give students a few minutes to answer on mini whiteboards or paper, then reveal the answers on the next slide.</a:t>
+            </a:r>
+          </a:p>
+        </p:txBody>
+      </p:sp>
+      <p:sp>
+        <p:nvSpPr>
+          <p:cNvPr id="4" name="Slide Number Placeholder 3"/>
+          <p:cNvSpPr>
+            <a:spLocks noGrp="1"/>
+          </p:cNvSpPr>
+          <p:nvPr>
+            <p:ph type="sldNum" idx="5" sz="quarter"/>
+          </p:nvPr>
+        </p:nvSpPr>
+        <p:spPr/>
+      </p:sp>
+    </p:spTree>
+  </p:cSld>
+  <p:clrMapOvr>
+    <a:masterClrMapping/>
+  </p:clrMapOvr>
+</p:notes>
+</file>
+
+<file path=ppt/notesSlides/notesSlide6.xml><?xml version="1.0" encoding="utf-8"?>
+<p:notes xmlns:a="http://schemas.openxmlformats.org/drawingml/2006/main" xmlns:p="http://schemas.openxmlformats.org/presentationml/2006/main" xmlns:r="http://schemas.openxmlformats.org/officeDocument/2006/relationships">
+  <p:cSld>
+    <p:spTree>
+      <p:nvGrpSpPr>
+        <p:cNvPr id="1" name=""/>
+        <p:cNvGrpSpPr/>
+        <p:nvPr/>
+      </p:nvGrpSpPr>
+      <p:grpSpPr>
+        <a:xfrm>
+          <a:off x="0" y="0"/>
+          <a:ext cx="0" cy="0"/>
+          <a:chOff x="0" y="0"/>
+          <a:chExt cx="0" cy="0"/>
+        </a:xfrm>
+      </p:grpSpPr>
+      <p:sp>
+        <p:nvSpPr>
+          <p:cNvPr id="2" name="Slide Image Placeholder 1"/>
+          <p:cNvSpPr>
+            <a:spLocks noGrp="1"/>
+          </p:cNvSpPr>
+          <p:nvPr>
+            <p:ph type="sldImg" idx="2"/>
+          </p:nvPr>
+        </p:nvSpPr>
+        <p:spPr/>
+      </p:sp>
+      <p:sp>
+        <p:nvSpPr>
+          <p:cNvPr id="3" name="Notes Placeholder 2"/>
+          <p:cNvSpPr>
+            <a:spLocks noGrp="1"/>
+          </p:cNvSpPr>
+          <p:nvPr>
+            <p:ph type="body" idx="3" sz="quarter"/>
+          </p:nvPr>
+        </p:nvSpPr>
+        <p:spPr/>
+        <p:txBody>
+          <a:bodyPr/>
+          <a:lstStyle/>
+          <a:p>
+            <a:r>
+              <a:t>Talk through any answers the class found difficult.</a:t>
+            </a:r>
+          </a:p>
+        </p:txBody>
+      </p:sp>
+      <p:sp>
+        <p:nvSpPr>
+          <p:cNvPr id="4" name="Slide Number Placeholder 3"/>
+          <p:cNvSpPr>
+            <a:spLocks noGrp="1"/>
+          </p:cNvSpPr>
+          <p:nvPr>
+            <p:ph type="sldNum" idx="5" sz="quarter"/>
+          </p:nvPr>
+        </p:nvSpPr>
+        <p:spPr/>
+      </p:sp>
+    </p:spTree>
+  </p:cSld>
+  <p:clrMapOvr>
+    <a:masterClrMapping/>
+  </p:clrMapOvr>
+</p:notes>
+</file>
+
+<file path=ppt/notesSlides/notesSlide7.xml><?xml version="1.0" encoding="utf-8"?>
 <p:notes xmlns:a="http://schemas.openxmlformats.org/drawingml/2006/main" xmlns:p="http://schemas.openxmlformats.org/presentationml/2006/main" xmlns:r="http://schemas.openxmlformats.org/officeDocument/2006/relationships">
   <p:cSld>
     <p:spTree>
@@ -4052,6 +4313,3380 @@
     <p:bg>
       <p:bgPr>
         <a:solidFill>
+          <a:srgbClr val="FFFFFF"/>
+        </a:solidFill>
+        <a:effectLst/>
+      </p:bgPr>
+    </p:bg>
+    <p:spTree>
+      <p:nvGrpSpPr>
+        <p:cNvPr id="1" name=""/>
+        <p:cNvGrpSpPr/>
+        <p:nvPr/>
+      </p:nvGrpSpPr>
+      <p:grpSpPr/>
+      <p:sp>
+        <p:nvSpPr>
+          <p:cNvPr id="2" name="TextBox 1"/>
+          <p:cNvSpPr txBox="1"/>
+          <p:nvPr/>
+        </p:nvSpPr>
+        <p:spPr>
+          <a:xfrm>
+            <a:off x="548640" y="320040"/>
+            <a:ext cx="11094415" cy="274320"/>
+          </a:xfrm>
+          <a:prstGeom prst="rect">
+            <a:avLst/>
+          </a:prstGeom>
+          <a:noFill/>
+        </p:spPr>
+        <p:txBody>
+          <a:bodyPr wrap="square" anchor="t" lIns="0" rIns="0" tIns="0" bIns="0"/>
+          <a:lstStyle/>
+          <a:p>
+            <a:pPr algn="l"/>
+            <a:r>
+              <a:rPr sz="1100" b="1" i="0">
+                <a:solidFill>
+                  <a:srgbClr val="54595D"/>
+                </a:solidFill>
+                <a:latin typeface="Calibri"/>
+              </a:rPr>
+              <a:t>CORE COMPONENT  ·  Core Paper 1</a:t>
+            </a:r>
+          </a:p>
+        </p:txBody>
+      </p:sp>
+      <p:sp>
+        <p:nvSpPr>
+          <p:cNvPr id="3" name="TextBox 2"/>
+          <p:cNvSpPr txBox="1"/>
+          <p:nvPr/>
+        </p:nvSpPr>
+        <p:spPr>
+          <a:xfrm>
+            <a:off x="548640" y="566928"/>
+            <a:ext cx="11094415" cy="822960"/>
+          </a:xfrm>
+          <a:prstGeom prst="rect">
+            <a:avLst/>
+          </a:prstGeom>
+          <a:noFill/>
+        </p:spPr>
+        <p:txBody>
+          <a:bodyPr wrap="square" anchor="ctr" lIns="0" rIns="0" tIns="0" bIns="0"/>
+          <a:lstStyle/>
+          <a:p>
+            <a:pPr algn="l"/>
+            <a:r>
+              <a:rPr sz="3200" b="1" i="0">
+                <a:solidFill>
+                  <a:srgbClr val="03306E"/>
+                </a:solidFill>
+                <a:latin typeface="Cambria"/>
+              </a:rPr>
+              <a:t>Data structures</a:t>
+            </a:r>
+          </a:p>
+        </p:txBody>
+      </p:sp>
+      <p:sp>
+        <p:nvSpPr>
+          <p:cNvPr id="4" name="TextBox 3"/>
+          <p:cNvSpPr txBox="1"/>
+          <p:nvPr/>
+        </p:nvSpPr>
+        <p:spPr>
+          <a:xfrm>
+            <a:off x="548640" y="6446520"/>
+            <a:ext cx="8229600" cy="274320"/>
+          </a:xfrm>
+          <a:prstGeom prst="rect">
+            <a:avLst/>
+          </a:prstGeom>
+          <a:noFill/>
+        </p:spPr>
+        <p:txBody>
+          <a:bodyPr wrap="square" anchor="t" lIns="0" rIns="0" tIns="0" bIns="0"/>
+          <a:lstStyle/>
+          <a:p>
+            <a:pPr algn="l"/>
+            <a:r>
+              <a:rPr sz="1000" b="0" i="0">
+                <a:solidFill>
+                  <a:srgbClr val="54595D"/>
+                </a:solidFill>
+                <a:latin typeface="Calibri"/>
+              </a:rPr>
+              <a:t>Digital Software Development T Level  ·  Data Types, Variables and Data Structures</a:t>
+            </a:r>
+          </a:p>
+        </p:txBody>
+      </p:sp>
+      <p:sp>
+        <p:nvSpPr>
+          <p:cNvPr id="5" name="TextBox 4"/>
+          <p:cNvSpPr txBox="1"/>
+          <p:nvPr/>
+        </p:nvSpPr>
+        <p:spPr>
+          <a:xfrm>
+            <a:off x="10728655" y="6446520"/>
+            <a:ext cx="914400" cy="274320"/>
+          </a:xfrm>
+          <a:prstGeom prst="rect">
+            <a:avLst/>
+          </a:prstGeom>
+          <a:noFill/>
+        </p:spPr>
+        <p:txBody>
+          <a:bodyPr wrap="square" anchor="t" lIns="0" rIns="0" tIns="0" bIns="0"/>
+          <a:lstStyle/>
+          <a:p>
+            <a:pPr algn="r"/>
+            <a:r>
+              <a:rPr sz="1000" b="0" i="0">
+                <a:solidFill>
+                  <a:srgbClr val="54595D"/>
+                </a:solidFill>
+                <a:latin typeface="Calibri"/>
+              </a:rPr>
+              <a:t>10</a:t>
+            </a:r>
+          </a:p>
+        </p:txBody>
+      </p:sp>
+      <p:sp>
+        <p:nvSpPr>
+          <p:cNvPr id="6" name="TextBox 5"/>
+          <p:cNvSpPr txBox="1"/>
+          <p:nvPr/>
+        </p:nvSpPr>
+        <p:spPr>
+          <a:xfrm>
+            <a:off x="548640" y="1554480"/>
+            <a:ext cx="6720840" cy="4617720"/>
+          </a:xfrm>
+          <a:prstGeom prst="rect">
+            <a:avLst/>
+          </a:prstGeom>
+          <a:noFill/>
+        </p:spPr>
+        <p:txBody>
+          <a:bodyPr wrap="square" lIns="0" rIns="0" tIns="0" bIns="0">
+            <a:spAutoFit/>
+          </a:bodyPr>
+          <a:lstStyle/>
+          <a:p>
+            <a:pPr>
+              <a:spcAft>
+                <a:spcPts val="1320"/>
+              </a:spcAft>
+            </a:pPr>
+            <a:r>
+              <a:rPr sz="2200" b="0">
+                <a:solidFill>
+                  <a:srgbClr val="202122"/>
+                </a:solidFill>
+                <a:latin typeface="Calibri"/>
+              </a:rPr>
+              <a:t>Data structures hold many values under one name.</a:t>
+            </a:r>
+          </a:p>
+          <a:p>
+            <a:pPr>
+              <a:spcAft>
+                <a:spcPts val="1320"/>
+              </a:spcAft>
+            </a:pPr>
+            <a:r>
+              <a:rPr sz="2200" b="0">
+                <a:solidFill>
+                  <a:srgbClr val="202122"/>
+                </a:solidFill>
+                <a:latin typeface="Calibri"/>
+              </a:rPr>
+              <a:t>A list is an ordered, changeable collection: scores = [12, 7, 9]. Items are numbered from 0, so scores[0] is 12. Methods include append(), insert(), remove(), pop(), sort(), index() and count(), and len() gives its length.</a:t>
+            </a:r>
+          </a:p>
+          <a:p>
+            <a:pPr>
+              <a:spcAft>
+                <a:spcPts val="1320"/>
+              </a:spcAft>
+            </a:pPr>
+            <a:r>
+              <a:rPr sz="2200" b="0">
+                <a:solidFill>
+                  <a:srgbClr val="202122"/>
+                </a:solidFill>
+                <a:latin typeface="Calibri"/>
+              </a:rPr>
+              <a:t>An array is an ordered collection of items of the same type, such as a set of sensor readings.</a:t>
+            </a:r>
+          </a:p>
+          <a:p>
+            <a:pPr>
+              <a:spcAft>
+                <a:spcPts val="1320"/>
+              </a:spcAft>
+            </a:pPr>
+            <a:r>
+              <a:rPr sz="2200" b="0">
+                <a:solidFill>
+                  <a:srgbClr val="202122"/>
+                </a:solidFill>
+                <a:latin typeface="Calibri"/>
+              </a:rPr>
+              <a:t>A dictionary stores key and value pairs, so you look values up by name rather than position: user = {'name': 'Ali', 'age': 17}; user['age'] gives 17.</a:t>
+            </a:r>
+          </a:p>
+        </p:txBody>
+      </p:sp>
+      <p:sp>
+        <p:nvSpPr>
+          <p:cNvPr id="7" name="Rounded Rectangle 6"/>
+          <p:cNvSpPr/>
+          <p:nvPr/>
+        </p:nvSpPr>
+        <p:spPr>
+          <a:xfrm>
+            <a:off x="7772400" y="1554480"/>
+            <a:ext cx="3867912" cy="4526280"/>
+          </a:xfrm>
+          <a:prstGeom prst="roundRect">
+            <a:avLst>
+              <a:gd name="adj" fmla="val 8000"/>
+            </a:avLst>
+          </a:prstGeom>
+          <a:solidFill>
+            <a:srgbClr val="03306E"/>
+          </a:solidFill>
+          <a:ln>
+            <a:noFill/>
+          </a:ln>
+          <a:effectLst/>
+        </p:spPr>
+        <p:style>
+          <a:lnRef idx="1">
+            <a:schemeClr val="accent1"/>
+          </a:lnRef>
+          <a:fillRef idx="3">
+            <a:schemeClr val="accent1"/>
+          </a:fillRef>
+          <a:effectRef idx="2">
+            <a:schemeClr val="accent1"/>
+          </a:effectRef>
+          <a:fontRef idx="minor">
+            <a:schemeClr val="lt1"/>
+          </a:fontRef>
+        </p:style>
+        <p:txBody>
+          <a:bodyPr rtlCol="0" anchor="ctr"/>
+          <a:lstStyle/>
+          <a:p/>
+        </p:txBody>
+      </p:sp>
+      <p:sp>
+        <p:nvSpPr>
+          <p:cNvPr id="8" name="Oval 7"/>
+          <p:cNvSpPr/>
+          <p:nvPr/>
+        </p:nvSpPr>
+        <p:spPr>
+          <a:xfrm>
+            <a:off x="8046720" y="1828800"/>
+            <a:ext cx="548640" cy="548640"/>
+          </a:xfrm>
+          <a:prstGeom prst="ellipse">
+            <a:avLst/>
+          </a:prstGeom>
+          <a:solidFill>
+            <a:srgbClr val="F2B705"/>
+          </a:solidFill>
+          <a:ln>
+            <a:noFill/>
+          </a:ln>
+          <a:effectLst/>
+        </p:spPr>
+        <p:style>
+          <a:lnRef idx="1">
+            <a:schemeClr val="accent1"/>
+          </a:lnRef>
+          <a:fillRef idx="3">
+            <a:schemeClr val="accent1"/>
+          </a:fillRef>
+          <a:effectRef idx="2">
+            <a:schemeClr val="accent1"/>
+          </a:effectRef>
+          <a:fontRef idx="minor">
+            <a:schemeClr val="lt1"/>
+          </a:fontRef>
+        </p:style>
+        <p:txBody>
+          <a:bodyPr rtlCol="0" anchor="ctr" lIns="0" rIns="0" tIns="0" bIns="0"/>
+          <a:lstStyle/>
+          <a:p>
+            <a:pPr algn="ctr"/>
+            <a:r>
+              <a:rPr sz="1300" b="1">
+                <a:solidFill>
+                  <a:srgbClr val="202122"/>
+                </a:solidFill>
+                <a:latin typeface="Calibri"/>
+              </a:rPr>
+              <a:t>e.g.</a:t>
+            </a:r>
+          </a:p>
+        </p:txBody>
+      </p:sp>
+      <p:sp>
+        <p:nvSpPr>
+          <p:cNvPr id="9" name="TextBox 8"/>
+          <p:cNvSpPr txBox="1"/>
+          <p:nvPr/>
+        </p:nvSpPr>
+        <p:spPr>
+          <a:xfrm>
+            <a:off x="8046720" y="2560320"/>
+            <a:ext cx="3291840" cy="365760"/>
+          </a:xfrm>
+          <a:prstGeom prst="rect">
+            <a:avLst/>
+          </a:prstGeom>
+          <a:noFill/>
+        </p:spPr>
+        <p:txBody>
+          <a:bodyPr wrap="square" anchor="t" lIns="0" rIns="0" tIns="0" bIns="0"/>
+          <a:lstStyle/>
+          <a:p>
+            <a:pPr algn="l"/>
+            <a:r>
+              <a:rPr sz="1300" b="1" i="0">
+                <a:solidFill>
+                  <a:srgbClr val="A9C8F0"/>
+                </a:solidFill>
+                <a:latin typeface="Calibri"/>
+              </a:rPr>
+              <a:t>EXAMPLE</a:t>
+            </a:r>
+          </a:p>
+        </p:txBody>
+      </p:sp>
+      <p:sp>
+        <p:nvSpPr>
+          <p:cNvPr id="10" name="TextBox 9"/>
+          <p:cNvSpPr txBox="1"/>
+          <p:nvPr/>
+        </p:nvSpPr>
+        <p:spPr>
+          <a:xfrm>
+            <a:off x="8046720" y="2971800"/>
+            <a:ext cx="3291840" cy="2971800"/>
+          </a:xfrm>
+          <a:prstGeom prst="rect">
+            <a:avLst/>
+          </a:prstGeom>
+          <a:noFill/>
+        </p:spPr>
+        <p:txBody>
+          <a:bodyPr wrap="square" anchor="t" lIns="0" rIns="0" tIns="0" bIns="0"/>
+          <a:lstStyle/>
+          <a:p>
+            <a:pPr algn="l"/>
+            <a:r>
+              <a:rPr sz="1900" b="0" i="0">
+                <a:solidFill>
+                  <a:srgbClr val="FFFFFF"/>
+                </a:solidFill>
+                <a:latin typeface="Cambria"/>
+              </a:rPr>
+              <a:t>A quiz stores questions in a list and each player's score in a dictionary: scores = {'Ali': 7, 'Sam': 9}.</a:t>
+            </a:r>
+          </a:p>
+        </p:txBody>
+      </p:sp>
+    </p:spTree>
+  </p:cSld>
+  <p:clrMapOvr>
+    <a:masterClrMapping/>
+  </p:clrMapOvr>
+</p:sld>
+</file>
+
+<file path=ppt/slides/slide11.xml><?xml version="1.0" encoding="utf-8"?>
+<p:sld xmlns:a="http://schemas.openxmlformats.org/drawingml/2006/main" xmlns:p="http://schemas.openxmlformats.org/presentationml/2006/main" xmlns:r="http://schemas.openxmlformats.org/officeDocument/2006/relationships">
+  <p:cSld>
+    <p:bg>
+      <p:bgPr>
+        <a:solidFill>
+          <a:srgbClr val="FFFFFF"/>
+        </a:solidFill>
+        <a:effectLst/>
+      </p:bgPr>
+    </p:bg>
+    <p:spTree>
+      <p:nvGrpSpPr>
+        <p:cNvPr id="1" name=""/>
+        <p:cNvGrpSpPr/>
+        <p:nvPr/>
+      </p:nvGrpSpPr>
+      <p:grpSpPr/>
+      <p:sp>
+        <p:nvSpPr>
+          <p:cNvPr id="2" name="TextBox 1"/>
+          <p:cNvSpPr txBox="1"/>
+          <p:nvPr/>
+        </p:nvSpPr>
+        <p:spPr>
+          <a:xfrm>
+            <a:off x="548640" y="320040"/>
+            <a:ext cx="11094415" cy="274320"/>
+          </a:xfrm>
+          <a:prstGeom prst="rect">
+            <a:avLst/>
+          </a:prstGeom>
+          <a:noFill/>
+        </p:spPr>
+        <p:txBody>
+          <a:bodyPr wrap="square" anchor="t" lIns="0" rIns="0" tIns="0" bIns="0"/>
+          <a:lstStyle/>
+          <a:p>
+            <a:pPr algn="l"/>
+            <a:r>
+              <a:rPr sz="1100" b="1" i="0">
+                <a:solidFill>
+                  <a:srgbClr val="54595D"/>
+                </a:solidFill>
+                <a:latin typeface="Calibri"/>
+              </a:rPr>
+              <a:t>CORE COMPONENT  ·  Core Paper 1</a:t>
+            </a:r>
+          </a:p>
+        </p:txBody>
+      </p:sp>
+      <p:sp>
+        <p:nvSpPr>
+          <p:cNvPr id="3" name="TextBox 2"/>
+          <p:cNvSpPr txBox="1"/>
+          <p:nvPr/>
+        </p:nvSpPr>
+        <p:spPr>
+          <a:xfrm>
+            <a:off x="548640" y="566928"/>
+            <a:ext cx="11094415" cy="822960"/>
+          </a:xfrm>
+          <a:prstGeom prst="rect">
+            <a:avLst/>
+          </a:prstGeom>
+          <a:noFill/>
+        </p:spPr>
+        <p:txBody>
+          <a:bodyPr wrap="square" anchor="ctr" lIns="0" rIns="0" tIns="0" bIns="0"/>
+          <a:lstStyle/>
+          <a:p>
+            <a:pPr algn="l"/>
+            <a:r>
+              <a:rPr sz="3200" b="1" i="0">
+                <a:solidFill>
+                  <a:srgbClr val="03306E"/>
+                </a:solidFill>
+                <a:latin typeface="Cambria"/>
+              </a:rPr>
+              <a:t>Data structures</a:t>
+            </a:r>
+          </a:p>
+        </p:txBody>
+      </p:sp>
+      <p:sp>
+        <p:nvSpPr>
+          <p:cNvPr id="4" name="TextBox 3"/>
+          <p:cNvSpPr txBox="1"/>
+          <p:nvPr/>
+        </p:nvSpPr>
+        <p:spPr>
+          <a:xfrm>
+            <a:off x="548640" y="6446520"/>
+            <a:ext cx="8229600" cy="274320"/>
+          </a:xfrm>
+          <a:prstGeom prst="rect">
+            <a:avLst/>
+          </a:prstGeom>
+          <a:noFill/>
+        </p:spPr>
+        <p:txBody>
+          <a:bodyPr wrap="square" anchor="t" lIns="0" rIns="0" tIns="0" bIns="0"/>
+          <a:lstStyle/>
+          <a:p>
+            <a:pPr algn="l"/>
+            <a:r>
+              <a:rPr sz="1000" b="0" i="0">
+                <a:solidFill>
+                  <a:srgbClr val="54595D"/>
+                </a:solidFill>
+                <a:latin typeface="Calibri"/>
+              </a:rPr>
+              <a:t>Digital Software Development T Level  ·  Data Types, Variables and Data Structures</a:t>
+            </a:r>
+          </a:p>
+        </p:txBody>
+      </p:sp>
+      <p:sp>
+        <p:nvSpPr>
+          <p:cNvPr id="5" name="TextBox 4"/>
+          <p:cNvSpPr txBox="1"/>
+          <p:nvPr/>
+        </p:nvSpPr>
+        <p:spPr>
+          <a:xfrm>
+            <a:off x="10728655" y="6446520"/>
+            <a:ext cx="914400" cy="274320"/>
+          </a:xfrm>
+          <a:prstGeom prst="rect">
+            <a:avLst/>
+          </a:prstGeom>
+          <a:noFill/>
+        </p:spPr>
+        <p:txBody>
+          <a:bodyPr wrap="square" anchor="t" lIns="0" rIns="0" tIns="0" bIns="0"/>
+          <a:lstStyle/>
+          <a:p>
+            <a:pPr algn="r"/>
+            <a:r>
+              <a:rPr sz="1000" b="0" i="0">
+                <a:solidFill>
+                  <a:srgbClr val="54595D"/>
+                </a:solidFill>
+                <a:latin typeface="Calibri"/>
+              </a:rPr>
+              <a:t>11</a:t>
+            </a:r>
+          </a:p>
+        </p:txBody>
+      </p:sp>
+      <p:graphicFrame>
+        <p:nvGraphicFramePr>
+          <p:cNvPr id="6" name="Table 5"/>
+          <p:cNvGraphicFramePr>
+            <a:graphicFrameLocks noGrp="1"/>
+          </p:cNvGraphicFramePr>
+          <p:nvPr/>
+        </p:nvGraphicFramePr>
+        <p:xfrm>
+          <a:off x="548640" y="1600200"/>
+          <a:ext cx="11094414" cy="3977640"/>
+        </p:xfrm>
+        <a:graphic>
+          <a:graphicData uri="http://schemas.openxmlformats.org/drawingml/2006/table">
+            <a:tbl>
+              <a:tblPr firstRow="1" bandRow="1">
+                <a:tableStyleId>{5C22544A-7EE6-4342-B048-85BDC9FD1C3A}</a:tableStyleId>
+              </a:tblPr>
+              <a:tblGrid>
+                <a:gridCol w="1912830"/>
+                <a:gridCol w="4845836"/>
+                <a:gridCol w="4335748"/>
+              </a:tblGrid>
+              <a:tr h="994410">
+                <a:tc>
+                  <a:txBody>
+                    <a:bodyPr wrap="square"/>
+                    <a:lstStyle/>
+                    <a:p>
+                      <a:r>
+                        <a:rPr sz="1600" b="1">
+                          <a:solidFill>
+                            <a:srgbClr val="FFFFFF"/>
+                          </a:solidFill>
+                          <a:latin typeface="Calibri"/>
+                        </a:rPr>
+                        <a:t>Structure</a:t>
+                      </a:r>
+                    </a:p>
+                  </a:txBody>
+                  <a:tcPr marL="91440" marR="91440" anchor="ctr">
+                    <a:solidFill>
+                      <a:srgbClr val="03306E"/>
+                    </a:solidFill>
+                  </a:tcPr>
+                </a:tc>
+                <a:tc>
+                  <a:txBody>
+                    <a:bodyPr wrap="square"/>
+                    <a:lstStyle/>
+                    <a:p>
+                      <a:r>
+                        <a:rPr sz="1600" b="1">
+                          <a:solidFill>
+                            <a:srgbClr val="FFFFFF"/>
+                          </a:solidFill>
+                          <a:latin typeface="Calibri"/>
+                        </a:rPr>
+                        <a:t>What it is</a:t>
+                      </a:r>
+                    </a:p>
+                  </a:txBody>
+                  <a:tcPr marL="91440" marR="91440" anchor="ctr">
+                    <a:solidFill>
+                      <a:srgbClr val="03306E"/>
+                    </a:solidFill>
+                  </a:tcPr>
+                </a:tc>
+                <a:tc>
+                  <a:txBody>
+                    <a:bodyPr wrap="square"/>
+                    <a:lstStyle/>
+                    <a:p>
+                      <a:r>
+                        <a:rPr sz="1600" b="1">
+                          <a:solidFill>
+                            <a:srgbClr val="FFFFFF"/>
+                          </a:solidFill>
+                          <a:latin typeface="Calibri"/>
+                        </a:rPr>
+                        <a:t>Use it for</a:t>
+                      </a:r>
+                    </a:p>
+                  </a:txBody>
+                  <a:tcPr marL="91440" marR="91440" anchor="ctr">
+                    <a:solidFill>
+                      <a:srgbClr val="03306E"/>
+                    </a:solidFill>
+                  </a:tcPr>
+                </a:tc>
+              </a:tr>
+              <a:tr h="994410">
+                <a:tc>
+                  <a:txBody>
+                    <a:bodyPr wrap="square"/>
+                    <a:lstStyle/>
+                    <a:p>
+                      <a:r>
+                        <a:rPr sz="1600" b="1">
+                          <a:solidFill>
+                            <a:srgbClr val="03306E"/>
+                          </a:solidFill>
+                          <a:latin typeface="Calibri"/>
+                        </a:rPr>
+                        <a:t>List</a:t>
+                      </a:r>
+                    </a:p>
+                  </a:txBody>
+                  <a:tcPr marL="91440" marR="91440" anchor="ctr">
+                    <a:solidFill>
+                      <a:srgbClr val="FFFFFF"/>
+                    </a:solidFill>
+                  </a:tcPr>
+                </a:tc>
+                <a:tc>
+                  <a:txBody>
+                    <a:bodyPr wrap="square"/>
+                    <a:lstStyle/>
+                    <a:p>
+                      <a:r>
+                        <a:rPr sz="1600" b="0">
+                          <a:solidFill>
+                            <a:srgbClr val="202122"/>
+                          </a:solidFill>
+                          <a:latin typeface="Calibri"/>
+                        </a:rPr>
+                        <a:t>Ordered, changeable collection: scores = [12, 7, 9]</a:t>
+                      </a:r>
+                    </a:p>
+                  </a:txBody>
+                  <a:tcPr marL="91440" marR="91440" anchor="ctr">
+                    <a:solidFill>
+                      <a:srgbClr val="FFFFFF"/>
+                    </a:solidFill>
+                  </a:tcPr>
+                </a:tc>
+                <a:tc>
+                  <a:txBody>
+                    <a:bodyPr wrap="square"/>
+                    <a:lstStyle/>
+                    <a:p>
+                      <a:r>
+                        <a:rPr sz="1600" b="0">
+                          <a:solidFill>
+                            <a:srgbClr val="202122"/>
+                          </a:solidFill>
+                          <a:latin typeface="Calibri"/>
+                        </a:rPr>
+                        <a:t>A group of items you add to or sort</a:t>
+                      </a:r>
+                    </a:p>
+                  </a:txBody>
+                  <a:tcPr marL="91440" marR="91440" anchor="ctr">
+                    <a:solidFill>
+                      <a:srgbClr val="FFFFFF"/>
+                    </a:solidFill>
+                  </a:tcPr>
+                </a:tc>
+              </a:tr>
+              <a:tr h="994410">
+                <a:tc>
+                  <a:txBody>
+                    <a:bodyPr wrap="square"/>
+                    <a:lstStyle/>
+                    <a:p>
+                      <a:r>
+                        <a:rPr sz="1600" b="1">
+                          <a:solidFill>
+                            <a:srgbClr val="03306E"/>
+                          </a:solidFill>
+                          <a:latin typeface="Calibri"/>
+                        </a:rPr>
+                        <a:t>Array</a:t>
+                      </a:r>
+                    </a:p>
+                  </a:txBody>
+                  <a:tcPr marL="91440" marR="91440" anchor="ctr">
+                    <a:solidFill>
+                      <a:srgbClr val="EAF3FF"/>
+                    </a:solidFill>
+                  </a:tcPr>
+                </a:tc>
+                <a:tc>
+                  <a:txBody>
+                    <a:bodyPr wrap="square"/>
+                    <a:lstStyle/>
+                    <a:p>
+                      <a:r>
+                        <a:rPr sz="1600" b="0">
+                          <a:solidFill>
+                            <a:srgbClr val="202122"/>
+                          </a:solidFill>
+                          <a:latin typeface="Calibri"/>
+                        </a:rPr>
+                        <a:t>Ordered collection of items of the same type</a:t>
+                      </a:r>
+                    </a:p>
+                  </a:txBody>
+                  <a:tcPr marL="91440" marR="91440" anchor="ctr">
+                    <a:solidFill>
+                      <a:srgbClr val="EAF3FF"/>
+                    </a:solidFill>
+                  </a:tcPr>
+                </a:tc>
+                <a:tc>
+                  <a:txBody>
+                    <a:bodyPr wrap="square"/>
+                    <a:lstStyle/>
+                    <a:p>
+                      <a:r>
+                        <a:rPr sz="1600" b="0">
+                          <a:solidFill>
+                            <a:srgbClr val="202122"/>
+                          </a:solidFill>
+                          <a:latin typeface="Calibri"/>
+                        </a:rPr>
+                        <a:t>Fixed sets of values, e.g. sensor readings</a:t>
+                      </a:r>
+                    </a:p>
+                  </a:txBody>
+                  <a:tcPr marL="91440" marR="91440" anchor="ctr">
+                    <a:solidFill>
+                      <a:srgbClr val="EAF3FF"/>
+                    </a:solidFill>
+                  </a:tcPr>
+                </a:tc>
+              </a:tr>
+              <a:tr h="994410">
+                <a:tc>
+                  <a:txBody>
+                    <a:bodyPr wrap="square"/>
+                    <a:lstStyle/>
+                    <a:p>
+                      <a:r>
+                        <a:rPr sz="1600" b="1">
+                          <a:solidFill>
+                            <a:srgbClr val="03306E"/>
+                          </a:solidFill>
+                          <a:latin typeface="Calibri"/>
+                        </a:rPr>
+                        <a:t>Dictionary</a:t>
+                      </a:r>
+                    </a:p>
+                  </a:txBody>
+                  <a:tcPr marL="91440" marR="91440" anchor="ctr">
+                    <a:solidFill>
+                      <a:srgbClr val="FFFFFF"/>
+                    </a:solidFill>
+                  </a:tcPr>
+                </a:tc>
+                <a:tc>
+                  <a:txBody>
+                    <a:bodyPr wrap="square"/>
+                    <a:lstStyle/>
+                    <a:p>
+                      <a:r>
+                        <a:rPr sz="1600" b="0">
+                          <a:solidFill>
+                            <a:srgbClr val="202122"/>
+                          </a:solidFill>
+                          <a:latin typeface="Calibri"/>
+                        </a:rPr>
+                        <a:t>Key and value pairs: user = {'name': 'Ali', 'age': 17}</a:t>
+                      </a:r>
+                    </a:p>
+                  </a:txBody>
+                  <a:tcPr marL="91440" marR="91440" anchor="ctr">
+                    <a:solidFill>
+                      <a:srgbClr val="FFFFFF"/>
+                    </a:solidFill>
+                  </a:tcPr>
+                </a:tc>
+                <a:tc>
+                  <a:txBody>
+                    <a:bodyPr wrap="square"/>
+                    <a:lstStyle/>
+                    <a:p>
+                      <a:r>
+                        <a:rPr sz="1600" b="0">
+                          <a:solidFill>
+                            <a:srgbClr val="202122"/>
+                          </a:solidFill>
+                          <a:latin typeface="Calibri"/>
+                        </a:rPr>
+                        <a:t>Looking values up by a key</a:t>
+                      </a:r>
+                    </a:p>
+                  </a:txBody>
+                  <a:tcPr marL="91440" marR="91440" anchor="ctr">
+                    <a:solidFill>
+                      <a:srgbClr val="FFFFFF"/>
+                    </a:solidFill>
+                  </a:tcPr>
+                </a:tc>
+              </a:tr>
+            </a:tbl>
+          </a:graphicData>
+        </a:graphic>
+      </p:graphicFrame>
+      <p:sp>
+        <p:nvSpPr>
+          <p:cNvPr id="7" name="TextBox 6"/>
+          <p:cNvSpPr txBox="1"/>
+          <p:nvPr/>
+        </p:nvSpPr>
+        <p:spPr>
+          <a:xfrm>
+            <a:off x="548640" y="5715000"/>
+            <a:ext cx="11094415" cy="457200"/>
+          </a:xfrm>
+          <a:prstGeom prst="rect">
+            <a:avLst/>
+          </a:prstGeom>
+          <a:noFill/>
+        </p:spPr>
+        <p:txBody>
+          <a:bodyPr wrap="square" anchor="t" lIns="0" rIns="0" tIns="0" bIns="0"/>
+          <a:lstStyle/>
+          <a:p>
+            <a:pPr algn="l"/>
+            <a:r>
+              <a:rPr sz="1300" b="0" i="1">
+                <a:solidFill>
+                  <a:srgbClr val="54595D"/>
+                </a:solidFill>
+                <a:latin typeface="Calibri"/>
+              </a:rPr>
+              <a:t>Useful list methods: append(), insert(), remove(), pop(), sort(), index(), count(), len(), in.</a:t>
+            </a:r>
+          </a:p>
+        </p:txBody>
+      </p:sp>
+    </p:spTree>
+  </p:cSld>
+  <p:clrMapOvr>
+    <a:masterClrMapping/>
+  </p:clrMapOvr>
+</p:sld>
+</file>
+
+<file path=ppt/slides/slide12.xml><?xml version="1.0" encoding="utf-8"?>
+<p:sld xmlns:a="http://schemas.openxmlformats.org/drawingml/2006/main" xmlns:p="http://schemas.openxmlformats.org/presentationml/2006/main" xmlns:r="http://schemas.openxmlformats.org/officeDocument/2006/relationships">
+  <p:cSld>
+    <p:bg>
+      <p:bgPr>
+        <a:solidFill>
+          <a:srgbClr val="FFFFFF"/>
+        </a:solidFill>
+        <a:effectLst/>
+      </p:bgPr>
+    </p:bg>
+    <p:spTree>
+      <p:nvGrpSpPr>
+        <p:cNvPr id="1" name=""/>
+        <p:cNvGrpSpPr/>
+        <p:nvPr/>
+      </p:nvGrpSpPr>
+      <p:grpSpPr/>
+      <p:sp>
+        <p:nvSpPr>
+          <p:cNvPr id="2" name="TextBox 1"/>
+          <p:cNvSpPr txBox="1"/>
+          <p:nvPr/>
+        </p:nvSpPr>
+        <p:spPr>
+          <a:xfrm>
+            <a:off x="548640" y="320040"/>
+            <a:ext cx="11094415" cy="274320"/>
+          </a:xfrm>
+          <a:prstGeom prst="rect">
+            <a:avLst/>
+          </a:prstGeom>
+          <a:noFill/>
+        </p:spPr>
+        <p:txBody>
+          <a:bodyPr wrap="square" anchor="t" lIns="0" rIns="0" tIns="0" bIns="0"/>
+          <a:lstStyle/>
+          <a:p>
+            <a:pPr algn="l"/>
+            <a:r>
+              <a:rPr sz="1100" b="1" i="0">
+                <a:solidFill>
+                  <a:srgbClr val="54595D"/>
+                </a:solidFill>
+                <a:latin typeface="Calibri"/>
+              </a:rPr>
+              <a:t>CORE COMPONENT  ·  Core Paper 1</a:t>
+            </a:r>
+          </a:p>
+        </p:txBody>
+      </p:sp>
+      <p:sp>
+        <p:nvSpPr>
+          <p:cNvPr id="3" name="TextBox 2"/>
+          <p:cNvSpPr txBox="1"/>
+          <p:nvPr/>
+        </p:nvSpPr>
+        <p:spPr>
+          <a:xfrm>
+            <a:off x="548640" y="566928"/>
+            <a:ext cx="11094415" cy="822960"/>
+          </a:xfrm>
+          <a:prstGeom prst="rect">
+            <a:avLst/>
+          </a:prstGeom>
+          <a:noFill/>
+        </p:spPr>
+        <p:txBody>
+          <a:bodyPr wrap="square" anchor="ctr" lIns="0" rIns="0" tIns="0" bIns="0"/>
+          <a:lstStyle/>
+          <a:p>
+            <a:pPr algn="l"/>
+            <a:r>
+              <a:rPr sz="3200" b="1" i="0">
+                <a:solidFill>
+                  <a:srgbClr val="03306E"/>
+                </a:solidFill>
+                <a:latin typeface="Cambria"/>
+              </a:rPr>
+              <a:t>Quick check: Data structures</a:t>
+            </a:r>
+          </a:p>
+        </p:txBody>
+      </p:sp>
+      <p:sp>
+        <p:nvSpPr>
+          <p:cNvPr id="4" name="TextBox 3"/>
+          <p:cNvSpPr txBox="1"/>
+          <p:nvPr/>
+        </p:nvSpPr>
+        <p:spPr>
+          <a:xfrm>
+            <a:off x="548640" y="6446520"/>
+            <a:ext cx="8229600" cy="274320"/>
+          </a:xfrm>
+          <a:prstGeom prst="rect">
+            <a:avLst/>
+          </a:prstGeom>
+          <a:noFill/>
+        </p:spPr>
+        <p:txBody>
+          <a:bodyPr wrap="square" anchor="t" lIns="0" rIns="0" tIns="0" bIns="0"/>
+          <a:lstStyle/>
+          <a:p>
+            <a:pPr algn="l"/>
+            <a:r>
+              <a:rPr sz="1000" b="0" i="0">
+                <a:solidFill>
+                  <a:srgbClr val="54595D"/>
+                </a:solidFill>
+                <a:latin typeface="Calibri"/>
+              </a:rPr>
+              <a:t>Digital Software Development T Level  ·  Data Types, Variables and Data Structures</a:t>
+            </a:r>
+          </a:p>
+        </p:txBody>
+      </p:sp>
+      <p:sp>
+        <p:nvSpPr>
+          <p:cNvPr id="5" name="TextBox 4"/>
+          <p:cNvSpPr txBox="1"/>
+          <p:nvPr/>
+        </p:nvSpPr>
+        <p:spPr>
+          <a:xfrm>
+            <a:off x="10728655" y="6446520"/>
+            <a:ext cx="914400" cy="274320"/>
+          </a:xfrm>
+          <a:prstGeom prst="rect">
+            <a:avLst/>
+          </a:prstGeom>
+          <a:noFill/>
+        </p:spPr>
+        <p:txBody>
+          <a:bodyPr wrap="square" anchor="t" lIns="0" rIns="0" tIns="0" bIns="0"/>
+          <a:lstStyle/>
+          <a:p>
+            <a:pPr algn="r"/>
+            <a:r>
+              <a:rPr sz="1000" b="0" i="0">
+                <a:solidFill>
+                  <a:srgbClr val="54595D"/>
+                </a:solidFill>
+                <a:latin typeface="Calibri"/>
+              </a:rPr>
+              <a:t>12</a:t>
+            </a:r>
+          </a:p>
+        </p:txBody>
+      </p:sp>
+      <p:sp>
+        <p:nvSpPr>
+          <p:cNvPr id="6" name="Oval 5"/>
+          <p:cNvSpPr/>
+          <p:nvPr/>
+        </p:nvSpPr>
+        <p:spPr>
+          <a:xfrm>
+            <a:off x="548640" y="1691640"/>
+            <a:ext cx="502920" cy="502920"/>
+          </a:xfrm>
+          <a:prstGeom prst="ellipse">
+            <a:avLst/>
+          </a:prstGeom>
+          <a:solidFill>
+            <a:srgbClr val="F2B705"/>
+          </a:solidFill>
+          <a:ln>
+            <a:noFill/>
+          </a:ln>
+          <a:effectLst/>
+        </p:spPr>
+        <p:style>
+          <a:lnRef idx="1">
+            <a:schemeClr val="accent1"/>
+          </a:lnRef>
+          <a:fillRef idx="3">
+            <a:schemeClr val="accent1"/>
+          </a:fillRef>
+          <a:effectRef idx="2">
+            <a:schemeClr val="accent1"/>
+          </a:effectRef>
+          <a:fontRef idx="minor">
+            <a:schemeClr val="lt1"/>
+          </a:fontRef>
+        </p:style>
+        <p:txBody>
+          <a:bodyPr rtlCol="0" anchor="ctr" lIns="0" rIns="0" tIns="0" bIns="0"/>
+          <a:lstStyle/>
+          <a:p>
+            <a:pPr algn="ctr"/>
+            <a:r>
+              <a:rPr sz="1600" b="1">
+                <a:solidFill>
+                  <a:srgbClr val="202122"/>
+                </a:solidFill>
+                <a:latin typeface="Calibri"/>
+              </a:rPr>
+              <a:t>1</a:t>
+            </a:r>
+          </a:p>
+        </p:txBody>
+      </p:sp>
+      <p:sp>
+        <p:nvSpPr>
+          <p:cNvPr id="7" name="TextBox 6"/>
+          <p:cNvSpPr txBox="1"/>
+          <p:nvPr/>
+        </p:nvSpPr>
+        <p:spPr>
+          <a:xfrm>
+            <a:off x="1371600" y="1645920"/>
+            <a:ext cx="10271455" cy="1188720"/>
+          </a:xfrm>
+          <a:prstGeom prst="rect">
+            <a:avLst/>
+          </a:prstGeom>
+          <a:noFill/>
+        </p:spPr>
+        <p:txBody>
+          <a:bodyPr wrap="square" anchor="t" lIns="0" rIns="0" tIns="0" bIns="0"/>
+          <a:lstStyle/>
+          <a:p>
+            <a:pPr algn="l"/>
+            <a:r>
+              <a:rPr sz="2400" b="0" i="0">
+                <a:solidFill>
+                  <a:srgbClr val="202122"/>
+                </a:solidFill>
+                <a:latin typeface="Calibri"/>
+              </a:rPr>
+              <a:t>What index is the first item in a Python list?</a:t>
+            </a:r>
+          </a:p>
+        </p:txBody>
+      </p:sp>
+      <p:sp>
+        <p:nvSpPr>
+          <p:cNvPr id="8" name="Oval 7"/>
+          <p:cNvSpPr/>
+          <p:nvPr/>
+        </p:nvSpPr>
+        <p:spPr>
+          <a:xfrm>
+            <a:off x="548640" y="3108960"/>
+            <a:ext cx="502920" cy="502920"/>
+          </a:xfrm>
+          <a:prstGeom prst="ellipse">
+            <a:avLst/>
+          </a:prstGeom>
+          <a:solidFill>
+            <a:srgbClr val="F2B705"/>
+          </a:solidFill>
+          <a:ln>
+            <a:noFill/>
+          </a:ln>
+          <a:effectLst/>
+        </p:spPr>
+        <p:style>
+          <a:lnRef idx="1">
+            <a:schemeClr val="accent1"/>
+          </a:lnRef>
+          <a:fillRef idx="3">
+            <a:schemeClr val="accent1"/>
+          </a:fillRef>
+          <a:effectRef idx="2">
+            <a:schemeClr val="accent1"/>
+          </a:effectRef>
+          <a:fontRef idx="minor">
+            <a:schemeClr val="lt1"/>
+          </a:fontRef>
+        </p:style>
+        <p:txBody>
+          <a:bodyPr rtlCol="0" anchor="ctr" lIns="0" rIns="0" tIns="0" bIns="0"/>
+          <a:lstStyle/>
+          <a:p>
+            <a:pPr algn="ctr"/>
+            <a:r>
+              <a:rPr sz="1600" b="1">
+                <a:solidFill>
+                  <a:srgbClr val="202122"/>
+                </a:solidFill>
+                <a:latin typeface="Calibri"/>
+              </a:rPr>
+              <a:t>2</a:t>
+            </a:r>
+          </a:p>
+        </p:txBody>
+      </p:sp>
+      <p:sp>
+        <p:nvSpPr>
+          <p:cNvPr id="9" name="TextBox 8"/>
+          <p:cNvSpPr txBox="1"/>
+          <p:nvPr/>
+        </p:nvSpPr>
+        <p:spPr>
+          <a:xfrm>
+            <a:off x="1371600" y="3063240"/>
+            <a:ext cx="10271455" cy="1188720"/>
+          </a:xfrm>
+          <a:prstGeom prst="rect">
+            <a:avLst/>
+          </a:prstGeom>
+          <a:noFill/>
+        </p:spPr>
+        <p:txBody>
+          <a:bodyPr wrap="square" anchor="t" lIns="0" rIns="0" tIns="0" bIns="0"/>
+          <a:lstStyle/>
+          <a:p>
+            <a:pPr algn="l"/>
+            <a:r>
+              <a:rPr sz="2400" b="0" i="0">
+                <a:solidFill>
+                  <a:srgbClr val="202122"/>
+                </a:solidFill>
+                <a:latin typeface="Calibri"/>
+              </a:rPr>
+              <a:t>How do you add an item to the end of a list?</a:t>
+            </a:r>
+          </a:p>
+        </p:txBody>
+      </p:sp>
+      <p:sp>
+        <p:nvSpPr>
+          <p:cNvPr id="10" name="Oval 9"/>
+          <p:cNvSpPr/>
+          <p:nvPr/>
+        </p:nvSpPr>
+        <p:spPr>
+          <a:xfrm>
+            <a:off x="548640" y="4526280"/>
+            <a:ext cx="502920" cy="502920"/>
+          </a:xfrm>
+          <a:prstGeom prst="ellipse">
+            <a:avLst/>
+          </a:prstGeom>
+          <a:solidFill>
+            <a:srgbClr val="F2B705"/>
+          </a:solidFill>
+          <a:ln>
+            <a:noFill/>
+          </a:ln>
+          <a:effectLst/>
+        </p:spPr>
+        <p:style>
+          <a:lnRef idx="1">
+            <a:schemeClr val="accent1"/>
+          </a:lnRef>
+          <a:fillRef idx="3">
+            <a:schemeClr val="accent1"/>
+          </a:fillRef>
+          <a:effectRef idx="2">
+            <a:schemeClr val="accent1"/>
+          </a:effectRef>
+          <a:fontRef idx="minor">
+            <a:schemeClr val="lt1"/>
+          </a:fontRef>
+        </p:style>
+        <p:txBody>
+          <a:bodyPr rtlCol="0" anchor="ctr" lIns="0" rIns="0" tIns="0" bIns="0"/>
+          <a:lstStyle/>
+          <a:p>
+            <a:pPr algn="ctr"/>
+            <a:r>
+              <a:rPr sz="1600" b="1">
+                <a:solidFill>
+                  <a:srgbClr val="202122"/>
+                </a:solidFill>
+                <a:latin typeface="Calibri"/>
+              </a:rPr>
+              <a:t>3</a:t>
+            </a:r>
+          </a:p>
+        </p:txBody>
+      </p:sp>
+      <p:sp>
+        <p:nvSpPr>
+          <p:cNvPr id="11" name="TextBox 10"/>
+          <p:cNvSpPr txBox="1"/>
+          <p:nvPr/>
+        </p:nvSpPr>
+        <p:spPr>
+          <a:xfrm>
+            <a:off x="1371600" y="4480560"/>
+            <a:ext cx="10271455" cy="1188720"/>
+          </a:xfrm>
+          <a:prstGeom prst="rect">
+            <a:avLst/>
+          </a:prstGeom>
+          <a:noFill/>
+        </p:spPr>
+        <p:txBody>
+          <a:bodyPr wrap="square" anchor="t" lIns="0" rIns="0" tIns="0" bIns="0"/>
+          <a:lstStyle/>
+          <a:p>
+            <a:pPr algn="l"/>
+            <a:r>
+              <a:rPr sz="2400" b="0" i="0">
+                <a:solidFill>
+                  <a:srgbClr val="202122"/>
+                </a:solidFill>
+                <a:latin typeface="Calibri"/>
+              </a:rPr>
+              <a:t>When is a dictionary better than a list?</a:t>
+            </a:r>
+          </a:p>
+        </p:txBody>
+      </p:sp>
+      <p:sp>
+        <p:nvSpPr>
+          <p:cNvPr id="12" name="TextBox 11"/>
+          <p:cNvSpPr txBox="1"/>
+          <p:nvPr/>
+        </p:nvSpPr>
+        <p:spPr>
+          <a:xfrm>
+            <a:off x="548640" y="5852160"/>
+            <a:ext cx="11094415" cy="365760"/>
+          </a:xfrm>
+          <a:prstGeom prst="rect">
+            <a:avLst/>
+          </a:prstGeom>
+          <a:noFill/>
+        </p:spPr>
+        <p:txBody>
+          <a:bodyPr wrap="square" anchor="t" lIns="0" rIns="0" tIns="0" bIns="0"/>
+          <a:lstStyle/>
+          <a:p>
+            <a:pPr algn="l"/>
+            <a:r>
+              <a:rPr sz="1300" b="0" i="1">
+                <a:solidFill>
+                  <a:srgbClr val="54595D"/>
+                </a:solidFill>
+                <a:latin typeface="Calibri"/>
+              </a:rPr>
+              <a:t>Answer on mini whiteboards or in your book. Answers are in the speaker notes.</a:t>
+            </a:r>
+          </a:p>
+        </p:txBody>
+      </p:sp>
+    </p:spTree>
+  </p:cSld>
+  <p:clrMapOvr>
+    <a:masterClrMapping/>
+  </p:clrMapOvr>
+</p:sld>
+</file>
+
+<file path=ppt/slides/slide13.xml><?xml version="1.0" encoding="utf-8"?>
+<p:sld xmlns:a="http://schemas.openxmlformats.org/drawingml/2006/main" xmlns:p="http://schemas.openxmlformats.org/presentationml/2006/main" xmlns:r="http://schemas.openxmlformats.org/officeDocument/2006/relationships">
+  <p:cSld>
+    <p:bg>
+      <p:bgPr>
+        <a:solidFill>
+          <a:srgbClr val="FFFFFF"/>
+        </a:solidFill>
+        <a:effectLst/>
+      </p:bgPr>
+    </p:bg>
+    <p:spTree>
+      <p:nvGrpSpPr>
+        <p:cNvPr id="1" name=""/>
+        <p:cNvGrpSpPr/>
+        <p:nvPr/>
+      </p:nvGrpSpPr>
+      <p:grpSpPr/>
+      <p:sp>
+        <p:nvSpPr>
+          <p:cNvPr id="2" name="TextBox 1"/>
+          <p:cNvSpPr txBox="1"/>
+          <p:nvPr/>
+        </p:nvSpPr>
+        <p:spPr>
+          <a:xfrm>
+            <a:off x="548640" y="320040"/>
+            <a:ext cx="11094415" cy="274320"/>
+          </a:xfrm>
+          <a:prstGeom prst="rect">
+            <a:avLst/>
+          </a:prstGeom>
+          <a:noFill/>
+        </p:spPr>
+        <p:txBody>
+          <a:bodyPr wrap="square" anchor="t" lIns="0" rIns="0" tIns="0" bIns="0"/>
+          <a:lstStyle/>
+          <a:p>
+            <a:pPr algn="l"/>
+            <a:r>
+              <a:rPr sz="1100" b="1" i="0">
+                <a:solidFill>
+                  <a:srgbClr val="54595D"/>
+                </a:solidFill>
+                <a:latin typeface="Calibri"/>
+              </a:rPr>
+              <a:t>CORE COMPONENT  ·  Core Paper 1</a:t>
+            </a:r>
+          </a:p>
+        </p:txBody>
+      </p:sp>
+      <p:sp>
+        <p:nvSpPr>
+          <p:cNvPr id="3" name="TextBox 2"/>
+          <p:cNvSpPr txBox="1"/>
+          <p:nvPr/>
+        </p:nvSpPr>
+        <p:spPr>
+          <a:xfrm>
+            <a:off x="548640" y="566928"/>
+            <a:ext cx="11094415" cy="822960"/>
+          </a:xfrm>
+          <a:prstGeom prst="rect">
+            <a:avLst/>
+          </a:prstGeom>
+          <a:noFill/>
+        </p:spPr>
+        <p:txBody>
+          <a:bodyPr wrap="square" anchor="ctr" lIns="0" rIns="0" tIns="0" bIns="0"/>
+          <a:lstStyle/>
+          <a:p>
+            <a:pPr algn="l"/>
+            <a:r>
+              <a:rPr sz="3200" b="1" i="0">
+                <a:solidFill>
+                  <a:srgbClr val="03306E"/>
+                </a:solidFill>
+                <a:latin typeface="Cambria"/>
+              </a:rPr>
+              <a:t>Check your understanding</a:t>
+            </a:r>
+          </a:p>
+        </p:txBody>
+      </p:sp>
+      <p:sp>
+        <p:nvSpPr>
+          <p:cNvPr id="4" name="TextBox 3"/>
+          <p:cNvSpPr txBox="1"/>
+          <p:nvPr/>
+        </p:nvSpPr>
+        <p:spPr>
+          <a:xfrm>
+            <a:off x="548640" y="6446520"/>
+            <a:ext cx="8229600" cy="274320"/>
+          </a:xfrm>
+          <a:prstGeom prst="rect">
+            <a:avLst/>
+          </a:prstGeom>
+          <a:noFill/>
+        </p:spPr>
+        <p:txBody>
+          <a:bodyPr wrap="square" anchor="t" lIns="0" rIns="0" tIns="0" bIns="0"/>
+          <a:lstStyle/>
+          <a:p>
+            <a:pPr algn="l"/>
+            <a:r>
+              <a:rPr sz="1000" b="0" i="0">
+                <a:solidFill>
+                  <a:srgbClr val="54595D"/>
+                </a:solidFill>
+                <a:latin typeface="Calibri"/>
+              </a:rPr>
+              <a:t>Digital Software Development T Level  ·  Data Types, Variables and Data Structures</a:t>
+            </a:r>
+          </a:p>
+        </p:txBody>
+      </p:sp>
+      <p:sp>
+        <p:nvSpPr>
+          <p:cNvPr id="5" name="TextBox 4"/>
+          <p:cNvSpPr txBox="1"/>
+          <p:nvPr/>
+        </p:nvSpPr>
+        <p:spPr>
+          <a:xfrm>
+            <a:off x="10728655" y="6446520"/>
+            <a:ext cx="914400" cy="274320"/>
+          </a:xfrm>
+          <a:prstGeom prst="rect">
+            <a:avLst/>
+          </a:prstGeom>
+          <a:noFill/>
+        </p:spPr>
+        <p:txBody>
+          <a:bodyPr wrap="square" anchor="t" lIns="0" rIns="0" tIns="0" bIns="0"/>
+          <a:lstStyle/>
+          <a:p>
+            <a:pPr algn="r"/>
+            <a:r>
+              <a:rPr sz="1000" b="0" i="0">
+                <a:solidFill>
+                  <a:srgbClr val="54595D"/>
+                </a:solidFill>
+                <a:latin typeface="Calibri"/>
+              </a:rPr>
+              <a:t>13</a:t>
+            </a:r>
+          </a:p>
+        </p:txBody>
+      </p:sp>
+      <p:sp>
+        <p:nvSpPr>
+          <p:cNvPr id="6" name="Oval 5"/>
+          <p:cNvSpPr/>
+          <p:nvPr/>
+        </p:nvSpPr>
+        <p:spPr>
+          <a:xfrm>
+            <a:off x="548640" y="1618488"/>
+            <a:ext cx="411480" cy="411480"/>
+          </a:xfrm>
+          <a:prstGeom prst="ellipse">
+            <a:avLst/>
+          </a:prstGeom>
+          <a:solidFill>
+            <a:srgbClr val="F2B705"/>
+          </a:solidFill>
+          <a:ln>
+            <a:noFill/>
+          </a:ln>
+          <a:effectLst/>
+        </p:spPr>
+        <p:style>
+          <a:lnRef idx="1">
+            <a:schemeClr val="accent1"/>
+          </a:lnRef>
+          <a:fillRef idx="3">
+            <a:schemeClr val="accent1"/>
+          </a:fillRef>
+          <a:effectRef idx="2">
+            <a:schemeClr val="accent1"/>
+          </a:effectRef>
+          <a:fontRef idx="minor">
+            <a:schemeClr val="lt1"/>
+          </a:fontRef>
+        </p:style>
+        <p:txBody>
+          <a:bodyPr rtlCol="0" anchor="ctr" lIns="0" rIns="0" tIns="0" bIns="0"/>
+          <a:lstStyle/>
+          <a:p>
+            <a:pPr algn="ctr"/>
+            <a:r>
+              <a:rPr sz="1400" b="1">
+                <a:solidFill>
+                  <a:srgbClr val="202122"/>
+                </a:solidFill>
+                <a:latin typeface="Calibri"/>
+              </a:rPr>
+              <a:t>1</a:t>
+            </a:r>
+          </a:p>
+        </p:txBody>
+      </p:sp>
+      <p:sp>
+        <p:nvSpPr>
+          <p:cNvPr id="7" name="TextBox 6"/>
+          <p:cNvSpPr txBox="1"/>
+          <p:nvPr/>
+        </p:nvSpPr>
+        <p:spPr>
+          <a:xfrm>
+            <a:off x="1234440" y="1600200"/>
+            <a:ext cx="10408615" cy="791870"/>
+          </a:xfrm>
+          <a:prstGeom prst="rect">
+            <a:avLst/>
+          </a:prstGeom>
+          <a:noFill/>
+        </p:spPr>
+        <p:txBody>
+          <a:bodyPr wrap="square" anchor="t" lIns="0" rIns="0" tIns="0" bIns="0"/>
+          <a:lstStyle/>
+          <a:p>
+            <a:pPr algn="l"/>
+            <a:r>
+              <a:rPr sz="2200" b="0" i="0">
+                <a:solidFill>
+                  <a:srgbClr val="202122"/>
+                </a:solidFill>
+                <a:latin typeface="Calibri"/>
+              </a:rPr>
+              <a:t>What data type should store a price?</a:t>
+            </a:r>
+          </a:p>
+        </p:txBody>
+      </p:sp>
+      <p:sp>
+        <p:nvSpPr>
+          <p:cNvPr id="8" name="Oval 7"/>
+          <p:cNvSpPr/>
+          <p:nvPr/>
+        </p:nvSpPr>
+        <p:spPr>
+          <a:xfrm>
+            <a:off x="548640" y="2574950"/>
+            <a:ext cx="411480" cy="411480"/>
+          </a:xfrm>
+          <a:prstGeom prst="ellipse">
+            <a:avLst/>
+          </a:prstGeom>
+          <a:solidFill>
+            <a:srgbClr val="F2B705"/>
+          </a:solidFill>
+          <a:ln>
+            <a:noFill/>
+          </a:ln>
+          <a:effectLst/>
+        </p:spPr>
+        <p:style>
+          <a:lnRef idx="1">
+            <a:schemeClr val="accent1"/>
+          </a:lnRef>
+          <a:fillRef idx="3">
+            <a:schemeClr val="accent1"/>
+          </a:fillRef>
+          <a:effectRef idx="2">
+            <a:schemeClr val="accent1"/>
+          </a:effectRef>
+          <a:fontRef idx="minor">
+            <a:schemeClr val="lt1"/>
+          </a:fontRef>
+        </p:style>
+        <p:txBody>
+          <a:bodyPr rtlCol="0" anchor="ctr" lIns="0" rIns="0" tIns="0" bIns="0"/>
+          <a:lstStyle/>
+          <a:p>
+            <a:pPr algn="ctr"/>
+            <a:r>
+              <a:rPr sz="1400" b="1">
+                <a:solidFill>
+                  <a:srgbClr val="202122"/>
+                </a:solidFill>
+                <a:latin typeface="Calibri"/>
+              </a:rPr>
+              <a:t>2</a:t>
+            </a:r>
+          </a:p>
+        </p:txBody>
+      </p:sp>
+      <p:sp>
+        <p:nvSpPr>
+          <p:cNvPr id="9" name="TextBox 8"/>
+          <p:cNvSpPr txBox="1"/>
+          <p:nvPr/>
+        </p:nvSpPr>
+        <p:spPr>
+          <a:xfrm>
+            <a:off x="1234440" y="2556662"/>
+            <a:ext cx="10408615" cy="791870"/>
+          </a:xfrm>
+          <a:prstGeom prst="rect">
+            <a:avLst/>
+          </a:prstGeom>
+          <a:noFill/>
+        </p:spPr>
+        <p:txBody>
+          <a:bodyPr wrap="square" anchor="t" lIns="0" rIns="0" tIns="0" bIns="0"/>
+          <a:lstStyle/>
+          <a:p>
+            <a:pPr algn="l"/>
+            <a:r>
+              <a:rPr sz="2200" b="0" i="0">
+                <a:solidFill>
+                  <a:srgbClr val="202122"/>
+                </a:solidFill>
+                <a:latin typeface="Calibri"/>
+              </a:rPr>
+              <a:t>What does input() always return?</a:t>
+            </a:r>
+          </a:p>
+        </p:txBody>
+      </p:sp>
+      <p:sp>
+        <p:nvSpPr>
+          <p:cNvPr id="10" name="Oval 9"/>
+          <p:cNvSpPr/>
+          <p:nvPr/>
+        </p:nvSpPr>
+        <p:spPr>
+          <a:xfrm>
+            <a:off x="548640" y="3531412"/>
+            <a:ext cx="411480" cy="411480"/>
+          </a:xfrm>
+          <a:prstGeom prst="ellipse">
+            <a:avLst/>
+          </a:prstGeom>
+          <a:solidFill>
+            <a:srgbClr val="F2B705"/>
+          </a:solidFill>
+          <a:ln>
+            <a:noFill/>
+          </a:ln>
+          <a:effectLst/>
+        </p:spPr>
+        <p:style>
+          <a:lnRef idx="1">
+            <a:schemeClr val="accent1"/>
+          </a:lnRef>
+          <a:fillRef idx="3">
+            <a:schemeClr val="accent1"/>
+          </a:fillRef>
+          <a:effectRef idx="2">
+            <a:schemeClr val="accent1"/>
+          </a:effectRef>
+          <a:fontRef idx="minor">
+            <a:schemeClr val="lt1"/>
+          </a:fontRef>
+        </p:style>
+        <p:txBody>
+          <a:bodyPr rtlCol="0" anchor="ctr" lIns="0" rIns="0" tIns="0" bIns="0"/>
+          <a:lstStyle/>
+          <a:p>
+            <a:pPr algn="ctr"/>
+            <a:r>
+              <a:rPr sz="1400" b="1">
+                <a:solidFill>
+                  <a:srgbClr val="202122"/>
+                </a:solidFill>
+                <a:latin typeface="Calibri"/>
+              </a:rPr>
+              <a:t>3</a:t>
+            </a:r>
+          </a:p>
+        </p:txBody>
+      </p:sp>
+      <p:sp>
+        <p:nvSpPr>
+          <p:cNvPr id="11" name="TextBox 10"/>
+          <p:cNvSpPr txBox="1"/>
+          <p:nvPr/>
+        </p:nvSpPr>
+        <p:spPr>
+          <a:xfrm>
+            <a:off x="1234440" y="3513124"/>
+            <a:ext cx="10408615" cy="791870"/>
+          </a:xfrm>
+          <a:prstGeom prst="rect">
+            <a:avLst/>
+          </a:prstGeom>
+          <a:noFill/>
+        </p:spPr>
+        <p:txBody>
+          <a:bodyPr wrap="square" anchor="t" lIns="0" rIns="0" tIns="0" bIns="0"/>
+          <a:lstStyle/>
+          <a:p>
+            <a:pPr algn="l"/>
+            <a:r>
+              <a:rPr sz="2200" b="0" i="0">
+                <a:solidFill>
+                  <a:srgbClr val="202122"/>
+                </a:solidFill>
+                <a:latin typeface="Calibri"/>
+              </a:rPr>
+              <a:t>What is a local variable?</a:t>
+            </a:r>
+          </a:p>
+        </p:txBody>
+      </p:sp>
+      <p:sp>
+        <p:nvSpPr>
+          <p:cNvPr id="12" name="Oval 11"/>
+          <p:cNvSpPr/>
+          <p:nvPr/>
+        </p:nvSpPr>
+        <p:spPr>
+          <a:xfrm>
+            <a:off x="548640" y="4487875"/>
+            <a:ext cx="411480" cy="411480"/>
+          </a:xfrm>
+          <a:prstGeom prst="ellipse">
+            <a:avLst/>
+          </a:prstGeom>
+          <a:solidFill>
+            <a:srgbClr val="F2B705"/>
+          </a:solidFill>
+          <a:ln>
+            <a:noFill/>
+          </a:ln>
+          <a:effectLst/>
+        </p:spPr>
+        <p:style>
+          <a:lnRef idx="1">
+            <a:schemeClr val="accent1"/>
+          </a:lnRef>
+          <a:fillRef idx="3">
+            <a:schemeClr val="accent1"/>
+          </a:fillRef>
+          <a:effectRef idx="2">
+            <a:schemeClr val="accent1"/>
+          </a:effectRef>
+          <a:fontRef idx="minor">
+            <a:schemeClr val="lt1"/>
+          </a:fontRef>
+        </p:style>
+        <p:txBody>
+          <a:bodyPr rtlCol="0" anchor="ctr" lIns="0" rIns="0" tIns="0" bIns="0"/>
+          <a:lstStyle/>
+          <a:p>
+            <a:pPr algn="ctr"/>
+            <a:r>
+              <a:rPr sz="1400" b="1">
+                <a:solidFill>
+                  <a:srgbClr val="202122"/>
+                </a:solidFill>
+                <a:latin typeface="Calibri"/>
+              </a:rPr>
+              <a:t>4</a:t>
+            </a:r>
+          </a:p>
+        </p:txBody>
+      </p:sp>
+      <p:sp>
+        <p:nvSpPr>
+          <p:cNvPr id="13" name="TextBox 12"/>
+          <p:cNvSpPr txBox="1"/>
+          <p:nvPr/>
+        </p:nvSpPr>
+        <p:spPr>
+          <a:xfrm>
+            <a:off x="1234440" y="4469587"/>
+            <a:ext cx="10408615" cy="791870"/>
+          </a:xfrm>
+          <a:prstGeom prst="rect">
+            <a:avLst/>
+          </a:prstGeom>
+          <a:noFill/>
+        </p:spPr>
+        <p:txBody>
+          <a:bodyPr wrap="square" anchor="t" lIns="0" rIns="0" tIns="0" bIns="0"/>
+          <a:lstStyle/>
+          <a:p>
+            <a:pPr algn="l"/>
+            <a:r>
+              <a:rPr sz="2200" b="0" i="0">
+                <a:solidFill>
+                  <a:srgbClr val="202122"/>
+                </a:solidFill>
+                <a:latin typeface="Calibri"/>
+              </a:rPr>
+              <a:t>How do you add an item to the end of a list?</a:t>
+            </a:r>
+          </a:p>
+        </p:txBody>
+      </p:sp>
+      <p:sp>
+        <p:nvSpPr>
+          <p:cNvPr id="14" name="Oval 13"/>
+          <p:cNvSpPr/>
+          <p:nvPr/>
+        </p:nvSpPr>
+        <p:spPr>
+          <a:xfrm>
+            <a:off x="548640" y="5444337"/>
+            <a:ext cx="411480" cy="411480"/>
+          </a:xfrm>
+          <a:prstGeom prst="ellipse">
+            <a:avLst/>
+          </a:prstGeom>
+          <a:solidFill>
+            <a:srgbClr val="F2B705"/>
+          </a:solidFill>
+          <a:ln>
+            <a:noFill/>
+          </a:ln>
+          <a:effectLst/>
+        </p:spPr>
+        <p:style>
+          <a:lnRef idx="1">
+            <a:schemeClr val="accent1"/>
+          </a:lnRef>
+          <a:fillRef idx="3">
+            <a:schemeClr val="accent1"/>
+          </a:fillRef>
+          <a:effectRef idx="2">
+            <a:schemeClr val="accent1"/>
+          </a:effectRef>
+          <a:fontRef idx="minor">
+            <a:schemeClr val="lt1"/>
+          </a:fontRef>
+        </p:style>
+        <p:txBody>
+          <a:bodyPr rtlCol="0" anchor="ctr" lIns="0" rIns="0" tIns="0" bIns="0"/>
+          <a:lstStyle/>
+          <a:p>
+            <a:pPr algn="ctr"/>
+            <a:r>
+              <a:rPr sz="1400" b="1">
+                <a:solidFill>
+                  <a:srgbClr val="202122"/>
+                </a:solidFill>
+                <a:latin typeface="Calibri"/>
+              </a:rPr>
+              <a:t>5</a:t>
+            </a:r>
+          </a:p>
+        </p:txBody>
+      </p:sp>
+      <p:sp>
+        <p:nvSpPr>
+          <p:cNvPr id="15" name="TextBox 14"/>
+          <p:cNvSpPr txBox="1"/>
+          <p:nvPr/>
+        </p:nvSpPr>
+        <p:spPr>
+          <a:xfrm>
+            <a:off x="1234440" y="5426049"/>
+            <a:ext cx="10408615" cy="791870"/>
+          </a:xfrm>
+          <a:prstGeom prst="rect">
+            <a:avLst/>
+          </a:prstGeom>
+          <a:noFill/>
+        </p:spPr>
+        <p:txBody>
+          <a:bodyPr wrap="square" anchor="t" lIns="0" rIns="0" tIns="0" bIns="0"/>
+          <a:lstStyle/>
+          <a:p>
+            <a:pPr algn="l"/>
+            <a:r>
+              <a:rPr sz="2200" b="0" i="0">
+                <a:solidFill>
+                  <a:srgbClr val="202122"/>
+                </a:solidFill>
+                <a:latin typeface="Calibri"/>
+              </a:rPr>
+              <a:t>When is a dictionary better than a list?</a:t>
+            </a:r>
+          </a:p>
+        </p:txBody>
+      </p:sp>
+    </p:spTree>
+  </p:cSld>
+  <p:clrMapOvr>
+    <a:masterClrMapping/>
+  </p:clrMapOvr>
+</p:sld>
+</file>
+
+<file path=ppt/slides/slide14.xml><?xml version="1.0" encoding="utf-8"?>
+<p:sld xmlns:a="http://schemas.openxmlformats.org/drawingml/2006/main" xmlns:p="http://schemas.openxmlformats.org/presentationml/2006/main" xmlns:r="http://schemas.openxmlformats.org/officeDocument/2006/relationships">
+  <p:cSld>
+    <p:bg>
+      <p:bgPr>
+        <a:solidFill>
+          <a:srgbClr val="FFFFFF"/>
+        </a:solidFill>
+        <a:effectLst/>
+      </p:bgPr>
+    </p:bg>
+    <p:spTree>
+      <p:nvGrpSpPr>
+        <p:cNvPr id="1" name=""/>
+        <p:cNvGrpSpPr/>
+        <p:nvPr/>
+      </p:nvGrpSpPr>
+      <p:grpSpPr/>
+      <p:sp>
+        <p:nvSpPr>
+          <p:cNvPr id="2" name="TextBox 1"/>
+          <p:cNvSpPr txBox="1"/>
+          <p:nvPr/>
+        </p:nvSpPr>
+        <p:spPr>
+          <a:xfrm>
+            <a:off x="548640" y="320040"/>
+            <a:ext cx="11094415" cy="274320"/>
+          </a:xfrm>
+          <a:prstGeom prst="rect">
+            <a:avLst/>
+          </a:prstGeom>
+          <a:noFill/>
+        </p:spPr>
+        <p:txBody>
+          <a:bodyPr wrap="square" anchor="t" lIns="0" rIns="0" tIns="0" bIns="0"/>
+          <a:lstStyle/>
+          <a:p>
+            <a:pPr algn="l"/>
+            <a:r>
+              <a:rPr sz="1100" b="1" i="0">
+                <a:solidFill>
+                  <a:srgbClr val="54595D"/>
+                </a:solidFill>
+                <a:latin typeface="Calibri"/>
+              </a:rPr>
+              <a:t>CORE COMPONENT  ·  Core Paper 1</a:t>
+            </a:r>
+          </a:p>
+        </p:txBody>
+      </p:sp>
+      <p:sp>
+        <p:nvSpPr>
+          <p:cNvPr id="3" name="TextBox 2"/>
+          <p:cNvSpPr txBox="1"/>
+          <p:nvPr/>
+        </p:nvSpPr>
+        <p:spPr>
+          <a:xfrm>
+            <a:off x="548640" y="566928"/>
+            <a:ext cx="11094415" cy="822960"/>
+          </a:xfrm>
+          <a:prstGeom prst="rect">
+            <a:avLst/>
+          </a:prstGeom>
+          <a:noFill/>
+        </p:spPr>
+        <p:txBody>
+          <a:bodyPr wrap="square" anchor="ctr" lIns="0" rIns="0" tIns="0" bIns="0"/>
+          <a:lstStyle/>
+          <a:p>
+            <a:pPr algn="l"/>
+            <a:r>
+              <a:rPr sz="3200" b="1" i="0">
+                <a:solidFill>
+                  <a:srgbClr val="03306E"/>
+                </a:solidFill>
+                <a:latin typeface="Cambria"/>
+              </a:rPr>
+              <a:t>Answers</a:t>
+            </a:r>
+          </a:p>
+        </p:txBody>
+      </p:sp>
+      <p:sp>
+        <p:nvSpPr>
+          <p:cNvPr id="4" name="TextBox 3"/>
+          <p:cNvSpPr txBox="1"/>
+          <p:nvPr/>
+        </p:nvSpPr>
+        <p:spPr>
+          <a:xfrm>
+            <a:off x="548640" y="6446520"/>
+            <a:ext cx="8229600" cy="274320"/>
+          </a:xfrm>
+          <a:prstGeom prst="rect">
+            <a:avLst/>
+          </a:prstGeom>
+          <a:noFill/>
+        </p:spPr>
+        <p:txBody>
+          <a:bodyPr wrap="square" anchor="t" lIns="0" rIns="0" tIns="0" bIns="0"/>
+          <a:lstStyle/>
+          <a:p>
+            <a:pPr algn="l"/>
+            <a:r>
+              <a:rPr sz="1000" b="0" i="0">
+                <a:solidFill>
+                  <a:srgbClr val="54595D"/>
+                </a:solidFill>
+                <a:latin typeface="Calibri"/>
+              </a:rPr>
+              <a:t>Digital Software Development T Level  ·  Data Types, Variables and Data Structures</a:t>
+            </a:r>
+          </a:p>
+        </p:txBody>
+      </p:sp>
+      <p:sp>
+        <p:nvSpPr>
+          <p:cNvPr id="5" name="TextBox 4"/>
+          <p:cNvSpPr txBox="1"/>
+          <p:nvPr/>
+        </p:nvSpPr>
+        <p:spPr>
+          <a:xfrm>
+            <a:off x="10728655" y="6446520"/>
+            <a:ext cx="914400" cy="274320"/>
+          </a:xfrm>
+          <a:prstGeom prst="rect">
+            <a:avLst/>
+          </a:prstGeom>
+          <a:noFill/>
+        </p:spPr>
+        <p:txBody>
+          <a:bodyPr wrap="square" anchor="t" lIns="0" rIns="0" tIns="0" bIns="0"/>
+          <a:lstStyle/>
+          <a:p>
+            <a:pPr algn="r"/>
+            <a:r>
+              <a:rPr sz="1000" b="0" i="0">
+                <a:solidFill>
+                  <a:srgbClr val="54595D"/>
+                </a:solidFill>
+                <a:latin typeface="Calibri"/>
+              </a:rPr>
+              <a:t>14</a:t>
+            </a:r>
+          </a:p>
+        </p:txBody>
+      </p:sp>
+      <p:sp>
+        <p:nvSpPr>
+          <p:cNvPr id="6" name="Oval 5"/>
+          <p:cNvSpPr/>
+          <p:nvPr/>
+        </p:nvSpPr>
+        <p:spPr>
+          <a:xfrm>
+            <a:off x="548640" y="1618488"/>
+            <a:ext cx="411480" cy="411480"/>
+          </a:xfrm>
+          <a:prstGeom prst="ellipse">
+            <a:avLst/>
+          </a:prstGeom>
+          <a:solidFill>
+            <a:srgbClr val="F2B705"/>
+          </a:solidFill>
+          <a:ln>
+            <a:noFill/>
+          </a:ln>
+          <a:effectLst/>
+        </p:spPr>
+        <p:style>
+          <a:lnRef idx="1">
+            <a:schemeClr val="accent1"/>
+          </a:lnRef>
+          <a:fillRef idx="3">
+            <a:schemeClr val="accent1"/>
+          </a:fillRef>
+          <a:effectRef idx="2">
+            <a:schemeClr val="accent1"/>
+          </a:effectRef>
+          <a:fontRef idx="minor">
+            <a:schemeClr val="lt1"/>
+          </a:fontRef>
+        </p:style>
+        <p:txBody>
+          <a:bodyPr rtlCol="0" anchor="ctr" lIns="0" rIns="0" tIns="0" bIns="0"/>
+          <a:lstStyle/>
+          <a:p>
+            <a:pPr algn="ctr"/>
+            <a:r>
+              <a:rPr sz="1400" b="1">
+                <a:solidFill>
+                  <a:srgbClr val="202122"/>
+                </a:solidFill>
+                <a:latin typeface="Calibri"/>
+              </a:rPr>
+              <a:t>1</a:t>
+            </a:r>
+          </a:p>
+        </p:txBody>
+      </p:sp>
+      <p:sp>
+        <p:nvSpPr>
+          <p:cNvPr id="7" name="TextBox 6"/>
+          <p:cNvSpPr txBox="1"/>
+          <p:nvPr/>
+        </p:nvSpPr>
+        <p:spPr>
+          <a:xfrm>
+            <a:off x="1234440" y="1600200"/>
+            <a:ext cx="10408615" cy="791870"/>
+          </a:xfrm>
+          <a:prstGeom prst="rect">
+            <a:avLst/>
+          </a:prstGeom>
+          <a:noFill/>
+        </p:spPr>
+        <p:txBody>
+          <a:bodyPr wrap="square" anchor="t" lIns="0" rIns="0" tIns="0" bIns="0"/>
+          <a:lstStyle/>
+          <a:p>
+            <a:pPr algn="l"/>
+            <a:r>
+              <a:rPr sz="1800" b="0" i="0">
+                <a:solidFill>
+                  <a:srgbClr val="54595D"/>
+                </a:solidFill>
+                <a:latin typeface="Calibri"/>
+              </a:rPr>
+              <a:t>What data type should store a price?</a:t>
+            </a:r>
+          </a:p>
+          <a:p>
+            <a:r>
+              <a:rPr sz="1800" b="1">
+                <a:solidFill>
+                  <a:srgbClr val="03306E"/>
+                </a:solidFill>
+                <a:latin typeface="Calibri"/>
+              </a:rPr>
+              <a:t>Float.</a:t>
+            </a:r>
+          </a:p>
+        </p:txBody>
+      </p:sp>
+      <p:sp>
+        <p:nvSpPr>
+          <p:cNvPr id="8" name="Oval 7"/>
+          <p:cNvSpPr/>
+          <p:nvPr/>
+        </p:nvSpPr>
+        <p:spPr>
+          <a:xfrm>
+            <a:off x="548640" y="2574950"/>
+            <a:ext cx="411480" cy="411480"/>
+          </a:xfrm>
+          <a:prstGeom prst="ellipse">
+            <a:avLst/>
+          </a:prstGeom>
+          <a:solidFill>
+            <a:srgbClr val="F2B705"/>
+          </a:solidFill>
+          <a:ln>
+            <a:noFill/>
+          </a:ln>
+          <a:effectLst/>
+        </p:spPr>
+        <p:style>
+          <a:lnRef idx="1">
+            <a:schemeClr val="accent1"/>
+          </a:lnRef>
+          <a:fillRef idx="3">
+            <a:schemeClr val="accent1"/>
+          </a:fillRef>
+          <a:effectRef idx="2">
+            <a:schemeClr val="accent1"/>
+          </a:effectRef>
+          <a:fontRef idx="minor">
+            <a:schemeClr val="lt1"/>
+          </a:fontRef>
+        </p:style>
+        <p:txBody>
+          <a:bodyPr rtlCol="0" anchor="ctr" lIns="0" rIns="0" tIns="0" bIns="0"/>
+          <a:lstStyle/>
+          <a:p>
+            <a:pPr algn="ctr"/>
+            <a:r>
+              <a:rPr sz="1400" b="1">
+                <a:solidFill>
+                  <a:srgbClr val="202122"/>
+                </a:solidFill>
+                <a:latin typeface="Calibri"/>
+              </a:rPr>
+              <a:t>2</a:t>
+            </a:r>
+          </a:p>
+        </p:txBody>
+      </p:sp>
+      <p:sp>
+        <p:nvSpPr>
+          <p:cNvPr id="9" name="TextBox 8"/>
+          <p:cNvSpPr txBox="1"/>
+          <p:nvPr/>
+        </p:nvSpPr>
+        <p:spPr>
+          <a:xfrm>
+            <a:off x="1234440" y="2556662"/>
+            <a:ext cx="10408615" cy="791870"/>
+          </a:xfrm>
+          <a:prstGeom prst="rect">
+            <a:avLst/>
+          </a:prstGeom>
+          <a:noFill/>
+        </p:spPr>
+        <p:txBody>
+          <a:bodyPr wrap="square" anchor="t" lIns="0" rIns="0" tIns="0" bIns="0"/>
+          <a:lstStyle/>
+          <a:p>
+            <a:pPr algn="l"/>
+            <a:r>
+              <a:rPr sz="1800" b="0" i="0">
+                <a:solidFill>
+                  <a:srgbClr val="54595D"/>
+                </a:solidFill>
+                <a:latin typeface="Calibri"/>
+              </a:rPr>
+              <a:t>What does input() always return?</a:t>
+            </a:r>
+          </a:p>
+          <a:p>
+            <a:r>
+              <a:rPr sz="1800" b="1">
+                <a:solidFill>
+                  <a:srgbClr val="03306E"/>
+                </a:solidFill>
+                <a:latin typeface="Calibri"/>
+              </a:rPr>
+              <a:t>A string.</a:t>
+            </a:r>
+          </a:p>
+        </p:txBody>
+      </p:sp>
+      <p:sp>
+        <p:nvSpPr>
+          <p:cNvPr id="10" name="Oval 9"/>
+          <p:cNvSpPr/>
+          <p:nvPr/>
+        </p:nvSpPr>
+        <p:spPr>
+          <a:xfrm>
+            <a:off x="548640" y="3531412"/>
+            <a:ext cx="411480" cy="411480"/>
+          </a:xfrm>
+          <a:prstGeom prst="ellipse">
+            <a:avLst/>
+          </a:prstGeom>
+          <a:solidFill>
+            <a:srgbClr val="F2B705"/>
+          </a:solidFill>
+          <a:ln>
+            <a:noFill/>
+          </a:ln>
+          <a:effectLst/>
+        </p:spPr>
+        <p:style>
+          <a:lnRef idx="1">
+            <a:schemeClr val="accent1"/>
+          </a:lnRef>
+          <a:fillRef idx="3">
+            <a:schemeClr val="accent1"/>
+          </a:fillRef>
+          <a:effectRef idx="2">
+            <a:schemeClr val="accent1"/>
+          </a:effectRef>
+          <a:fontRef idx="minor">
+            <a:schemeClr val="lt1"/>
+          </a:fontRef>
+        </p:style>
+        <p:txBody>
+          <a:bodyPr rtlCol="0" anchor="ctr" lIns="0" rIns="0" tIns="0" bIns="0"/>
+          <a:lstStyle/>
+          <a:p>
+            <a:pPr algn="ctr"/>
+            <a:r>
+              <a:rPr sz="1400" b="1">
+                <a:solidFill>
+                  <a:srgbClr val="202122"/>
+                </a:solidFill>
+                <a:latin typeface="Calibri"/>
+              </a:rPr>
+              <a:t>3</a:t>
+            </a:r>
+          </a:p>
+        </p:txBody>
+      </p:sp>
+      <p:sp>
+        <p:nvSpPr>
+          <p:cNvPr id="11" name="TextBox 10"/>
+          <p:cNvSpPr txBox="1"/>
+          <p:nvPr/>
+        </p:nvSpPr>
+        <p:spPr>
+          <a:xfrm>
+            <a:off x="1234440" y="3513124"/>
+            <a:ext cx="10408615" cy="791870"/>
+          </a:xfrm>
+          <a:prstGeom prst="rect">
+            <a:avLst/>
+          </a:prstGeom>
+          <a:noFill/>
+        </p:spPr>
+        <p:txBody>
+          <a:bodyPr wrap="square" anchor="t" lIns="0" rIns="0" tIns="0" bIns="0"/>
+          <a:lstStyle/>
+          <a:p>
+            <a:pPr algn="l"/>
+            <a:r>
+              <a:rPr sz="1800" b="0" i="0">
+                <a:solidFill>
+                  <a:srgbClr val="54595D"/>
+                </a:solidFill>
+                <a:latin typeface="Calibri"/>
+              </a:rPr>
+              <a:t>What is a local variable?</a:t>
+            </a:r>
+          </a:p>
+          <a:p>
+            <a:r>
+              <a:rPr sz="1800" b="1">
+                <a:solidFill>
+                  <a:srgbClr val="03306E"/>
+                </a:solidFill>
+                <a:latin typeface="Calibri"/>
+              </a:rPr>
+              <a:t>A variable created inside a function and only usable there.</a:t>
+            </a:r>
+          </a:p>
+        </p:txBody>
+      </p:sp>
+      <p:sp>
+        <p:nvSpPr>
+          <p:cNvPr id="12" name="Oval 11"/>
+          <p:cNvSpPr/>
+          <p:nvPr/>
+        </p:nvSpPr>
+        <p:spPr>
+          <a:xfrm>
+            <a:off x="548640" y="4487875"/>
+            <a:ext cx="411480" cy="411480"/>
+          </a:xfrm>
+          <a:prstGeom prst="ellipse">
+            <a:avLst/>
+          </a:prstGeom>
+          <a:solidFill>
+            <a:srgbClr val="F2B705"/>
+          </a:solidFill>
+          <a:ln>
+            <a:noFill/>
+          </a:ln>
+          <a:effectLst/>
+        </p:spPr>
+        <p:style>
+          <a:lnRef idx="1">
+            <a:schemeClr val="accent1"/>
+          </a:lnRef>
+          <a:fillRef idx="3">
+            <a:schemeClr val="accent1"/>
+          </a:fillRef>
+          <a:effectRef idx="2">
+            <a:schemeClr val="accent1"/>
+          </a:effectRef>
+          <a:fontRef idx="minor">
+            <a:schemeClr val="lt1"/>
+          </a:fontRef>
+        </p:style>
+        <p:txBody>
+          <a:bodyPr rtlCol="0" anchor="ctr" lIns="0" rIns="0" tIns="0" bIns="0"/>
+          <a:lstStyle/>
+          <a:p>
+            <a:pPr algn="ctr"/>
+            <a:r>
+              <a:rPr sz="1400" b="1">
+                <a:solidFill>
+                  <a:srgbClr val="202122"/>
+                </a:solidFill>
+                <a:latin typeface="Calibri"/>
+              </a:rPr>
+              <a:t>4</a:t>
+            </a:r>
+          </a:p>
+        </p:txBody>
+      </p:sp>
+      <p:sp>
+        <p:nvSpPr>
+          <p:cNvPr id="13" name="TextBox 12"/>
+          <p:cNvSpPr txBox="1"/>
+          <p:nvPr/>
+        </p:nvSpPr>
+        <p:spPr>
+          <a:xfrm>
+            <a:off x="1234440" y="4469587"/>
+            <a:ext cx="10408615" cy="791870"/>
+          </a:xfrm>
+          <a:prstGeom prst="rect">
+            <a:avLst/>
+          </a:prstGeom>
+          <a:noFill/>
+        </p:spPr>
+        <p:txBody>
+          <a:bodyPr wrap="square" anchor="t" lIns="0" rIns="0" tIns="0" bIns="0"/>
+          <a:lstStyle/>
+          <a:p>
+            <a:pPr algn="l"/>
+            <a:r>
+              <a:rPr sz="1800" b="0" i="0">
+                <a:solidFill>
+                  <a:srgbClr val="54595D"/>
+                </a:solidFill>
+                <a:latin typeface="Calibri"/>
+              </a:rPr>
+              <a:t>How do you add an item to the end of a list?</a:t>
+            </a:r>
+          </a:p>
+          <a:p>
+            <a:r>
+              <a:rPr sz="1800" b="1">
+                <a:solidFill>
+                  <a:srgbClr val="03306E"/>
+                </a:solidFill>
+                <a:latin typeface="Calibri"/>
+              </a:rPr>
+              <a:t>list.append(item).</a:t>
+            </a:r>
+          </a:p>
+        </p:txBody>
+      </p:sp>
+      <p:sp>
+        <p:nvSpPr>
+          <p:cNvPr id="14" name="Oval 13"/>
+          <p:cNvSpPr/>
+          <p:nvPr/>
+        </p:nvSpPr>
+        <p:spPr>
+          <a:xfrm>
+            <a:off x="548640" y="5444337"/>
+            <a:ext cx="411480" cy="411480"/>
+          </a:xfrm>
+          <a:prstGeom prst="ellipse">
+            <a:avLst/>
+          </a:prstGeom>
+          <a:solidFill>
+            <a:srgbClr val="F2B705"/>
+          </a:solidFill>
+          <a:ln>
+            <a:noFill/>
+          </a:ln>
+          <a:effectLst/>
+        </p:spPr>
+        <p:style>
+          <a:lnRef idx="1">
+            <a:schemeClr val="accent1"/>
+          </a:lnRef>
+          <a:fillRef idx="3">
+            <a:schemeClr val="accent1"/>
+          </a:fillRef>
+          <a:effectRef idx="2">
+            <a:schemeClr val="accent1"/>
+          </a:effectRef>
+          <a:fontRef idx="minor">
+            <a:schemeClr val="lt1"/>
+          </a:fontRef>
+        </p:style>
+        <p:txBody>
+          <a:bodyPr rtlCol="0" anchor="ctr" lIns="0" rIns="0" tIns="0" bIns="0"/>
+          <a:lstStyle/>
+          <a:p>
+            <a:pPr algn="ctr"/>
+            <a:r>
+              <a:rPr sz="1400" b="1">
+                <a:solidFill>
+                  <a:srgbClr val="202122"/>
+                </a:solidFill>
+                <a:latin typeface="Calibri"/>
+              </a:rPr>
+              <a:t>5</a:t>
+            </a:r>
+          </a:p>
+        </p:txBody>
+      </p:sp>
+      <p:sp>
+        <p:nvSpPr>
+          <p:cNvPr id="15" name="TextBox 14"/>
+          <p:cNvSpPr txBox="1"/>
+          <p:nvPr/>
+        </p:nvSpPr>
+        <p:spPr>
+          <a:xfrm>
+            <a:off x="1234440" y="5426049"/>
+            <a:ext cx="10408615" cy="791870"/>
+          </a:xfrm>
+          <a:prstGeom prst="rect">
+            <a:avLst/>
+          </a:prstGeom>
+          <a:noFill/>
+        </p:spPr>
+        <p:txBody>
+          <a:bodyPr wrap="square" anchor="t" lIns="0" rIns="0" tIns="0" bIns="0"/>
+          <a:lstStyle/>
+          <a:p>
+            <a:pPr algn="l"/>
+            <a:r>
+              <a:rPr sz="1800" b="0" i="0">
+                <a:solidFill>
+                  <a:srgbClr val="54595D"/>
+                </a:solidFill>
+                <a:latin typeface="Calibri"/>
+              </a:rPr>
+              <a:t>When is a dictionary better than a list?</a:t>
+            </a:r>
+          </a:p>
+          <a:p>
+            <a:r>
+              <a:rPr sz="1800" b="1">
+                <a:solidFill>
+                  <a:srgbClr val="03306E"/>
+                </a:solidFill>
+                <a:latin typeface="Calibri"/>
+              </a:rPr>
+              <a:t>When you need to look values up by a key.</a:t>
+            </a:r>
+          </a:p>
+        </p:txBody>
+      </p:sp>
+    </p:spTree>
+  </p:cSld>
+  <p:clrMapOvr>
+    <a:masterClrMapping/>
+  </p:clrMapOvr>
+</p:sld>
+</file>
+
+<file path=ppt/slides/slide15.xml><?xml version="1.0" encoding="utf-8"?>
+<p:sld xmlns:a="http://schemas.openxmlformats.org/drawingml/2006/main" xmlns:p="http://schemas.openxmlformats.org/presentationml/2006/main" xmlns:r="http://schemas.openxmlformats.org/officeDocument/2006/relationships">
+  <p:cSld>
+    <p:bg>
+      <p:bgPr>
+        <a:solidFill>
+          <a:srgbClr val="FFFFFF"/>
+        </a:solidFill>
+        <a:effectLst/>
+      </p:bgPr>
+    </p:bg>
+    <p:spTree>
+      <p:nvGrpSpPr>
+        <p:cNvPr id="1" name=""/>
+        <p:cNvGrpSpPr/>
+        <p:nvPr/>
+      </p:nvGrpSpPr>
+      <p:grpSpPr/>
+      <p:sp>
+        <p:nvSpPr>
+          <p:cNvPr id="2" name="TextBox 1"/>
+          <p:cNvSpPr txBox="1"/>
+          <p:nvPr/>
+        </p:nvSpPr>
+        <p:spPr>
+          <a:xfrm>
+            <a:off x="548640" y="320040"/>
+            <a:ext cx="11094415" cy="274320"/>
+          </a:xfrm>
+          <a:prstGeom prst="rect">
+            <a:avLst/>
+          </a:prstGeom>
+          <a:noFill/>
+        </p:spPr>
+        <p:txBody>
+          <a:bodyPr wrap="square" anchor="t" lIns="0" rIns="0" tIns="0" bIns="0"/>
+          <a:lstStyle/>
+          <a:p>
+            <a:pPr algn="l"/>
+            <a:r>
+              <a:rPr sz="1100" b="1" i="0">
+                <a:solidFill>
+                  <a:srgbClr val="54595D"/>
+                </a:solidFill>
+                <a:latin typeface="Calibri"/>
+              </a:rPr>
+              <a:t>CORE COMPONENT  ·  Core Paper 1</a:t>
+            </a:r>
+          </a:p>
+        </p:txBody>
+      </p:sp>
+      <p:sp>
+        <p:nvSpPr>
+          <p:cNvPr id="3" name="TextBox 2"/>
+          <p:cNvSpPr txBox="1"/>
+          <p:nvPr/>
+        </p:nvSpPr>
+        <p:spPr>
+          <a:xfrm>
+            <a:off x="548640" y="566928"/>
+            <a:ext cx="11094415" cy="822960"/>
+          </a:xfrm>
+          <a:prstGeom prst="rect">
+            <a:avLst/>
+          </a:prstGeom>
+          <a:noFill/>
+        </p:spPr>
+        <p:txBody>
+          <a:bodyPr wrap="square" anchor="ctr" lIns="0" rIns="0" tIns="0" bIns="0"/>
+          <a:lstStyle/>
+          <a:p>
+            <a:pPr algn="l"/>
+            <a:r>
+              <a:rPr sz="3200" b="1" i="0">
+                <a:solidFill>
+                  <a:srgbClr val="03306E"/>
+                </a:solidFill>
+                <a:latin typeface="Cambria"/>
+              </a:rPr>
+              <a:t>Activity: Build a gradebook</a:t>
+            </a:r>
+          </a:p>
+        </p:txBody>
+      </p:sp>
+      <p:sp>
+        <p:nvSpPr>
+          <p:cNvPr id="4" name="TextBox 3"/>
+          <p:cNvSpPr txBox="1"/>
+          <p:nvPr/>
+        </p:nvSpPr>
+        <p:spPr>
+          <a:xfrm>
+            <a:off x="548640" y="6446520"/>
+            <a:ext cx="8229600" cy="274320"/>
+          </a:xfrm>
+          <a:prstGeom prst="rect">
+            <a:avLst/>
+          </a:prstGeom>
+          <a:noFill/>
+        </p:spPr>
+        <p:txBody>
+          <a:bodyPr wrap="square" anchor="t" lIns="0" rIns="0" tIns="0" bIns="0"/>
+          <a:lstStyle/>
+          <a:p>
+            <a:pPr algn="l"/>
+            <a:r>
+              <a:rPr sz="1000" b="0" i="0">
+                <a:solidFill>
+                  <a:srgbClr val="54595D"/>
+                </a:solidFill>
+                <a:latin typeface="Calibri"/>
+              </a:rPr>
+              <a:t>Digital Software Development T Level  ·  Data Types, Variables and Data Structures</a:t>
+            </a:r>
+          </a:p>
+        </p:txBody>
+      </p:sp>
+      <p:sp>
+        <p:nvSpPr>
+          <p:cNvPr id="5" name="TextBox 4"/>
+          <p:cNvSpPr txBox="1"/>
+          <p:nvPr/>
+        </p:nvSpPr>
+        <p:spPr>
+          <a:xfrm>
+            <a:off x="10728655" y="6446520"/>
+            <a:ext cx="914400" cy="274320"/>
+          </a:xfrm>
+          <a:prstGeom prst="rect">
+            <a:avLst/>
+          </a:prstGeom>
+          <a:noFill/>
+        </p:spPr>
+        <p:txBody>
+          <a:bodyPr wrap="square" anchor="t" lIns="0" rIns="0" tIns="0" bIns="0"/>
+          <a:lstStyle/>
+          <a:p>
+            <a:pPr algn="r"/>
+            <a:r>
+              <a:rPr sz="1000" b="0" i="0">
+                <a:solidFill>
+                  <a:srgbClr val="54595D"/>
+                </a:solidFill>
+                <a:latin typeface="Calibri"/>
+              </a:rPr>
+              <a:t>15</a:t>
+            </a:r>
+          </a:p>
+        </p:txBody>
+      </p:sp>
+      <p:sp>
+        <p:nvSpPr>
+          <p:cNvPr id="6" name="Rounded Rectangle 5"/>
+          <p:cNvSpPr/>
+          <p:nvPr/>
+        </p:nvSpPr>
+        <p:spPr>
+          <a:xfrm>
+            <a:off x="548640" y="1508760"/>
+            <a:ext cx="2011680" cy="457200"/>
+          </a:xfrm>
+          <a:prstGeom prst="roundRect">
+            <a:avLst>
+              <a:gd name="adj" fmla="val 50000"/>
+            </a:avLst>
+          </a:prstGeom>
+          <a:solidFill>
+            <a:srgbClr val="F2B705"/>
+          </a:solidFill>
+          <a:ln>
+            <a:noFill/>
+          </a:ln>
+          <a:effectLst/>
+        </p:spPr>
+        <p:style>
+          <a:lnRef idx="1">
+            <a:schemeClr val="accent1"/>
+          </a:lnRef>
+          <a:fillRef idx="3">
+            <a:schemeClr val="accent1"/>
+          </a:fillRef>
+          <a:effectRef idx="2">
+            <a:schemeClr val="accent1"/>
+          </a:effectRef>
+          <a:fontRef idx="minor">
+            <a:schemeClr val="lt1"/>
+          </a:fontRef>
+        </p:style>
+        <p:txBody>
+          <a:bodyPr rtlCol="0" anchor="ctr"/>
+          <a:lstStyle/>
+          <a:p/>
+        </p:txBody>
+      </p:sp>
+      <p:sp>
+        <p:nvSpPr>
+          <p:cNvPr id="7" name="TextBox 6"/>
+          <p:cNvSpPr txBox="1"/>
+          <p:nvPr/>
+        </p:nvSpPr>
+        <p:spPr>
+          <a:xfrm>
+            <a:off x="548640" y="1508760"/>
+            <a:ext cx="2011680" cy="457200"/>
+          </a:xfrm>
+          <a:prstGeom prst="rect">
+            <a:avLst/>
+          </a:prstGeom>
+          <a:noFill/>
+        </p:spPr>
+        <p:txBody>
+          <a:bodyPr wrap="square" anchor="ctr" lIns="0" rIns="0" tIns="0" bIns="0"/>
+          <a:lstStyle/>
+          <a:p>
+            <a:pPr algn="ctr"/>
+            <a:r>
+              <a:rPr sz="1400" b="1" i="0">
+                <a:solidFill>
+                  <a:srgbClr val="202122"/>
+                </a:solidFill>
+                <a:latin typeface="Calibri"/>
+              </a:rPr>
+              <a:t>25 minutes</a:t>
+            </a:r>
+          </a:p>
+        </p:txBody>
+      </p:sp>
+      <p:sp>
+        <p:nvSpPr>
+          <p:cNvPr id="8" name="TextBox 7"/>
+          <p:cNvSpPr txBox="1"/>
+          <p:nvPr/>
+        </p:nvSpPr>
+        <p:spPr>
+          <a:xfrm>
+            <a:off x="2743200" y="1508760"/>
+            <a:ext cx="4754880" cy="457200"/>
+          </a:xfrm>
+          <a:prstGeom prst="rect">
+            <a:avLst/>
+          </a:prstGeom>
+          <a:noFill/>
+        </p:spPr>
+        <p:txBody>
+          <a:bodyPr wrap="square" anchor="ctr" lIns="0" rIns="0" tIns="0" bIns="0"/>
+          <a:lstStyle/>
+          <a:p>
+            <a:pPr algn="l"/>
+            <a:r>
+              <a:rPr sz="1400" b="0" i="1">
+                <a:solidFill>
+                  <a:srgbClr val="54595D"/>
+                </a:solidFill>
+                <a:latin typeface="Calibri"/>
+              </a:rPr>
+              <a:t>Individual, in Python</a:t>
+            </a:r>
+          </a:p>
+        </p:txBody>
+      </p:sp>
+      <p:sp>
+        <p:nvSpPr>
+          <p:cNvPr id="9" name="Oval 8"/>
+          <p:cNvSpPr/>
+          <p:nvPr/>
+        </p:nvSpPr>
+        <p:spPr>
+          <a:xfrm>
+            <a:off x="548640" y="2482596"/>
+            <a:ext cx="384048" cy="384048"/>
+          </a:xfrm>
+          <a:prstGeom prst="ellipse">
+            <a:avLst/>
+          </a:prstGeom>
+          <a:solidFill>
+            <a:srgbClr val="0645AD"/>
+          </a:solidFill>
+          <a:ln>
+            <a:noFill/>
+          </a:ln>
+          <a:effectLst/>
+        </p:spPr>
+        <p:style>
+          <a:lnRef idx="1">
+            <a:schemeClr val="accent1"/>
+          </a:lnRef>
+          <a:fillRef idx="3">
+            <a:schemeClr val="accent1"/>
+          </a:fillRef>
+          <a:effectRef idx="2">
+            <a:schemeClr val="accent1"/>
+          </a:effectRef>
+          <a:fontRef idx="minor">
+            <a:schemeClr val="lt1"/>
+          </a:fontRef>
+        </p:style>
+        <p:txBody>
+          <a:bodyPr rtlCol="0" anchor="ctr" lIns="0" rIns="0" tIns="0" bIns="0"/>
+          <a:lstStyle/>
+          <a:p>
+            <a:pPr algn="ctr"/>
+            <a:r>
+              <a:rPr sz="1300" b="1">
+                <a:solidFill>
+                  <a:srgbClr val="FFFFFF"/>
+                </a:solidFill>
+                <a:latin typeface="Calibri"/>
+              </a:rPr>
+              <a:t>1</a:t>
+            </a:r>
+          </a:p>
+        </p:txBody>
+      </p:sp>
+      <p:sp>
+        <p:nvSpPr>
+          <p:cNvPr id="10" name="TextBox 9"/>
+          <p:cNvSpPr txBox="1"/>
+          <p:nvPr/>
+        </p:nvSpPr>
+        <p:spPr>
+          <a:xfrm>
+            <a:off x="1143000" y="2240280"/>
+            <a:ext cx="5943600" cy="868680"/>
+          </a:xfrm>
+          <a:prstGeom prst="rect">
+            <a:avLst/>
+          </a:prstGeom>
+          <a:noFill/>
+        </p:spPr>
+        <p:txBody>
+          <a:bodyPr wrap="square" anchor="ctr" lIns="0" rIns="0" tIns="0" bIns="0"/>
+          <a:lstStyle/>
+          <a:p>
+            <a:pPr algn="l"/>
+            <a:r>
+              <a:rPr sz="1700" b="0" i="0">
+                <a:solidFill>
+                  <a:srgbClr val="202122"/>
+                </a:solidFill>
+                <a:latin typeface="Calibri"/>
+              </a:rPr>
+              <a:t>Create a dictionary mapping five student names to a list of marks.</a:t>
+            </a:r>
+          </a:p>
+        </p:txBody>
+      </p:sp>
+      <p:sp>
+        <p:nvSpPr>
+          <p:cNvPr id="11" name="Oval 10"/>
+          <p:cNvSpPr/>
+          <p:nvPr/>
+        </p:nvSpPr>
+        <p:spPr>
+          <a:xfrm>
+            <a:off x="548640" y="3461004"/>
+            <a:ext cx="384048" cy="384048"/>
+          </a:xfrm>
+          <a:prstGeom prst="ellipse">
+            <a:avLst/>
+          </a:prstGeom>
+          <a:solidFill>
+            <a:srgbClr val="0645AD"/>
+          </a:solidFill>
+          <a:ln>
+            <a:noFill/>
+          </a:ln>
+          <a:effectLst/>
+        </p:spPr>
+        <p:style>
+          <a:lnRef idx="1">
+            <a:schemeClr val="accent1"/>
+          </a:lnRef>
+          <a:fillRef idx="3">
+            <a:schemeClr val="accent1"/>
+          </a:fillRef>
+          <a:effectRef idx="2">
+            <a:schemeClr val="accent1"/>
+          </a:effectRef>
+          <a:fontRef idx="minor">
+            <a:schemeClr val="lt1"/>
+          </a:fontRef>
+        </p:style>
+        <p:txBody>
+          <a:bodyPr rtlCol="0" anchor="ctr" lIns="0" rIns="0" tIns="0" bIns="0"/>
+          <a:lstStyle/>
+          <a:p>
+            <a:pPr algn="ctr"/>
+            <a:r>
+              <a:rPr sz="1300" b="1">
+                <a:solidFill>
+                  <a:srgbClr val="FFFFFF"/>
+                </a:solidFill>
+                <a:latin typeface="Calibri"/>
+              </a:rPr>
+              <a:t>2</a:t>
+            </a:r>
+          </a:p>
+        </p:txBody>
+      </p:sp>
+      <p:sp>
+        <p:nvSpPr>
+          <p:cNvPr id="12" name="TextBox 11"/>
+          <p:cNvSpPr txBox="1"/>
+          <p:nvPr/>
+        </p:nvSpPr>
+        <p:spPr>
+          <a:xfrm>
+            <a:off x="1143000" y="3218688"/>
+            <a:ext cx="5943600" cy="868680"/>
+          </a:xfrm>
+          <a:prstGeom prst="rect">
+            <a:avLst/>
+          </a:prstGeom>
+          <a:noFill/>
+        </p:spPr>
+        <p:txBody>
+          <a:bodyPr wrap="square" anchor="ctr" lIns="0" rIns="0" tIns="0" bIns="0"/>
+          <a:lstStyle/>
+          <a:p>
+            <a:pPr algn="l"/>
+            <a:r>
+              <a:rPr sz="1700" b="0" i="0">
+                <a:solidFill>
+                  <a:srgbClr val="202122"/>
+                </a:solidFill>
+                <a:latin typeface="Calibri"/>
+              </a:rPr>
+              <a:t>Ask the user for a name and a new mark, converting the input correctly.</a:t>
+            </a:r>
+          </a:p>
+        </p:txBody>
+      </p:sp>
+      <p:sp>
+        <p:nvSpPr>
+          <p:cNvPr id="13" name="Oval 12"/>
+          <p:cNvSpPr/>
+          <p:nvPr/>
+        </p:nvSpPr>
+        <p:spPr>
+          <a:xfrm>
+            <a:off x="548640" y="4439412"/>
+            <a:ext cx="384048" cy="384048"/>
+          </a:xfrm>
+          <a:prstGeom prst="ellipse">
+            <a:avLst/>
+          </a:prstGeom>
+          <a:solidFill>
+            <a:srgbClr val="0645AD"/>
+          </a:solidFill>
+          <a:ln>
+            <a:noFill/>
+          </a:ln>
+          <a:effectLst/>
+        </p:spPr>
+        <p:style>
+          <a:lnRef idx="1">
+            <a:schemeClr val="accent1"/>
+          </a:lnRef>
+          <a:fillRef idx="3">
+            <a:schemeClr val="accent1"/>
+          </a:fillRef>
+          <a:effectRef idx="2">
+            <a:schemeClr val="accent1"/>
+          </a:effectRef>
+          <a:fontRef idx="minor">
+            <a:schemeClr val="lt1"/>
+          </a:fontRef>
+        </p:style>
+        <p:txBody>
+          <a:bodyPr rtlCol="0" anchor="ctr" lIns="0" rIns="0" tIns="0" bIns="0"/>
+          <a:lstStyle/>
+          <a:p>
+            <a:pPr algn="ctr"/>
+            <a:r>
+              <a:rPr sz="1300" b="1">
+                <a:solidFill>
+                  <a:srgbClr val="FFFFFF"/>
+                </a:solidFill>
+                <a:latin typeface="Calibri"/>
+              </a:rPr>
+              <a:t>3</a:t>
+            </a:r>
+          </a:p>
+        </p:txBody>
+      </p:sp>
+      <p:sp>
+        <p:nvSpPr>
+          <p:cNvPr id="14" name="TextBox 13"/>
+          <p:cNvSpPr txBox="1"/>
+          <p:nvPr/>
+        </p:nvSpPr>
+        <p:spPr>
+          <a:xfrm>
+            <a:off x="1143000" y="4197096"/>
+            <a:ext cx="5943600" cy="868680"/>
+          </a:xfrm>
+          <a:prstGeom prst="rect">
+            <a:avLst/>
+          </a:prstGeom>
+          <a:noFill/>
+        </p:spPr>
+        <p:txBody>
+          <a:bodyPr wrap="square" anchor="ctr" lIns="0" rIns="0" tIns="0" bIns="0"/>
+          <a:lstStyle/>
+          <a:p>
+            <a:pPr algn="l"/>
+            <a:r>
+              <a:rPr sz="1700" b="0" i="0">
+                <a:solidFill>
+                  <a:srgbClr val="202122"/>
+                </a:solidFill>
+                <a:latin typeface="Calibri"/>
+              </a:rPr>
+              <a:t>Append the mark to that student's list.</a:t>
+            </a:r>
+          </a:p>
+        </p:txBody>
+      </p:sp>
+      <p:sp>
+        <p:nvSpPr>
+          <p:cNvPr id="15" name="Oval 14"/>
+          <p:cNvSpPr/>
+          <p:nvPr/>
+        </p:nvSpPr>
+        <p:spPr>
+          <a:xfrm>
+            <a:off x="548640" y="5417820"/>
+            <a:ext cx="384048" cy="384048"/>
+          </a:xfrm>
+          <a:prstGeom prst="ellipse">
+            <a:avLst/>
+          </a:prstGeom>
+          <a:solidFill>
+            <a:srgbClr val="0645AD"/>
+          </a:solidFill>
+          <a:ln>
+            <a:noFill/>
+          </a:ln>
+          <a:effectLst/>
+        </p:spPr>
+        <p:style>
+          <a:lnRef idx="1">
+            <a:schemeClr val="accent1"/>
+          </a:lnRef>
+          <a:fillRef idx="3">
+            <a:schemeClr val="accent1"/>
+          </a:fillRef>
+          <a:effectRef idx="2">
+            <a:schemeClr val="accent1"/>
+          </a:effectRef>
+          <a:fontRef idx="minor">
+            <a:schemeClr val="lt1"/>
+          </a:fontRef>
+        </p:style>
+        <p:txBody>
+          <a:bodyPr rtlCol="0" anchor="ctr" lIns="0" rIns="0" tIns="0" bIns="0"/>
+          <a:lstStyle/>
+          <a:p>
+            <a:pPr algn="ctr"/>
+            <a:r>
+              <a:rPr sz="1300" b="1">
+                <a:solidFill>
+                  <a:srgbClr val="FFFFFF"/>
+                </a:solidFill>
+                <a:latin typeface="Calibri"/>
+              </a:rPr>
+              <a:t>4</a:t>
+            </a:r>
+          </a:p>
+        </p:txBody>
+      </p:sp>
+      <p:sp>
+        <p:nvSpPr>
+          <p:cNvPr id="16" name="TextBox 15"/>
+          <p:cNvSpPr txBox="1"/>
+          <p:nvPr/>
+        </p:nvSpPr>
+        <p:spPr>
+          <a:xfrm>
+            <a:off x="1143000" y="5175504"/>
+            <a:ext cx="5943600" cy="868680"/>
+          </a:xfrm>
+          <a:prstGeom prst="rect">
+            <a:avLst/>
+          </a:prstGeom>
+          <a:noFill/>
+        </p:spPr>
+        <p:txBody>
+          <a:bodyPr wrap="square" anchor="ctr" lIns="0" rIns="0" tIns="0" bIns="0"/>
+          <a:lstStyle/>
+          <a:p>
+            <a:pPr algn="l"/>
+            <a:r>
+              <a:rPr sz="1700" b="0" i="0">
+                <a:solidFill>
+                  <a:srgbClr val="202122"/>
+                </a:solidFill>
+                <a:latin typeface="Calibri"/>
+              </a:rPr>
+              <a:t>Output each student's highest mark using max().</a:t>
+            </a:r>
+          </a:p>
+        </p:txBody>
+      </p:sp>
+      <p:sp>
+        <p:nvSpPr>
+          <p:cNvPr id="17" name="Rounded Rectangle 16"/>
+          <p:cNvSpPr/>
+          <p:nvPr/>
+        </p:nvSpPr>
+        <p:spPr>
+          <a:xfrm>
+            <a:off x="7772400" y="1508760"/>
+            <a:ext cx="3867912" cy="4572000"/>
+          </a:xfrm>
+          <a:prstGeom prst="roundRect">
+            <a:avLst>
+              <a:gd name="adj" fmla="val 8000"/>
+            </a:avLst>
+          </a:prstGeom>
+          <a:solidFill>
+            <a:srgbClr val="EAF3FF"/>
+          </a:solidFill>
+          <a:ln>
+            <a:noFill/>
+          </a:ln>
+          <a:effectLst/>
+        </p:spPr>
+        <p:style>
+          <a:lnRef idx="1">
+            <a:schemeClr val="accent1"/>
+          </a:lnRef>
+          <a:fillRef idx="3">
+            <a:schemeClr val="accent1"/>
+          </a:fillRef>
+          <a:effectRef idx="2">
+            <a:schemeClr val="accent1"/>
+          </a:effectRef>
+          <a:fontRef idx="minor">
+            <a:schemeClr val="lt1"/>
+          </a:fontRef>
+        </p:style>
+        <p:txBody>
+          <a:bodyPr rtlCol="0" anchor="ctr"/>
+          <a:lstStyle/>
+          <a:p/>
+        </p:txBody>
+      </p:sp>
+      <p:sp>
+        <p:nvSpPr>
+          <p:cNvPr id="18" name="TextBox 17"/>
+          <p:cNvSpPr txBox="1"/>
+          <p:nvPr/>
+        </p:nvSpPr>
+        <p:spPr>
+          <a:xfrm>
+            <a:off x="8046720" y="1737360"/>
+            <a:ext cx="3291840" cy="365760"/>
+          </a:xfrm>
+          <a:prstGeom prst="rect">
+            <a:avLst/>
+          </a:prstGeom>
+          <a:noFill/>
+        </p:spPr>
+        <p:txBody>
+          <a:bodyPr wrap="square" anchor="t" lIns="0" rIns="0" tIns="0" bIns="0"/>
+          <a:lstStyle/>
+          <a:p>
+            <a:pPr algn="l"/>
+            <a:r>
+              <a:rPr sz="1300" b="1" i="0">
+                <a:solidFill>
+                  <a:srgbClr val="0645AD"/>
+                </a:solidFill>
+                <a:latin typeface="Calibri"/>
+              </a:rPr>
+              <a:t>SUCCESS CRITERIA</a:t>
+            </a:r>
+          </a:p>
+        </p:txBody>
+      </p:sp>
+      <p:sp>
+        <p:nvSpPr>
+          <p:cNvPr id="19" name="TextBox 18"/>
+          <p:cNvSpPr txBox="1"/>
+          <p:nvPr/>
+        </p:nvSpPr>
+        <p:spPr>
+          <a:xfrm>
+            <a:off x="8046720" y="2240280"/>
+            <a:ext cx="3337560" cy="3657600"/>
+          </a:xfrm>
+          <a:prstGeom prst="rect">
+            <a:avLst/>
+          </a:prstGeom>
+          <a:noFill/>
+        </p:spPr>
+        <p:txBody>
+          <a:bodyPr wrap="square" lIns="0" rIns="0" tIns="0" bIns="0">
+            <a:spAutoFit/>
+          </a:bodyPr>
+          <a:lstStyle/>
+          <a:p>
+            <a:pPr marL="274320" indent="-274320">
+              <a:spcAft>
+                <a:spcPts val="810"/>
+              </a:spcAft>
+              <a:buClr>
+                <a:srgbClr val="0645AD"/>
+              </a:buClr>
+              <a:buFont typeface="Arial"/>
+              <a:buChar char="•"/>
+            </a:pPr>
+            <a:r>
+              <a:rPr sz="1800" b="0">
+                <a:solidFill>
+                  <a:srgbClr val="202122"/>
+                </a:solidFill>
+                <a:latin typeface="Calibri"/>
+              </a:rPr>
+              <a:t>Correct data types used</a:t>
+            </a:r>
+          </a:p>
+          <a:p>
+            <a:pPr marL="274320" indent="-274320">
+              <a:spcAft>
+                <a:spcPts val="810"/>
+              </a:spcAft>
+              <a:buClr>
+                <a:srgbClr val="0645AD"/>
+              </a:buClr>
+              <a:buFont typeface="Arial"/>
+              <a:buChar char="•"/>
+            </a:pPr>
+            <a:r>
+              <a:rPr sz="1800" b="0">
+                <a:solidFill>
+                  <a:srgbClr val="202122"/>
+                </a:solidFill>
+                <a:latin typeface="Calibri"/>
+              </a:rPr>
+              <a:t>Input is converted with int()</a:t>
+            </a:r>
+          </a:p>
+          <a:p>
+            <a:pPr marL="274320" indent="-274320">
+              <a:spcAft>
+                <a:spcPts val="810"/>
+              </a:spcAft>
+              <a:buClr>
+                <a:srgbClr val="0645AD"/>
+              </a:buClr>
+              <a:buFont typeface="Arial"/>
+              <a:buChar char="•"/>
+            </a:pPr>
+            <a:r>
+              <a:rPr sz="1800" b="0">
+                <a:solidFill>
+                  <a:srgbClr val="202122"/>
+                </a:solidFill>
+                <a:latin typeface="Calibri"/>
+              </a:rPr>
+              <a:t>Unknown names handled</a:t>
+            </a:r>
+          </a:p>
+          <a:p>
+            <a:pPr marL="274320" indent="-274320">
+              <a:spcAft>
+                <a:spcPts val="810"/>
+              </a:spcAft>
+              <a:buClr>
+                <a:srgbClr val="0645AD"/>
+              </a:buClr>
+              <a:buFont typeface="Arial"/>
+              <a:buChar char="•"/>
+            </a:pPr>
+            <a:r>
+              <a:rPr sz="1800" b="0">
+                <a:solidFill>
+                  <a:srgbClr val="202122"/>
+                </a:solidFill>
+                <a:latin typeface="Calibri"/>
+              </a:rPr>
+              <a:t>Output is clearly labelled</a:t>
+            </a:r>
+          </a:p>
+        </p:txBody>
+      </p:sp>
+    </p:spTree>
+  </p:cSld>
+  <p:clrMapOvr>
+    <a:masterClrMapping/>
+  </p:clrMapOvr>
+</p:sld>
+</file>
+
+<file path=ppt/slides/slide16.xml><?xml version="1.0" encoding="utf-8"?>
+<p:sld xmlns:a="http://schemas.openxmlformats.org/drawingml/2006/main" xmlns:p="http://schemas.openxmlformats.org/presentationml/2006/main" xmlns:r="http://schemas.openxmlformats.org/officeDocument/2006/relationships">
+  <p:cSld>
+    <p:bg>
+      <p:bgPr>
+        <a:solidFill>
           <a:srgbClr val="03306E"/>
         </a:solidFill>
         <a:effectLst/>
@@ -5363,6 +8998,398 @@
                 <a:latin typeface="Calibri"/>
               </a:rPr>
               <a:t>3</a:t>
+            </a:r>
+          </a:p>
+        </p:txBody>
+      </p:sp>
+      <p:sp>
+        <p:nvSpPr>
+          <p:cNvPr id="6" name="TextBox 5"/>
+          <p:cNvSpPr txBox="1"/>
+          <p:nvPr/>
+        </p:nvSpPr>
+        <p:spPr>
+          <a:xfrm>
+            <a:off x="548640" y="1554480"/>
+            <a:ext cx="6720840" cy="4617720"/>
+          </a:xfrm>
+          <a:prstGeom prst="rect">
+            <a:avLst/>
+          </a:prstGeom>
+          <a:noFill/>
+        </p:spPr>
+        <p:txBody>
+          <a:bodyPr wrap="square" lIns="0" rIns="0" tIns="0" bIns="0">
+            <a:spAutoFit/>
+          </a:bodyPr>
+          <a:lstStyle/>
+          <a:p>
+            <a:pPr>
+              <a:spcAft>
+                <a:spcPts val="1260"/>
+              </a:spcAft>
+            </a:pPr>
+            <a:r>
+              <a:rPr sz="2100" b="0">
+                <a:solidFill>
+                  <a:srgbClr val="202122"/>
+                </a:solidFill>
+                <a:latin typeface="Calibri"/>
+              </a:rPr>
+              <a:t>Every value in a program has a data type, which decides what it can hold and what you can do with it.</a:t>
+            </a:r>
+          </a:p>
+          <a:p>
+            <a:pPr>
+              <a:spcAft>
+                <a:spcPts val="1260"/>
+              </a:spcAft>
+            </a:pPr>
+            <a:r>
+              <a:rPr sz="2100" b="0">
+                <a:solidFill>
+                  <a:srgbClr val="202122"/>
+                </a:solidFill>
+                <a:latin typeface="Calibri"/>
+              </a:rPr>
+              <a:t>An integer is a whole number, such as 17. A float has a decimal part, such as 4.99. A string is text in quotes, such as 'Ali'. A Boolean is True or False.</a:t>
+            </a:r>
+          </a:p>
+          <a:p>
+            <a:pPr>
+              <a:spcAft>
+                <a:spcPts val="1260"/>
+              </a:spcAft>
+            </a:pPr>
+            <a:r>
+              <a:rPr sz="2100" b="0">
+                <a:solidFill>
+                  <a:srgbClr val="202122"/>
+                </a:solidFill>
+                <a:latin typeface="Calibri"/>
+              </a:rPr>
+              <a:t>Choosing the right type avoids errors. You can do maths with integers and floats but not strings; '5' + '5' gives '55', not 10. Data that looks numeric but isn't used in calculations, such as a phone number, should be a string so leading zeros aren't lost.</a:t>
+            </a:r>
+          </a:p>
+        </p:txBody>
+      </p:sp>
+      <p:sp>
+        <p:nvSpPr>
+          <p:cNvPr id="7" name="Rounded Rectangle 6"/>
+          <p:cNvSpPr/>
+          <p:nvPr/>
+        </p:nvSpPr>
+        <p:spPr>
+          <a:xfrm>
+            <a:off x="7772400" y="1554480"/>
+            <a:ext cx="3867912" cy="4526280"/>
+          </a:xfrm>
+          <a:prstGeom prst="roundRect">
+            <a:avLst>
+              <a:gd name="adj" fmla="val 8000"/>
+            </a:avLst>
+          </a:prstGeom>
+          <a:solidFill>
+            <a:srgbClr val="03306E"/>
+          </a:solidFill>
+          <a:ln>
+            <a:noFill/>
+          </a:ln>
+          <a:effectLst/>
+        </p:spPr>
+        <p:style>
+          <a:lnRef idx="1">
+            <a:schemeClr val="accent1"/>
+          </a:lnRef>
+          <a:fillRef idx="3">
+            <a:schemeClr val="accent1"/>
+          </a:fillRef>
+          <a:effectRef idx="2">
+            <a:schemeClr val="accent1"/>
+          </a:effectRef>
+          <a:fontRef idx="minor">
+            <a:schemeClr val="lt1"/>
+          </a:fontRef>
+        </p:style>
+        <p:txBody>
+          <a:bodyPr rtlCol="0" anchor="ctr"/>
+          <a:lstStyle/>
+          <a:p/>
+        </p:txBody>
+      </p:sp>
+      <p:sp>
+        <p:nvSpPr>
+          <p:cNvPr id="8" name="Oval 7"/>
+          <p:cNvSpPr/>
+          <p:nvPr/>
+        </p:nvSpPr>
+        <p:spPr>
+          <a:xfrm>
+            <a:off x="8046720" y="1828800"/>
+            <a:ext cx="548640" cy="548640"/>
+          </a:xfrm>
+          <a:prstGeom prst="ellipse">
+            <a:avLst/>
+          </a:prstGeom>
+          <a:solidFill>
+            <a:srgbClr val="F2B705"/>
+          </a:solidFill>
+          <a:ln>
+            <a:noFill/>
+          </a:ln>
+          <a:effectLst/>
+        </p:spPr>
+        <p:style>
+          <a:lnRef idx="1">
+            <a:schemeClr val="accent1"/>
+          </a:lnRef>
+          <a:fillRef idx="3">
+            <a:schemeClr val="accent1"/>
+          </a:fillRef>
+          <a:effectRef idx="2">
+            <a:schemeClr val="accent1"/>
+          </a:effectRef>
+          <a:fontRef idx="minor">
+            <a:schemeClr val="lt1"/>
+          </a:fontRef>
+        </p:style>
+        <p:txBody>
+          <a:bodyPr rtlCol="0" anchor="ctr" lIns="0" rIns="0" tIns="0" bIns="0"/>
+          <a:lstStyle/>
+          <a:p>
+            <a:pPr algn="ctr"/>
+            <a:r>
+              <a:rPr sz="1300" b="1">
+                <a:solidFill>
+                  <a:srgbClr val="202122"/>
+                </a:solidFill>
+                <a:latin typeface="Calibri"/>
+              </a:rPr>
+              <a:t>e.g.</a:t>
+            </a:r>
+          </a:p>
+        </p:txBody>
+      </p:sp>
+      <p:sp>
+        <p:nvSpPr>
+          <p:cNvPr id="9" name="TextBox 8"/>
+          <p:cNvSpPr txBox="1"/>
+          <p:nvPr/>
+        </p:nvSpPr>
+        <p:spPr>
+          <a:xfrm>
+            <a:off x="8046720" y="2560320"/>
+            <a:ext cx="3291840" cy="365760"/>
+          </a:xfrm>
+          <a:prstGeom prst="rect">
+            <a:avLst/>
+          </a:prstGeom>
+          <a:noFill/>
+        </p:spPr>
+        <p:txBody>
+          <a:bodyPr wrap="square" anchor="t" lIns="0" rIns="0" tIns="0" bIns="0"/>
+          <a:lstStyle/>
+          <a:p>
+            <a:pPr algn="l"/>
+            <a:r>
+              <a:rPr sz="1300" b="1" i="0">
+                <a:solidFill>
+                  <a:srgbClr val="A9C8F0"/>
+                </a:solidFill>
+                <a:latin typeface="Calibri"/>
+              </a:rPr>
+              <a:t>EXAMPLE</a:t>
+            </a:r>
+          </a:p>
+        </p:txBody>
+      </p:sp>
+      <p:sp>
+        <p:nvSpPr>
+          <p:cNvPr id="10" name="TextBox 9"/>
+          <p:cNvSpPr txBox="1"/>
+          <p:nvPr/>
+        </p:nvSpPr>
+        <p:spPr>
+          <a:xfrm>
+            <a:off x="8046720" y="2971800"/>
+            <a:ext cx="3291840" cy="2971800"/>
+          </a:xfrm>
+          <a:prstGeom prst="rect">
+            <a:avLst/>
+          </a:prstGeom>
+          <a:noFill/>
+        </p:spPr>
+        <p:txBody>
+          <a:bodyPr wrap="square" anchor="t" lIns="0" rIns="0" tIns="0" bIns="0"/>
+          <a:lstStyle/>
+          <a:p>
+            <a:pPr algn="l"/>
+            <a:r>
+              <a:rPr sz="1900" b="0" i="0">
+                <a:solidFill>
+                  <a:srgbClr val="FFFFFF"/>
+                </a:solidFill>
+                <a:latin typeface="Cambria"/>
+              </a:rPr>
+              <a:t>age = 17 (integer), price = 4.99 (float), name = 'Ali' (string), logged_in = True (Boolean), phone = '07700900123' (string).</a:t>
+            </a:r>
+          </a:p>
+        </p:txBody>
+      </p:sp>
+    </p:spTree>
+  </p:cSld>
+  <p:clrMapOvr>
+    <a:masterClrMapping/>
+  </p:clrMapOvr>
+</p:sld>
+</file>
+
+<file path=ppt/slides/slide4.xml><?xml version="1.0" encoding="utf-8"?>
+<p:sld xmlns:a="http://schemas.openxmlformats.org/drawingml/2006/main" xmlns:p="http://schemas.openxmlformats.org/presentationml/2006/main" xmlns:r="http://schemas.openxmlformats.org/officeDocument/2006/relationships">
+  <p:cSld>
+    <p:bg>
+      <p:bgPr>
+        <a:solidFill>
+          <a:srgbClr val="FFFFFF"/>
+        </a:solidFill>
+        <a:effectLst/>
+      </p:bgPr>
+    </p:bg>
+    <p:spTree>
+      <p:nvGrpSpPr>
+        <p:cNvPr id="1" name=""/>
+        <p:cNvGrpSpPr/>
+        <p:nvPr/>
+      </p:nvGrpSpPr>
+      <p:grpSpPr/>
+      <p:sp>
+        <p:nvSpPr>
+          <p:cNvPr id="2" name="TextBox 1"/>
+          <p:cNvSpPr txBox="1"/>
+          <p:nvPr/>
+        </p:nvSpPr>
+        <p:spPr>
+          <a:xfrm>
+            <a:off x="548640" y="320040"/>
+            <a:ext cx="11094415" cy="274320"/>
+          </a:xfrm>
+          <a:prstGeom prst="rect">
+            <a:avLst/>
+          </a:prstGeom>
+          <a:noFill/>
+        </p:spPr>
+        <p:txBody>
+          <a:bodyPr wrap="square" anchor="t" lIns="0" rIns="0" tIns="0" bIns="0"/>
+          <a:lstStyle/>
+          <a:p>
+            <a:pPr algn="l"/>
+            <a:r>
+              <a:rPr sz="1100" b="1" i="0">
+                <a:solidFill>
+                  <a:srgbClr val="54595D"/>
+                </a:solidFill>
+                <a:latin typeface="Calibri"/>
+              </a:rPr>
+              <a:t>CORE COMPONENT  ·  Core Paper 1</a:t>
+            </a:r>
+          </a:p>
+        </p:txBody>
+      </p:sp>
+      <p:sp>
+        <p:nvSpPr>
+          <p:cNvPr id="3" name="TextBox 2"/>
+          <p:cNvSpPr txBox="1"/>
+          <p:nvPr/>
+        </p:nvSpPr>
+        <p:spPr>
+          <a:xfrm>
+            <a:off x="548640" y="566928"/>
+            <a:ext cx="11094415" cy="822960"/>
+          </a:xfrm>
+          <a:prstGeom prst="rect">
+            <a:avLst/>
+          </a:prstGeom>
+          <a:noFill/>
+        </p:spPr>
+        <p:txBody>
+          <a:bodyPr wrap="square" anchor="ctr" lIns="0" rIns="0" tIns="0" bIns="0"/>
+          <a:lstStyle/>
+          <a:p>
+            <a:pPr algn="l"/>
+            <a:r>
+              <a:rPr sz="3200" b="1" i="0">
+                <a:solidFill>
+                  <a:srgbClr val="03306E"/>
+                </a:solidFill>
+                <a:latin typeface="Cambria"/>
+              </a:rPr>
+              <a:t>Standard data types</a:t>
+            </a:r>
+          </a:p>
+        </p:txBody>
+      </p:sp>
+      <p:sp>
+        <p:nvSpPr>
+          <p:cNvPr id="4" name="TextBox 3"/>
+          <p:cNvSpPr txBox="1"/>
+          <p:nvPr/>
+        </p:nvSpPr>
+        <p:spPr>
+          <a:xfrm>
+            <a:off x="548640" y="6446520"/>
+            <a:ext cx="8229600" cy="274320"/>
+          </a:xfrm>
+          <a:prstGeom prst="rect">
+            <a:avLst/>
+          </a:prstGeom>
+          <a:noFill/>
+        </p:spPr>
+        <p:txBody>
+          <a:bodyPr wrap="square" anchor="t" lIns="0" rIns="0" tIns="0" bIns="0"/>
+          <a:lstStyle/>
+          <a:p>
+            <a:pPr algn="l"/>
+            <a:r>
+              <a:rPr sz="1000" b="0" i="0">
+                <a:solidFill>
+                  <a:srgbClr val="54595D"/>
+                </a:solidFill>
+                <a:latin typeface="Calibri"/>
+              </a:rPr>
+              <a:t>Digital Software Development T Level  ·  Data Types, Variables and Data Structures</a:t>
+            </a:r>
+          </a:p>
+        </p:txBody>
+      </p:sp>
+      <p:sp>
+        <p:nvSpPr>
+          <p:cNvPr id="5" name="TextBox 4"/>
+          <p:cNvSpPr txBox="1"/>
+          <p:nvPr/>
+        </p:nvSpPr>
+        <p:spPr>
+          <a:xfrm>
+            <a:off x="10728655" y="6446520"/>
+            <a:ext cx="914400" cy="274320"/>
+          </a:xfrm>
+          <a:prstGeom prst="rect">
+            <a:avLst/>
+          </a:prstGeom>
+          <a:noFill/>
+        </p:spPr>
+        <p:txBody>
+          <a:bodyPr wrap="square" anchor="t" lIns="0" rIns="0" tIns="0" bIns="0"/>
+          <a:lstStyle/>
+          <a:p>
+            <a:pPr algn="r"/>
+            <a:r>
+              <a:rPr sz="1000" b="0" i="0">
+                <a:solidFill>
+                  <a:srgbClr val="54595D"/>
+                </a:solidFill>
+                <a:latin typeface="Calibri"/>
+              </a:rPr>
+              <a:t>4</a:t>
             </a:r>
           </a:p>
         </p:txBody>
@@ -5742,566 +9769,6 @@
 </p:sld>
 </file>
 
-<file path=ppt/slides/slide4.xml><?xml version="1.0" encoding="utf-8"?>
-<p:sld xmlns:a="http://schemas.openxmlformats.org/drawingml/2006/main" xmlns:p="http://schemas.openxmlformats.org/presentationml/2006/main" xmlns:r="http://schemas.openxmlformats.org/officeDocument/2006/relationships">
-  <p:cSld>
-    <p:bg>
-      <p:bgPr>
-        <a:solidFill>
-          <a:srgbClr val="FFFFFF"/>
-        </a:solidFill>
-        <a:effectLst/>
-      </p:bgPr>
-    </p:bg>
-    <p:spTree>
-      <p:nvGrpSpPr>
-        <p:cNvPr id="1" name=""/>
-        <p:cNvGrpSpPr/>
-        <p:nvPr/>
-      </p:nvGrpSpPr>
-      <p:grpSpPr/>
-      <p:sp>
-        <p:nvSpPr>
-          <p:cNvPr id="2" name="TextBox 1"/>
-          <p:cNvSpPr txBox="1"/>
-          <p:nvPr/>
-        </p:nvSpPr>
-        <p:spPr>
-          <a:xfrm>
-            <a:off x="548640" y="320040"/>
-            <a:ext cx="11094415" cy="274320"/>
-          </a:xfrm>
-          <a:prstGeom prst="rect">
-            <a:avLst/>
-          </a:prstGeom>
-          <a:noFill/>
-        </p:spPr>
-        <p:txBody>
-          <a:bodyPr wrap="square" anchor="t" lIns="0" rIns="0" tIns="0" bIns="0"/>
-          <a:lstStyle/>
-          <a:p>
-            <a:pPr algn="l"/>
-            <a:r>
-              <a:rPr sz="1100" b="1" i="0">
-                <a:solidFill>
-                  <a:srgbClr val="54595D"/>
-                </a:solidFill>
-                <a:latin typeface="Calibri"/>
-              </a:rPr>
-              <a:t>CORE COMPONENT  ·  Core Paper 1</a:t>
-            </a:r>
-          </a:p>
-        </p:txBody>
-      </p:sp>
-      <p:sp>
-        <p:nvSpPr>
-          <p:cNvPr id="3" name="TextBox 2"/>
-          <p:cNvSpPr txBox="1"/>
-          <p:nvPr/>
-        </p:nvSpPr>
-        <p:spPr>
-          <a:xfrm>
-            <a:off x="548640" y="566928"/>
-            <a:ext cx="11094415" cy="822960"/>
-          </a:xfrm>
-          <a:prstGeom prst="rect">
-            <a:avLst/>
-          </a:prstGeom>
-          <a:noFill/>
-        </p:spPr>
-        <p:txBody>
-          <a:bodyPr wrap="square" anchor="ctr" lIns="0" rIns="0" tIns="0" bIns="0"/>
-          <a:lstStyle/>
-          <a:p>
-            <a:pPr algn="l"/>
-            <a:r>
-              <a:rPr sz="3200" b="1" i="0">
-                <a:solidFill>
-                  <a:srgbClr val="03306E"/>
-                </a:solidFill>
-                <a:latin typeface="Cambria"/>
-              </a:rPr>
-              <a:t>Variables and constants</a:t>
-            </a:r>
-          </a:p>
-        </p:txBody>
-      </p:sp>
-      <p:sp>
-        <p:nvSpPr>
-          <p:cNvPr id="4" name="TextBox 3"/>
-          <p:cNvSpPr txBox="1"/>
-          <p:nvPr/>
-        </p:nvSpPr>
-        <p:spPr>
-          <a:xfrm>
-            <a:off x="548640" y="6446520"/>
-            <a:ext cx="8229600" cy="274320"/>
-          </a:xfrm>
-          <a:prstGeom prst="rect">
-            <a:avLst/>
-          </a:prstGeom>
-          <a:noFill/>
-        </p:spPr>
-        <p:txBody>
-          <a:bodyPr wrap="square" anchor="t" lIns="0" rIns="0" tIns="0" bIns="0"/>
-          <a:lstStyle/>
-          <a:p>
-            <a:pPr algn="l"/>
-            <a:r>
-              <a:rPr sz="1000" b="0" i="0">
-                <a:solidFill>
-                  <a:srgbClr val="54595D"/>
-                </a:solidFill>
-                <a:latin typeface="Calibri"/>
-              </a:rPr>
-              <a:t>Digital Software Development T Level  ·  Data Types, Variables and Data Structures</a:t>
-            </a:r>
-          </a:p>
-        </p:txBody>
-      </p:sp>
-      <p:sp>
-        <p:nvSpPr>
-          <p:cNvPr id="5" name="TextBox 4"/>
-          <p:cNvSpPr txBox="1"/>
-          <p:nvPr/>
-        </p:nvSpPr>
-        <p:spPr>
-          <a:xfrm>
-            <a:off x="10728655" y="6446520"/>
-            <a:ext cx="914400" cy="274320"/>
-          </a:xfrm>
-          <a:prstGeom prst="rect">
-            <a:avLst/>
-          </a:prstGeom>
-          <a:noFill/>
-        </p:spPr>
-        <p:txBody>
-          <a:bodyPr wrap="square" anchor="t" lIns="0" rIns="0" tIns="0" bIns="0"/>
-          <a:lstStyle/>
-          <a:p>
-            <a:pPr algn="r"/>
-            <a:r>
-              <a:rPr sz="1000" b="0" i="0">
-                <a:solidFill>
-                  <a:srgbClr val="54595D"/>
-                </a:solidFill>
-                <a:latin typeface="Calibri"/>
-              </a:rPr>
-              <a:t>4</a:t>
-            </a:r>
-          </a:p>
-        </p:txBody>
-      </p:sp>
-      <p:sp>
-        <p:nvSpPr>
-          <p:cNvPr id="6" name="Rounded Rectangle 5"/>
-          <p:cNvSpPr/>
-          <p:nvPr/>
-        </p:nvSpPr>
-        <p:spPr>
-          <a:xfrm>
-            <a:off x="548640" y="1600200"/>
-            <a:ext cx="5364327" cy="640080"/>
-          </a:xfrm>
-          <a:prstGeom prst="roundRect">
-            <a:avLst>
-              <a:gd name="adj" fmla="val 15000"/>
-            </a:avLst>
-          </a:prstGeom>
-          <a:solidFill>
-            <a:srgbClr val="03306E"/>
-          </a:solidFill>
-          <a:ln>
-            <a:noFill/>
-          </a:ln>
-          <a:effectLst/>
-        </p:spPr>
-        <p:style>
-          <a:lnRef idx="1">
-            <a:schemeClr val="accent1"/>
-          </a:lnRef>
-          <a:fillRef idx="3">
-            <a:schemeClr val="accent1"/>
-          </a:fillRef>
-          <a:effectRef idx="2">
-            <a:schemeClr val="accent1"/>
-          </a:effectRef>
-          <a:fontRef idx="minor">
-            <a:schemeClr val="lt1"/>
-          </a:fontRef>
-        </p:style>
-        <p:txBody>
-          <a:bodyPr rtlCol="0" anchor="ctr"/>
-          <a:lstStyle/>
-          <a:p/>
-        </p:txBody>
-      </p:sp>
-      <p:sp>
-        <p:nvSpPr>
-          <p:cNvPr id="7" name="TextBox 6"/>
-          <p:cNvSpPr txBox="1"/>
-          <p:nvPr/>
-        </p:nvSpPr>
-        <p:spPr>
-          <a:xfrm>
-            <a:off x="777240" y="1600200"/>
-            <a:ext cx="4907127" cy="640080"/>
-          </a:xfrm>
-          <a:prstGeom prst="rect">
-            <a:avLst/>
-          </a:prstGeom>
-          <a:noFill/>
-        </p:spPr>
-        <p:txBody>
-          <a:bodyPr wrap="square" anchor="ctr" lIns="0" rIns="0" tIns="0" bIns="0"/>
-          <a:lstStyle/>
-          <a:p>
-            <a:pPr algn="l"/>
-            <a:r>
-              <a:rPr sz="2000" b="1" i="0">
-                <a:solidFill>
-                  <a:srgbClr val="FFFFFF"/>
-                </a:solidFill>
-                <a:latin typeface="Calibri"/>
-              </a:rPr>
-              <a:t>Variable</a:t>
-            </a:r>
-          </a:p>
-        </p:txBody>
-      </p:sp>
-      <p:sp>
-        <p:nvSpPr>
-          <p:cNvPr id="8" name="Rounded Rectangle 7"/>
-          <p:cNvSpPr/>
-          <p:nvPr/>
-        </p:nvSpPr>
-        <p:spPr>
-          <a:xfrm>
-            <a:off x="548640" y="2377440"/>
-            <a:ext cx="5364327" cy="3794760"/>
-          </a:xfrm>
-          <a:prstGeom prst="roundRect">
-            <a:avLst>
-              <a:gd name="adj" fmla="val 4000"/>
-            </a:avLst>
-          </a:prstGeom>
-          <a:solidFill>
-            <a:srgbClr val="EAF3FF"/>
-          </a:solidFill>
-          <a:ln>
-            <a:noFill/>
-          </a:ln>
-          <a:effectLst/>
-        </p:spPr>
-        <p:style>
-          <a:lnRef idx="1">
-            <a:schemeClr val="accent1"/>
-          </a:lnRef>
-          <a:fillRef idx="3">
-            <a:schemeClr val="accent1"/>
-          </a:fillRef>
-          <a:effectRef idx="2">
-            <a:schemeClr val="accent1"/>
-          </a:effectRef>
-          <a:fontRef idx="minor">
-            <a:schemeClr val="lt1"/>
-          </a:fontRef>
-        </p:style>
-        <p:txBody>
-          <a:bodyPr rtlCol="0" anchor="ctr"/>
-          <a:lstStyle/>
-          <a:p/>
-        </p:txBody>
-      </p:sp>
-      <p:sp>
-        <p:nvSpPr>
-          <p:cNvPr id="9" name="TextBox 8"/>
-          <p:cNvSpPr txBox="1"/>
-          <p:nvPr/>
-        </p:nvSpPr>
-        <p:spPr>
-          <a:xfrm>
-            <a:off x="822959" y="2606040"/>
-            <a:ext cx="4815687" cy="3337560"/>
-          </a:xfrm>
-          <a:prstGeom prst="rect">
-            <a:avLst/>
-          </a:prstGeom>
-          <a:noFill/>
-        </p:spPr>
-        <p:txBody>
-          <a:bodyPr wrap="square" lIns="0" rIns="0" tIns="0" bIns="0">
-            <a:spAutoFit/>
-          </a:bodyPr>
-          <a:lstStyle/>
-          <a:p>
-            <a:pPr marL="274320" indent="-274320">
-              <a:spcAft>
-                <a:spcPts val="990"/>
-              </a:spcAft>
-              <a:buClr>
-                <a:srgbClr val="0645AD"/>
-              </a:buClr>
-              <a:buFont typeface="Arial"/>
-              <a:buChar char="•"/>
-            </a:pPr>
-            <a:r>
-              <a:rPr sz="2200" b="0">
-                <a:solidFill>
-                  <a:srgbClr val="202122"/>
-                </a:solidFill>
-                <a:latin typeface="Calibri"/>
-              </a:rPr>
-              <a:t>A named value that can change while the program runs</a:t>
-            </a:r>
-          </a:p>
-          <a:p>
-            <a:pPr marL="274320" indent="-274320">
-              <a:spcAft>
-                <a:spcPts val="990"/>
-              </a:spcAft>
-              <a:buClr>
-                <a:srgbClr val="0645AD"/>
-              </a:buClr>
-              <a:buFont typeface="Arial"/>
-              <a:buChar char="•"/>
-            </a:pPr>
-            <a:r>
-              <a:rPr sz="2200" b="0">
-                <a:solidFill>
-                  <a:srgbClr val="202122"/>
-                </a:solidFill>
-                <a:latin typeface="Calibri"/>
-              </a:rPr>
-              <a:t>score = score + 10</a:t>
-            </a:r>
-          </a:p>
-        </p:txBody>
-      </p:sp>
-      <p:sp>
-        <p:nvSpPr>
-          <p:cNvPr id="10" name="Rounded Rectangle 9"/>
-          <p:cNvSpPr/>
-          <p:nvPr/>
-        </p:nvSpPr>
-        <p:spPr>
-          <a:xfrm>
-            <a:off x="6278727" y="1600200"/>
-            <a:ext cx="5364327" cy="640080"/>
-          </a:xfrm>
-          <a:prstGeom prst="roundRect">
-            <a:avLst>
-              <a:gd name="adj" fmla="val 15000"/>
-            </a:avLst>
-          </a:prstGeom>
-          <a:solidFill>
-            <a:srgbClr val="0645AD"/>
-          </a:solidFill>
-          <a:ln>
-            <a:noFill/>
-          </a:ln>
-          <a:effectLst/>
-        </p:spPr>
-        <p:style>
-          <a:lnRef idx="1">
-            <a:schemeClr val="accent1"/>
-          </a:lnRef>
-          <a:fillRef idx="3">
-            <a:schemeClr val="accent1"/>
-          </a:fillRef>
-          <a:effectRef idx="2">
-            <a:schemeClr val="accent1"/>
-          </a:effectRef>
-          <a:fontRef idx="minor">
-            <a:schemeClr val="lt1"/>
-          </a:fontRef>
-        </p:style>
-        <p:txBody>
-          <a:bodyPr rtlCol="0" anchor="ctr"/>
-          <a:lstStyle/>
-          <a:p/>
-        </p:txBody>
-      </p:sp>
-      <p:sp>
-        <p:nvSpPr>
-          <p:cNvPr id="11" name="TextBox 10"/>
-          <p:cNvSpPr txBox="1"/>
-          <p:nvPr/>
-        </p:nvSpPr>
-        <p:spPr>
-          <a:xfrm>
-            <a:off x="6507327" y="1600200"/>
-            <a:ext cx="4907127" cy="640080"/>
-          </a:xfrm>
-          <a:prstGeom prst="rect">
-            <a:avLst/>
-          </a:prstGeom>
-          <a:noFill/>
-        </p:spPr>
-        <p:txBody>
-          <a:bodyPr wrap="square" anchor="ctr" lIns="0" rIns="0" tIns="0" bIns="0"/>
-          <a:lstStyle/>
-          <a:p>
-            <a:pPr algn="l"/>
-            <a:r>
-              <a:rPr sz="2000" b="1" i="0">
-                <a:solidFill>
-                  <a:srgbClr val="FFFFFF"/>
-                </a:solidFill>
-                <a:latin typeface="Calibri"/>
-              </a:rPr>
-              <a:t>Constant</a:t>
-            </a:r>
-          </a:p>
-        </p:txBody>
-      </p:sp>
-      <p:sp>
-        <p:nvSpPr>
-          <p:cNvPr id="12" name="Rounded Rectangle 11"/>
-          <p:cNvSpPr/>
-          <p:nvPr/>
-        </p:nvSpPr>
-        <p:spPr>
-          <a:xfrm>
-            <a:off x="6278727" y="2377440"/>
-            <a:ext cx="5364327" cy="3794760"/>
-          </a:xfrm>
-          <a:prstGeom prst="roundRect">
-            <a:avLst>
-              <a:gd name="adj" fmla="val 4000"/>
-            </a:avLst>
-          </a:prstGeom>
-          <a:solidFill>
-            <a:srgbClr val="EAF3FF"/>
-          </a:solidFill>
-          <a:ln>
-            <a:noFill/>
-          </a:ln>
-          <a:effectLst/>
-        </p:spPr>
-        <p:style>
-          <a:lnRef idx="1">
-            <a:schemeClr val="accent1"/>
-          </a:lnRef>
-          <a:fillRef idx="3">
-            <a:schemeClr val="accent1"/>
-          </a:fillRef>
-          <a:effectRef idx="2">
-            <a:schemeClr val="accent1"/>
-          </a:effectRef>
-          <a:fontRef idx="minor">
-            <a:schemeClr val="lt1"/>
-          </a:fontRef>
-        </p:style>
-        <p:txBody>
-          <a:bodyPr rtlCol="0" anchor="ctr"/>
-          <a:lstStyle/>
-          <a:p/>
-        </p:txBody>
-      </p:sp>
-      <p:sp>
-        <p:nvSpPr>
-          <p:cNvPr id="13" name="TextBox 12"/>
-          <p:cNvSpPr txBox="1"/>
-          <p:nvPr/>
-        </p:nvSpPr>
-        <p:spPr>
-          <a:xfrm>
-            <a:off x="6553047" y="2606040"/>
-            <a:ext cx="4815687" cy="3337560"/>
-          </a:xfrm>
-          <a:prstGeom prst="rect">
-            <a:avLst/>
-          </a:prstGeom>
-          <a:noFill/>
-        </p:spPr>
-        <p:txBody>
-          <a:bodyPr wrap="square" lIns="0" rIns="0" tIns="0" bIns="0">
-            <a:spAutoFit/>
-          </a:bodyPr>
-          <a:lstStyle/>
-          <a:p>
-            <a:pPr marL="274320" indent="-274320">
-              <a:spcAft>
-                <a:spcPts val="990"/>
-              </a:spcAft>
-              <a:buClr>
-                <a:srgbClr val="0645AD"/>
-              </a:buClr>
-              <a:buFont typeface="Arial"/>
-              <a:buChar char="•"/>
-            </a:pPr>
-            <a:r>
-              <a:rPr sz="2200" b="0">
-                <a:solidFill>
-                  <a:srgbClr val="202122"/>
-                </a:solidFill>
-                <a:latin typeface="Calibri"/>
-              </a:rPr>
-              <a:t>A named value that should not change</a:t>
-            </a:r>
-          </a:p>
-          <a:p>
-            <a:pPr marL="274320" indent="-274320">
-              <a:spcAft>
-                <a:spcPts val="990"/>
-              </a:spcAft>
-              <a:buClr>
-                <a:srgbClr val="0645AD"/>
-              </a:buClr>
-              <a:buFont typeface="Arial"/>
-              <a:buChar char="•"/>
-            </a:pPr>
-            <a:r>
-              <a:rPr sz="2200" b="1">
-                <a:solidFill>
-                  <a:srgbClr val="202122"/>
-                </a:solidFill>
-                <a:latin typeface="Calibri"/>
-              </a:rPr>
-              <a:t>Python convention:</a:t>
-            </a:r>
-            <a:r>
-              <a:rPr sz="2200" b="0">
-                <a:solidFill>
-                  <a:srgbClr val="202122"/>
-                </a:solidFill>
-                <a:latin typeface="Calibri"/>
-              </a:rPr>
-              <a:t> capitals, e.g. VAT_RATE = 0.2</a:t>
-            </a:r>
-          </a:p>
-          <a:p>
-            <a:pPr marL="274320" indent="-274320">
-              <a:spcAft>
-                <a:spcPts val="990"/>
-              </a:spcAft>
-              <a:buClr>
-                <a:srgbClr val="0645AD"/>
-              </a:buClr>
-              <a:buFont typeface="Arial"/>
-              <a:buChar char="•"/>
-            </a:pPr>
-            <a:r>
-              <a:rPr sz="2200" b="0">
-                <a:solidFill>
-                  <a:srgbClr val="202122"/>
-                </a:solidFill>
-                <a:latin typeface="Calibri"/>
-              </a:rPr>
-              <a:t>Makes code easier to read and update</a:t>
-            </a:r>
-          </a:p>
-        </p:txBody>
-      </p:sp>
-    </p:spTree>
-  </p:cSld>
-  <p:clrMapOvr>
-    <a:masterClrMapping/>
-  </p:clrMapOvr>
-</p:sld>
-</file>
-
 <file path=ppt/slides/slide5.xml><?xml version="1.0" encoding="utf-8"?>
 <p:sld xmlns:a="http://schemas.openxmlformats.org/drawingml/2006/main" xmlns:p="http://schemas.openxmlformats.org/presentationml/2006/main" xmlns:r="http://schemas.openxmlformats.org/officeDocument/2006/relationships">
   <p:cSld>
@@ -6381,7 +9848,7 @@
                 </a:solidFill>
                 <a:latin typeface="Cambria"/>
               </a:rPr>
-              <a:t>Scope and conversion</a:t>
+              <a:t>Quick check: Standard data types</a:t>
             </a:r>
           </a:p>
         </p:txBody>
@@ -6454,22 +9921,20 @@
       </p:sp>
       <p:sp>
         <p:nvSpPr>
-          <p:cNvPr id="6" name="Rounded Rectangle 5"/>
+          <p:cNvPr id="6" name="Oval 5"/>
           <p:cNvSpPr/>
           <p:nvPr/>
         </p:nvSpPr>
         <p:spPr>
           <a:xfrm>
-            <a:off x="548640" y="1600200"/>
-            <a:ext cx="5364327" cy="640080"/>
-          </a:xfrm>
-          <a:prstGeom prst="roundRect">
-            <a:avLst>
-              <a:gd name="adj" fmla="val 15000"/>
-            </a:avLst>
+            <a:off x="548640" y="1691640"/>
+            <a:ext cx="502920" cy="502920"/>
+          </a:xfrm>
+          <a:prstGeom prst="ellipse">
+            <a:avLst/>
           </a:prstGeom>
           <a:solidFill>
-            <a:srgbClr val="03306E"/>
+            <a:srgbClr val="F2B705"/>
           </a:solidFill>
           <a:ln>
             <a:noFill/>
@@ -6491,9 +9956,20 @@
           </a:fontRef>
         </p:style>
         <p:txBody>
-          <a:bodyPr rtlCol="0" anchor="ctr"/>
-          <a:lstStyle/>
-          <a:p/>
+          <a:bodyPr rtlCol="0" anchor="ctr" lIns="0" rIns="0" tIns="0" bIns="0"/>
+          <a:lstStyle/>
+          <a:p>
+            <a:pPr algn="ctr"/>
+            <a:r>
+              <a:rPr sz="1600" b="1">
+                <a:solidFill>
+                  <a:srgbClr val="202122"/>
+                </a:solidFill>
+                <a:latin typeface="Calibri"/>
+              </a:rPr>
+              <a:t>1</a:t>
+            </a:r>
+          </a:p>
         </p:txBody>
       </p:sp>
       <p:sp>
@@ -6504,8 +9980,8 @@
         </p:nvSpPr>
         <p:spPr>
           <a:xfrm>
-            <a:off x="777240" y="1600200"/>
-            <a:ext cx="4907127" cy="640080"/>
+            <a:off x="1371600" y="1645920"/>
+            <a:ext cx="10271455" cy="1188720"/>
           </a:xfrm>
           <a:prstGeom prst="rect">
             <a:avLst/>
@@ -6513,40 +9989,38 @@
           <a:noFill/>
         </p:spPr>
         <p:txBody>
-          <a:bodyPr wrap="square" anchor="ctr" lIns="0" rIns="0" tIns="0" bIns="0"/>
+          <a:bodyPr wrap="square" anchor="t" lIns="0" rIns="0" tIns="0" bIns="0"/>
           <a:lstStyle/>
           <a:p>
             <a:pPr algn="l"/>
             <a:r>
-              <a:rPr sz="2000" b="1" i="0">
-                <a:solidFill>
-                  <a:srgbClr val="FFFFFF"/>
-                </a:solidFill>
-                <a:latin typeface="Calibri"/>
-              </a:rPr>
-              <a:t>Scope</a:t>
-            </a:r>
-          </a:p>
-        </p:txBody>
-      </p:sp>
-      <p:sp>
-        <p:nvSpPr>
-          <p:cNvPr id="8" name="Rounded Rectangle 7"/>
+              <a:rPr sz="2400" b="0" i="0">
+                <a:solidFill>
+                  <a:srgbClr val="202122"/>
+                </a:solidFill>
+                <a:latin typeface="Calibri"/>
+              </a:rPr>
+              <a:t>What does '5' + '5' give in Python?</a:t>
+            </a:r>
+          </a:p>
+        </p:txBody>
+      </p:sp>
+      <p:sp>
+        <p:nvSpPr>
+          <p:cNvPr id="8" name="Oval 7"/>
           <p:cNvSpPr/>
           <p:nvPr/>
         </p:nvSpPr>
         <p:spPr>
           <a:xfrm>
-            <a:off x="548640" y="2377440"/>
-            <a:ext cx="5364327" cy="3794760"/>
-          </a:xfrm>
-          <a:prstGeom prst="roundRect">
-            <a:avLst>
-              <a:gd name="adj" fmla="val 4000"/>
-            </a:avLst>
+            <a:off x="548640" y="3108960"/>
+            <a:ext cx="502920" cy="502920"/>
+          </a:xfrm>
+          <a:prstGeom prst="ellipse">
+            <a:avLst/>
           </a:prstGeom>
           <a:solidFill>
-            <a:srgbClr val="EAF3FF"/>
+            <a:srgbClr val="F2B705"/>
           </a:solidFill>
           <a:ln>
             <a:noFill/>
@@ -6568,9 +10042,20 @@
           </a:fontRef>
         </p:style>
         <p:txBody>
-          <a:bodyPr rtlCol="0" anchor="ctr"/>
-          <a:lstStyle/>
-          <a:p/>
+          <a:bodyPr rtlCol="0" anchor="ctr" lIns="0" rIns="0" tIns="0" bIns="0"/>
+          <a:lstStyle/>
+          <a:p>
+            <a:pPr algn="ctr"/>
+            <a:r>
+              <a:rPr sz="1600" b="1">
+                <a:solidFill>
+                  <a:srgbClr val="202122"/>
+                </a:solidFill>
+                <a:latin typeface="Calibri"/>
+              </a:rPr>
+              <a:t>2</a:t>
+            </a:r>
+          </a:p>
         </p:txBody>
       </p:sp>
       <p:sp>
@@ -6581,8 +10066,8 @@
         </p:nvSpPr>
         <p:spPr>
           <a:xfrm>
-            <a:off x="822959" y="2606040"/>
-            <a:ext cx="4815687" cy="3337560"/>
+            <a:off x="1371600" y="3063240"/>
+            <a:ext cx="10271455" cy="1188720"/>
           </a:xfrm>
           <a:prstGeom prst="rect">
             <a:avLst/>
@@ -6590,120 +10075,38 @@
           <a:noFill/>
         </p:spPr>
         <p:txBody>
-          <a:bodyPr wrap="square" lIns="0" rIns="0" tIns="0" bIns="0">
-            <a:spAutoFit/>
-          </a:bodyPr>
-          <a:lstStyle/>
-          <a:p>
-            <a:pPr marL="274320" indent="-274320">
-              <a:spcAft>
-                <a:spcPts val="990"/>
-              </a:spcAft>
-              <a:buClr>
-                <a:srgbClr val="0645AD"/>
-              </a:buClr>
-              <a:buFont typeface="Arial"/>
-              <a:buChar char="•"/>
-            </a:pPr>
-            <a:r>
-              <a:rPr sz="2200" b="1">
+          <a:bodyPr wrap="square" anchor="t" lIns="0" rIns="0" tIns="0" bIns="0"/>
+          <a:lstStyle/>
+          <a:p>
+            <a:pPr algn="l"/>
+            <a:r>
+              <a:rPr sz="2400" b="0" i="0">
                 <a:solidFill>
                   <a:srgbClr val="202122"/>
                 </a:solidFill>
                 <a:latin typeface="Calibri"/>
               </a:rPr>
-              <a:t>Local:</a:t>
-            </a:r>
-            <a:r>
-              <a:rPr sz="2200" b="0">
-                <a:solidFill>
-                  <a:srgbClr val="202122"/>
-                </a:solidFill>
-                <a:latin typeface="Calibri"/>
-              </a:rPr>
-              <a:t> created inside a function, only usable there</a:t>
-            </a:r>
-          </a:p>
-          <a:p>
-            <a:pPr marL="274320" indent="-274320">
-              <a:spcAft>
-                <a:spcPts val="990"/>
-              </a:spcAft>
-              <a:buClr>
-                <a:srgbClr val="0645AD"/>
-              </a:buClr>
-              <a:buFont typeface="Arial"/>
-              <a:buChar char="•"/>
-            </a:pPr>
-            <a:r>
-              <a:rPr sz="2200" b="1">
-                <a:solidFill>
-                  <a:srgbClr val="202122"/>
-                </a:solidFill>
-                <a:latin typeface="Calibri"/>
-              </a:rPr>
-              <a:t>Global:</a:t>
-            </a:r>
-            <a:r>
-              <a:rPr sz="2200" b="0">
-                <a:solidFill>
-                  <a:srgbClr val="202122"/>
-                </a:solidFill>
-                <a:latin typeface="Calibri"/>
-              </a:rPr>
-              <a:t> created outside functions, usable anywhere</a:t>
-            </a:r>
-          </a:p>
-          <a:p>
-            <a:pPr marL="274320" indent="-274320">
-              <a:spcAft>
-                <a:spcPts val="990"/>
-              </a:spcAft>
-              <a:buClr>
-                <a:srgbClr val="0645AD"/>
-              </a:buClr>
-              <a:buFont typeface="Arial"/>
-              <a:buChar char="•"/>
-            </a:pPr>
-            <a:r>
-              <a:rPr sz="2200" b="1">
-                <a:solidFill>
-                  <a:srgbClr val="202122"/>
-                </a:solidFill>
-                <a:latin typeface="Calibri"/>
-              </a:rPr>
-              <a:t>Prefer local variables:</a:t>
-            </a:r>
-            <a:r>
-              <a:rPr sz="2200" b="0">
-                <a:solidFill>
-                  <a:srgbClr val="202122"/>
-                </a:solidFill>
-                <a:latin typeface="Calibri"/>
-              </a:rPr>
-              <a:t> fewer side effects</a:t>
-            </a:r>
-          </a:p>
-        </p:txBody>
-      </p:sp>
-      <p:sp>
-        <p:nvSpPr>
-          <p:cNvPr id="10" name="Rounded Rectangle 9"/>
+              <a:t>What type should a price be?</a:t>
+            </a:r>
+          </a:p>
+        </p:txBody>
+      </p:sp>
+      <p:sp>
+        <p:nvSpPr>
+          <p:cNvPr id="10" name="Oval 9"/>
           <p:cNvSpPr/>
           <p:nvPr/>
         </p:nvSpPr>
         <p:spPr>
           <a:xfrm>
-            <a:off x="6278727" y="1600200"/>
-            <a:ext cx="5364327" cy="640080"/>
-          </a:xfrm>
-          <a:prstGeom prst="roundRect">
-            <a:avLst>
-              <a:gd name="adj" fmla="val 15000"/>
-            </a:avLst>
+            <a:off x="548640" y="4526280"/>
+            <a:ext cx="502920" cy="502920"/>
+          </a:xfrm>
+          <a:prstGeom prst="ellipse">
+            <a:avLst/>
           </a:prstGeom>
           <a:solidFill>
-            <a:srgbClr val="0645AD"/>
+            <a:srgbClr val="F2B705"/>
           </a:solidFill>
           <a:ln>
             <a:noFill/>
@@ -6725,9 +10128,20 @@
           </a:fontRef>
         </p:style>
         <p:txBody>
-          <a:bodyPr rtlCol="0" anchor="ctr"/>
-          <a:lstStyle/>
-          <a:p/>
+          <a:bodyPr rtlCol="0" anchor="ctr" lIns="0" rIns="0" tIns="0" bIns="0"/>
+          <a:lstStyle/>
+          <a:p>
+            <a:pPr algn="ctr"/>
+            <a:r>
+              <a:rPr sz="1600" b="1">
+                <a:solidFill>
+                  <a:srgbClr val="202122"/>
+                </a:solidFill>
+                <a:latin typeface="Calibri"/>
+              </a:rPr>
+              <a:t>3</a:t>
+            </a:r>
+          </a:p>
         </p:txBody>
       </p:sp>
       <p:sp>
@@ -6738,8 +10152,8 @@
         </p:nvSpPr>
         <p:spPr>
           <a:xfrm>
-            <a:off x="6507327" y="1600200"/>
-            <a:ext cx="4907127" cy="640080"/>
+            <a:off x="1371600" y="4480560"/>
+            <a:ext cx="10271455" cy="1188720"/>
           </a:xfrm>
           <a:prstGeom prst="rect">
             <a:avLst/>
@@ -6747,76 +10161,32 @@
           <a:noFill/>
         </p:spPr>
         <p:txBody>
-          <a:bodyPr wrap="square" anchor="ctr" lIns="0" rIns="0" tIns="0" bIns="0"/>
+          <a:bodyPr wrap="square" anchor="t" lIns="0" rIns="0" tIns="0" bIns="0"/>
           <a:lstStyle/>
           <a:p>
             <a:pPr algn="l"/>
             <a:r>
-              <a:rPr sz="2000" b="1" i="0">
-                <a:solidFill>
-                  <a:srgbClr val="FFFFFF"/>
-                </a:solidFill>
-                <a:latin typeface="Calibri"/>
-              </a:rPr>
-              <a:t>Type conversion functions</a:t>
-            </a:r>
-          </a:p>
-        </p:txBody>
-      </p:sp>
-      <p:sp>
-        <p:nvSpPr>
-          <p:cNvPr id="12" name="Rounded Rectangle 11"/>
-          <p:cNvSpPr/>
-          <p:nvPr/>
-        </p:nvSpPr>
-        <p:spPr>
-          <a:xfrm>
-            <a:off x="6278727" y="2377440"/>
-            <a:ext cx="5364327" cy="3794760"/>
-          </a:xfrm>
-          <a:prstGeom prst="roundRect">
-            <a:avLst>
-              <a:gd name="adj" fmla="val 4000"/>
-            </a:avLst>
-          </a:prstGeom>
-          <a:solidFill>
-            <a:srgbClr val="EAF3FF"/>
-          </a:solidFill>
-          <a:ln>
-            <a:noFill/>
-          </a:ln>
-          <a:effectLst/>
-        </p:spPr>
-        <p:style>
-          <a:lnRef idx="1">
-            <a:schemeClr val="accent1"/>
-          </a:lnRef>
-          <a:fillRef idx="3">
-            <a:schemeClr val="accent1"/>
-          </a:fillRef>
-          <a:effectRef idx="2">
-            <a:schemeClr val="accent1"/>
-          </a:effectRef>
-          <a:fontRef idx="minor">
-            <a:schemeClr val="lt1"/>
-          </a:fontRef>
-        </p:style>
-        <p:txBody>
-          <a:bodyPr rtlCol="0" anchor="ctr"/>
-          <a:lstStyle/>
-          <a:p/>
-        </p:txBody>
-      </p:sp>
-      <p:sp>
-        <p:nvSpPr>
-          <p:cNvPr id="13" name="TextBox 12"/>
+              <a:rPr sz="2400" b="0" i="0">
+                <a:solidFill>
+                  <a:srgbClr val="202122"/>
+                </a:solidFill>
+                <a:latin typeface="Calibri"/>
+              </a:rPr>
+              <a:t>Why store a phone number as a string?</a:t>
+            </a:r>
+          </a:p>
+        </p:txBody>
+      </p:sp>
+      <p:sp>
+        <p:nvSpPr>
+          <p:cNvPr id="12" name="TextBox 11"/>
           <p:cNvSpPr txBox="1"/>
           <p:nvPr/>
         </p:nvSpPr>
         <p:spPr>
           <a:xfrm>
-            <a:off x="6553047" y="2606040"/>
-            <a:ext cx="4815687" cy="3337560"/>
+            <a:off x="548640" y="5852160"/>
+            <a:ext cx="11094415" cy="365760"/>
           </a:xfrm>
           <a:prstGeom prst="rect">
             <a:avLst/>
@@ -6824,113 +10194,18 @@
           <a:noFill/>
         </p:spPr>
         <p:txBody>
-          <a:bodyPr wrap="square" lIns="0" rIns="0" tIns="0" bIns="0">
-            <a:spAutoFit/>
-          </a:bodyPr>
-          <a:lstStyle/>
-          <a:p>
-            <a:pPr marL="274320" indent="-274320">
-              <a:spcAft>
-                <a:spcPts val="990"/>
-              </a:spcAft>
-              <a:buClr>
-                <a:srgbClr val="0645AD"/>
-              </a:buClr>
-              <a:buFont typeface="Arial"/>
-              <a:buChar char="•"/>
-            </a:pPr>
-            <a:r>
-              <a:rPr sz="2200" b="0">
-                <a:solidFill>
-                  <a:srgbClr val="202122"/>
-                </a:solidFill>
-                <a:latin typeface="Calibri"/>
-              </a:rPr>
-              <a:t>int('42') gives 42</a:t>
-            </a:r>
-          </a:p>
-          <a:p>
-            <a:pPr marL="274320" indent="-274320">
-              <a:spcAft>
-                <a:spcPts val="990"/>
-              </a:spcAft>
-              <a:buClr>
-                <a:srgbClr val="0645AD"/>
-              </a:buClr>
-              <a:buFont typeface="Arial"/>
-              <a:buChar char="•"/>
-            </a:pPr>
-            <a:r>
-              <a:rPr sz="2200" b="0">
-                <a:solidFill>
-                  <a:srgbClr val="202122"/>
-                </a:solidFill>
-                <a:latin typeface="Calibri"/>
-              </a:rPr>
-              <a:t>float('3.5') gives 3.5</a:t>
-            </a:r>
-          </a:p>
-          <a:p>
-            <a:pPr marL="274320" indent="-274320">
-              <a:spcAft>
-                <a:spcPts val="990"/>
-              </a:spcAft>
-              <a:buClr>
-                <a:srgbClr val="0645AD"/>
-              </a:buClr>
-              <a:buFont typeface="Arial"/>
-              <a:buChar char="•"/>
-            </a:pPr>
-            <a:r>
-              <a:rPr sz="2200" b="0">
-                <a:solidFill>
-                  <a:srgbClr val="202122"/>
-                </a:solidFill>
-                <a:latin typeface="Calibri"/>
-              </a:rPr>
-              <a:t>str(99) gives '99'</a:t>
-            </a:r>
-          </a:p>
-          <a:p>
-            <a:pPr marL="274320" indent="-274320">
-              <a:spcAft>
-                <a:spcPts val="990"/>
-              </a:spcAft>
-              <a:buClr>
-                <a:srgbClr val="0645AD"/>
-              </a:buClr>
-              <a:buFont typeface="Arial"/>
-              <a:buChar char="•"/>
-            </a:pPr>
-            <a:r>
-              <a:rPr sz="2200" b="0">
-                <a:solidFill>
-                  <a:srgbClr val="202122"/>
-                </a:solidFill>
-                <a:latin typeface="Calibri"/>
-              </a:rPr>
-              <a:t>bool(0) gives False</a:t>
-            </a:r>
-          </a:p>
-          <a:p>
-            <a:pPr marL="274320" indent="-274320">
-              <a:spcAft>
-                <a:spcPts val="990"/>
-              </a:spcAft>
-              <a:buClr>
-                <a:srgbClr val="0645AD"/>
-              </a:buClr>
-              <a:buFont typeface="Arial"/>
-              <a:buChar char="•"/>
-            </a:pPr>
-            <a:r>
-              <a:rPr sz="2200" b="0">
-                <a:solidFill>
-                  <a:srgbClr val="202122"/>
-                </a:solidFill>
-                <a:latin typeface="Calibri"/>
-              </a:rPr>
-              <a:t>input() always returns a string</a:t>
+          <a:bodyPr wrap="square" anchor="t" lIns="0" rIns="0" tIns="0" bIns="0"/>
+          <a:lstStyle/>
+          <a:p>
+            <a:pPr algn="l"/>
+            <a:r>
+              <a:rPr sz="1300" b="0" i="1">
+                <a:solidFill>
+                  <a:srgbClr val="54595D"/>
+                </a:solidFill>
+                <a:latin typeface="Calibri"/>
+              </a:rPr>
+              <a:t>Answer on mini whiteboards or in your book. Answers are in the speaker notes.</a:t>
             </a:r>
           </a:p>
         </p:txBody>
@@ -7022,7 +10297,7 @@
                 </a:solidFill>
                 <a:latin typeface="Cambria"/>
               </a:rPr>
-              <a:t>Data structures</a:t>
+              <a:t>Variables and constants</a:t>
             </a:r>
           </a:p>
         </p:txBody>
@@ -7093,305 +10368,50 @@
           </a:p>
         </p:txBody>
       </p:sp>
-      <p:graphicFrame>
-        <p:nvGraphicFramePr>
-          <p:cNvPr id="6" name="Table 5"/>
-          <p:cNvGraphicFramePr>
-            <a:graphicFrameLocks noGrp="1"/>
-          </p:cNvGraphicFramePr>
-          <p:nvPr/>
-        </p:nvGraphicFramePr>
-        <p:xfrm>
-          <a:off x="548640" y="1600200"/>
-          <a:ext cx="11094414" cy="3977640"/>
-        </p:xfrm>
-        <a:graphic>
-          <a:graphicData uri="http://schemas.openxmlformats.org/drawingml/2006/table">
-            <a:tbl>
-              <a:tblPr firstRow="1" bandRow="1">
-                <a:tableStyleId>{5C22544A-7EE6-4342-B048-85BDC9FD1C3A}</a:tableStyleId>
-              </a:tblPr>
-              <a:tblGrid>
-                <a:gridCol w="1912830"/>
-                <a:gridCol w="4845836"/>
-                <a:gridCol w="4335748"/>
-              </a:tblGrid>
-              <a:tr h="994410">
-                <a:tc>
-                  <a:txBody>
-                    <a:bodyPr wrap="square"/>
-                    <a:lstStyle/>
-                    <a:p>
-                      <a:r>
-                        <a:rPr sz="1600" b="1">
-                          <a:solidFill>
-                            <a:srgbClr val="FFFFFF"/>
-                          </a:solidFill>
-                          <a:latin typeface="Calibri"/>
-                        </a:rPr>
-                        <a:t>Structure</a:t>
-                      </a:r>
-                    </a:p>
-                  </a:txBody>
-                  <a:tcPr marL="91440" marR="91440" anchor="ctr">
-                    <a:solidFill>
-                      <a:srgbClr val="03306E"/>
-                    </a:solidFill>
-                  </a:tcPr>
-                </a:tc>
-                <a:tc>
-                  <a:txBody>
-                    <a:bodyPr wrap="square"/>
-                    <a:lstStyle/>
-                    <a:p>
-                      <a:r>
-                        <a:rPr sz="1600" b="1">
-                          <a:solidFill>
-                            <a:srgbClr val="FFFFFF"/>
-                          </a:solidFill>
-                          <a:latin typeface="Calibri"/>
-                        </a:rPr>
-                        <a:t>What it is</a:t>
-                      </a:r>
-                    </a:p>
-                  </a:txBody>
-                  <a:tcPr marL="91440" marR="91440" anchor="ctr">
-                    <a:solidFill>
-                      <a:srgbClr val="03306E"/>
-                    </a:solidFill>
-                  </a:tcPr>
-                </a:tc>
-                <a:tc>
-                  <a:txBody>
-                    <a:bodyPr wrap="square"/>
-                    <a:lstStyle/>
-                    <a:p>
-                      <a:r>
-                        <a:rPr sz="1600" b="1">
-                          <a:solidFill>
-                            <a:srgbClr val="FFFFFF"/>
-                          </a:solidFill>
-                          <a:latin typeface="Calibri"/>
-                        </a:rPr>
-                        <a:t>Use it for</a:t>
-                      </a:r>
-                    </a:p>
-                  </a:txBody>
-                  <a:tcPr marL="91440" marR="91440" anchor="ctr">
-                    <a:solidFill>
-                      <a:srgbClr val="03306E"/>
-                    </a:solidFill>
-                  </a:tcPr>
-                </a:tc>
-              </a:tr>
-              <a:tr h="994410">
-                <a:tc>
-                  <a:txBody>
-                    <a:bodyPr wrap="square"/>
-                    <a:lstStyle/>
-                    <a:p>
-                      <a:r>
-                        <a:rPr sz="1600" b="1">
-                          <a:solidFill>
-                            <a:srgbClr val="03306E"/>
-                          </a:solidFill>
-                          <a:latin typeface="Calibri"/>
-                        </a:rPr>
-                        <a:t>List</a:t>
-                      </a:r>
-                    </a:p>
-                  </a:txBody>
-                  <a:tcPr marL="91440" marR="91440" anchor="ctr">
-                    <a:solidFill>
-                      <a:srgbClr val="FFFFFF"/>
-                    </a:solidFill>
-                  </a:tcPr>
-                </a:tc>
-                <a:tc>
-                  <a:txBody>
-                    <a:bodyPr wrap="square"/>
-                    <a:lstStyle/>
-                    <a:p>
-                      <a:r>
-                        <a:rPr sz="1600" b="0">
-                          <a:solidFill>
-                            <a:srgbClr val="202122"/>
-                          </a:solidFill>
-                          <a:latin typeface="Calibri"/>
-                        </a:rPr>
-                        <a:t>Ordered, changeable collection: scores = [12, 7, 9]</a:t>
-                      </a:r>
-                    </a:p>
-                  </a:txBody>
-                  <a:tcPr marL="91440" marR="91440" anchor="ctr">
-                    <a:solidFill>
-                      <a:srgbClr val="FFFFFF"/>
-                    </a:solidFill>
-                  </a:tcPr>
-                </a:tc>
-                <a:tc>
-                  <a:txBody>
-                    <a:bodyPr wrap="square"/>
-                    <a:lstStyle/>
-                    <a:p>
-                      <a:r>
-                        <a:rPr sz="1600" b="0">
-                          <a:solidFill>
-                            <a:srgbClr val="202122"/>
-                          </a:solidFill>
-                          <a:latin typeface="Calibri"/>
-                        </a:rPr>
-                        <a:t>A group of items you add to or sort</a:t>
-                      </a:r>
-                    </a:p>
-                  </a:txBody>
-                  <a:tcPr marL="91440" marR="91440" anchor="ctr">
-                    <a:solidFill>
-                      <a:srgbClr val="FFFFFF"/>
-                    </a:solidFill>
-                  </a:tcPr>
-                </a:tc>
-              </a:tr>
-              <a:tr h="994410">
-                <a:tc>
-                  <a:txBody>
-                    <a:bodyPr wrap="square"/>
-                    <a:lstStyle/>
-                    <a:p>
-                      <a:r>
-                        <a:rPr sz="1600" b="1">
-                          <a:solidFill>
-                            <a:srgbClr val="03306E"/>
-                          </a:solidFill>
-                          <a:latin typeface="Calibri"/>
-                        </a:rPr>
-                        <a:t>Array</a:t>
-                      </a:r>
-                    </a:p>
-                  </a:txBody>
-                  <a:tcPr marL="91440" marR="91440" anchor="ctr">
-                    <a:solidFill>
-                      <a:srgbClr val="EAF3FF"/>
-                    </a:solidFill>
-                  </a:tcPr>
-                </a:tc>
-                <a:tc>
-                  <a:txBody>
-                    <a:bodyPr wrap="square"/>
-                    <a:lstStyle/>
-                    <a:p>
-                      <a:r>
-                        <a:rPr sz="1600" b="0">
-                          <a:solidFill>
-                            <a:srgbClr val="202122"/>
-                          </a:solidFill>
-                          <a:latin typeface="Calibri"/>
-                        </a:rPr>
-                        <a:t>Ordered collection of items of the same type</a:t>
-                      </a:r>
-                    </a:p>
-                  </a:txBody>
-                  <a:tcPr marL="91440" marR="91440" anchor="ctr">
-                    <a:solidFill>
-                      <a:srgbClr val="EAF3FF"/>
-                    </a:solidFill>
-                  </a:tcPr>
-                </a:tc>
-                <a:tc>
-                  <a:txBody>
-                    <a:bodyPr wrap="square"/>
-                    <a:lstStyle/>
-                    <a:p>
-                      <a:r>
-                        <a:rPr sz="1600" b="0">
-                          <a:solidFill>
-                            <a:srgbClr val="202122"/>
-                          </a:solidFill>
-                          <a:latin typeface="Calibri"/>
-                        </a:rPr>
-                        <a:t>Fixed sets of values, e.g. sensor readings</a:t>
-                      </a:r>
-                    </a:p>
-                  </a:txBody>
-                  <a:tcPr marL="91440" marR="91440" anchor="ctr">
-                    <a:solidFill>
-                      <a:srgbClr val="EAF3FF"/>
-                    </a:solidFill>
-                  </a:tcPr>
-                </a:tc>
-              </a:tr>
-              <a:tr h="994410">
-                <a:tc>
-                  <a:txBody>
-                    <a:bodyPr wrap="square"/>
-                    <a:lstStyle/>
-                    <a:p>
-                      <a:r>
-                        <a:rPr sz="1600" b="1">
-                          <a:solidFill>
-                            <a:srgbClr val="03306E"/>
-                          </a:solidFill>
-                          <a:latin typeface="Calibri"/>
-                        </a:rPr>
-                        <a:t>Dictionary</a:t>
-                      </a:r>
-                    </a:p>
-                  </a:txBody>
-                  <a:tcPr marL="91440" marR="91440" anchor="ctr">
-                    <a:solidFill>
-                      <a:srgbClr val="FFFFFF"/>
-                    </a:solidFill>
-                  </a:tcPr>
-                </a:tc>
-                <a:tc>
-                  <a:txBody>
-                    <a:bodyPr wrap="square"/>
-                    <a:lstStyle/>
-                    <a:p>
-                      <a:r>
-                        <a:rPr sz="1600" b="0">
-                          <a:solidFill>
-                            <a:srgbClr val="202122"/>
-                          </a:solidFill>
-                          <a:latin typeface="Calibri"/>
-                        </a:rPr>
-                        <a:t>Key and value pairs: user = {'name': 'Ali', 'age': 17}</a:t>
-                      </a:r>
-                    </a:p>
-                  </a:txBody>
-                  <a:tcPr marL="91440" marR="91440" anchor="ctr">
-                    <a:solidFill>
-                      <a:srgbClr val="FFFFFF"/>
-                    </a:solidFill>
-                  </a:tcPr>
-                </a:tc>
-                <a:tc>
-                  <a:txBody>
-                    <a:bodyPr wrap="square"/>
-                    <a:lstStyle/>
-                    <a:p>
-                      <a:r>
-                        <a:rPr sz="1600" b="0">
-                          <a:solidFill>
-                            <a:srgbClr val="202122"/>
-                          </a:solidFill>
-                          <a:latin typeface="Calibri"/>
-                        </a:rPr>
-                        <a:t>Looking values up by a key</a:t>
-                      </a:r>
-                    </a:p>
-                  </a:txBody>
-                  <a:tcPr marL="91440" marR="91440" anchor="ctr">
-                    <a:solidFill>
-                      <a:srgbClr val="FFFFFF"/>
-                    </a:solidFill>
-                  </a:tcPr>
-                </a:tc>
-              </a:tr>
-            </a:tbl>
-          </a:graphicData>
-        </a:graphic>
-      </p:graphicFrame>
+      <p:sp>
+        <p:nvSpPr>
+          <p:cNvPr id="6" name="Rounded Rectangle 5"/>
+          <p:cNvSpPr/>
+          <p:nvPr/>
+        </p:nvSpPr>
+        <p:spPr>
+          <a:xfrm>
+            <a:off x="548640" y="1600200"/>
+            <a:ext cx="5364327" cy="640080"/>
+          </a:xfrm>
+          <a:prstGeom prst="roundRect">
+            <a:avLst>
+              <a:gd name="adj" fmla="val 15000"/>
+            </a:avLst>
+          </a:prstGeom>
+          <a:solidFill>
+            <a:srgbClr val="03306E"/>
+          </a:solidFill>
+          <a:ln>
+            <a:noFill/>
+          </a:ln>
+          <a:effectLst/>
+        </p:spPr>
+        <p:style>
+          <a:lnRef idx="1">
+            <a:schemeClr val="accent1"/>
+          </a:lnRef>
+          <a:fillRef idx="3">
+            <a:schemeClr val="accent1"/>
+          </a:fillRef>
+          <a:effectRef idx="2">
+            <a:schemeClr val="accent1"/>
+          </a:effectRef>
+          <a:fontRef idx="minor">
+            <a:schemeClr val="lt1"/>
+          </a:fontRef>
+        </p:style>
+        <p:txBody>
+          <a:bodyPr rtlCol="0" anchor="ctr"/>
+          <a:lstStyle/>
+          <a:p/>
+        </p:txBody>
+      </p:sp>
       <p:sp>
         <p:nvSpPr>
           <p:cNvPr id="7" name="TextBox 6"/>
@@ -7400,8 +10420,8 @@
         </p:nvSpPr>
         <p:spPr>
           <a:xfrm>
-            <a:off x="548640" y="5715000"/>
-            <a:ext cx="11094415" cy="457200"/>
+            <a:off x="777240" y="1600200"/>
+            <a:ext cx="4907127" cy="640080"/>
           </a:xfrm>
           <a:prstGeom prst="rect">
             <a:avLst/>
@@ -7409,18 +10429,343 @@
           <a:noFill/>
         </p:spPr>
         <p:txBody>
-          <a:bodyPr wrap="square" anchor="t" lIns="0" rIns="0" tIns="0" bIns="0"/>
+          <a:bodyPr wrap="square" anchor="ctr" lIns="0" rIns="0" tIns="0" bIns="0"/>
           <a:lstStyle/>
           <a:p>
             <a:pPr algn="l"/>
             <a:r>
-              <a:rPr sz="1300" b="0" i="1">
-                <a:solidFill>
-                  <a:srgbClr val="54595D"/>
-                </a:solidFill>
-                <a:latin typeface="Calibri"/>
-              </a:rPr>
-              <a:t>Useful list methods: append(), insert(), remove(), pop(), sort(), index(), count(), len(), in.</a:t>
+              <a:rPr sz="2000" b="1" i="0">
+                <a:solidFill>
+                  <a:srgbClr val="FFFFFF"/>
+                </a:solidFill>
+                <a:latin typeface="Calibri"/>
+              </a:rPr>
+              <a:t>Variable</a:t>
+            </a:r>
+          </a:p>
+        </p:txBody>
+      </p:sp>
+      <p:sp>
+        <p:nvSpPr>
+          <p:cNvPr id="8" name="Rounded Rectangle 7"/>
+          <p:cNvSpPr/>
+          <p:nvPr/>
+        </p:nvSpPr>
+        <p:spPr>
+          <a:xfrm>
+            <a:off x="548640" y="2377440"/>
+            <a:ext cx="5364327" cy="3794760"/>
+          </a:xfrm>
+          <a:prstGeom prst="roundRect">
+            <a:avLst>
+              <a:gd name="adj" fmla="val 4000"/>
+            </a:avLst>
+          </a:prstGeom>
+          <a:solidFill>
+            <a:srgbClr val="EAF3FF"/>
+          </a:solidFill>
+          <a:ln>
+            <a:noFill/>
+          </a:ln>
+          <a:effectLst/>
+        </p:spPr>
+        <p:style>
+          <a:lnRef idx="1">
+            <a:schemeClr val="accent1"/>
+          </a:lnRef>
+          <a:fillRef idx="3">
+            <a:schemeClr val="accent1"/>
+          </a:fillRef>
+          <a:effectRef idx="2">
+            <a:schemeClr val="accent1"/>
+          </a:effectRef>
+          <a:fontRef idx="minor">
+            <a:schemeClr val="lt1"/>
+          </a:fontRef>
+        </p:style>
+        <p:txBody>
+          <a:bodyPr rtlCol="0" anchor="ctr"/>
+          <a:lstStyle/>
+          <a:p/>
+        </p:txBody>
+      </p:sp>
+      <p:sp>
+        <p:nvSpPr>
+          <p:cNvPr id="9" name="TextBox 8"/>
+          <p:cNvSpPr txBox="1"/>
+          <p:nvPr/>
+        </p:nvSpPr>
+        <p:spPr>
+          <a:xfrm>
+            <a:off x="822959" y="2606040"/>
+            <a:ext cx="4815687" cy="3337560"/>
+          </a:xfrm>
+          <a:prstGeom prst="rect">
+            <a:avLst/>
+          </a:prstGeom>
+          <a:noFill/>
+        </p:spPr>
+        <p:txBody>
+          <a:bodyPr wrap="square" lIns="0" rIns="0" tIns="0" bIns="0">
+            <a:spAutoFit/>
+          </a:bodyPr>
+          <a:lstStyle/>
+          <a:p>
+            <a:pPr marL="274320" indent="-274320">
+              <a:spcAft>
+                <a:spcPts val="990"/>
+              </a:spcAft>
+              <a:buClr>
+                <a:srgbClr val="0645AD"/>
+              </a:buClr>
+              <a:buFont typeface="Arial"/>
+              <a:buChar char="•"/>
+            </a:pPr>
+            <a:r>
+              <a:rPr sz="2200" b="0">
+                <a:solidFill>
+                  <a:srgbClr val="202122"/>
+                </a:solidFill>
+                <a:latin typeface="Calibri"/>
+              </a:rPr>
+              <a:t>A named value that can change while the program runs</a:t>
+            </a:r>
+          </a:p>
+          <a:p>
+            <a:pPr marL="274320" indent="-274320">
+              <a:spcAft>
+                <a:spcPts val="990"/>
+              </a:spcAft>
+              <a:buClr>
+                <a:srgbClr val="0645AD"/>
+              </a:buClr>
+              <a:buFont typeface="Arial"/>
+              <a:buChar char="•"/>
+            </a:pPr>
+            <a:r>
+              <a:rPr sz="2200" b="0">
+                <a:solidFill>
+                  <a:srgbClr val="202122"/>
+                </a:solidFill>
+                <a:latin typeface="Calibri"/>
+              </a:rPr>
+              <a:t>score = score + 10</a:t>
+            </a:r>
+          </a:p>
+        </p:txBody>
+      </p:sp>
+      <p:sp>
+        <p:nvSpPr>
+          <p:cNvPr id="10" name="Rounded Rectangle 9"/>
+          <p:cNvSpPr/>
+          <p:nvPr/>
+        </p:nvSpPr>
+        <p:spPr>
+          <a:xfrm>
+            <a:off x="6278727" y="1600200"/>
+            <a:ext cx="5364327" cy="640080"/>
+          </a:xfrm>
+          <a:prstGeom prst="roundRect">
+            <a:avLst>
+              <a:gd name="adj" fmla="val 15000"/>
+            </a:avLst>
+          </a:prstGeom>
+          <a:solidFill>
+            <a:srgbClr val="0645AD"/>
+          </a:solidFill>
+          <a:ln>
+            <a:noFill/>
+          </a:ln>
+          <a:effectLst/>
+        </p:spPr>
+        <p:style>
+          <a:lnRef idx="1">
+            <a:schemeClr val="accent1"/>
+          </a:lnRef>
+          <a:fillRef idx="3">
+            <a:schemeClr val="accent1"/>
+          </a:fillRef>
+          <a:effectRef idx="2">
+            <a:schemeClr val="accent1"/>
+          </a:effectRef>
+          <a:fontRef idx="minor">
+            <a:schemeClr val="lt1"/>
+          </a:fontRef>
+        </p:style>
+        <p:txBody>
+          <a:bodyPr rtlCol="0" anchor="ctr"/>
+          <a:lstStyle/>
+          <a:p/>
+        </p:txBody>
+      </p:sp>
+      <p:sp>
+        <p:nvSpPr>
+          <p:cNvPr id="11" name="TextBox 10"/>
+          <p:cNvSpPr txBox="1"/>
+          <p:nvPr/>
+        </p:nvSpPr>
+        <p:spPr>
+          <a:xfrm>
+            <a:off x="6507327" y="1600200"/>
+            <a:ext cx="4907127" cy="640080"/>
+          </a:xfrm>
+          <a:prstGeom prst="rect">
+            <a:avLst/>
+          </a:prstGeom>
+          <a:noFill/>
+        </p:spPr>
+        <p:txBody>
+          <a:bodyPr wrap="square" anchor="ctr" lIns="0" rIns="0" tIns="0" bIns="0"/>
+          <a:lstStyle/>
+          <a:p>
+            <a:pPr algn="l"/>
+            <a:r>
+              <a:rPr sz="2000" b="1" i="0">
+                <a:solidFill>
+                  <a:srgbClr val="FFFFFF"/>
+                </a:solidFill>
+                <a:latin typeface="Calibri"/>
+              </a:rPr>
+              <a:t>Constant</a:t>
+            </a:r>
+          </a:p>
+        </p:txBody>
+      </p:sp>
+      <p:sp>
+        <p:nvSpPr>
+          <p:cNvPr id="12" name="Rounded Rectangle 11"/>
+          <p:cNvSpPr/>
+          <p:nvPr/>
+        </p:nvSpPr>
+        <p:spPr>
+          <a:xfrm>
+            <a:off x="6278727" y="2377440"/>
+            <a:ext cx="5364327" cy="3794760"/>
+          </a:xfrm>
+          <a:prstGeom prst="roundRect">
+            <a:avLst>
+              <a:gd name="adj" fmla="val 4000"/>
+            </a:avLst>
+          </a:prstGeom>
+          <a:solidFill>
+            <a:srgbClr val="EAF3FF"/>
+          </a:solidFill>
+          <a:ln>
+            <a:noFill/>
+          </a:ln>
+          <a:effectLst/>
+        </p:spPr>
+        <p:style>
+          <a:lnRef idx="1">
+            <a:schemeClr val="accent1"/>
+          </a:lnRef>
+          <a:fillRef idx="3">
+            <a:schemeClr val="accent1"/>
+          </a:fillRef>
+          <a:effectRef idx="2">
+            <a:schemeClr val="accent1"/>
+          </a:effectRef>
+          <a:fontRef idx="minor">
+            <a:schemeClr val="lt1"/>
+          </a:fontRef>
+        </p:style>
+        <p:txBody>
+          <a:bodyPr rtlCol="0" anchor="ctr"/>
+          <a:lstStyle/>
+          <a:p/>
+        </p:txBody>
+      </p:sp>
+      <p:sp>
+        <p:nvSpPr>
+          <p:cNvPr id="13" name="TextBox 12"/>
+          <p:cNvSpPr txBox="1"/>
+          <p:nvPr/>
+        </p:nvSpPr>
+        <p:spPr>
+          <a:xfrm>
+            <a:off x="6553047" y="2606040"/>
+            <a:ext cx="4815687" cy="3337560"/>
+          </a:xfrm>
+          <a:prstGeom prst="rect">
+            <a:avLst/>
+          </a:prstGeom>
+          <a:noFill/>
+        </p:spPr>
+        <p:txBody>
+          <a:bodyPr wrap="square" lIns="0" rIns="0" tIns="0" bIns="0">
+            <a:spAutoFit/>
+          </a:bodyPr>
+          <a:lstStyle/>
+          <a:p>
+            <a:pPr marL="274320" indent="-274320">
+              <a:spcAft>
+                <a:spcPts val="990"/>
+              </a:spcAft>
+              <a:buClr>
+                <a:srgbClr val="0645AD"/>
+              </a:buClr>
+              <a:buFont typeface="Arial"/>
+              <a:buChar char="•"/>
+            </a:pPr>
+            <a:r>
+              <a:rPr sz="2200" b="0">
+                <a:solidFill>
+                  <a:srgbClr val="202122"/>
+                </a:solidFill>
+                <a:latin typeface="Calibri"/>
+              </a:rPr>
+              <a:t>A named value that should not change</a:t>
+            </a:r>
+          </a:p>
+          <a:p>
+            <a:pPr marL="274320" indent="-274320">
+              <a:spcAft>
+                <a:spcPts val="990"/>
+              </a:spcAft>
+              <a:buClr>
+                <a:srgbClr val="0645AD"/>
+              </a:buClr>
+              <a:buFont typeface="Arial"/>
+              <a:buChar char="•"/>
+            </a:pPr>
+            <a:r>
+              <a:rPr sz="2200" b="1">
+                <a:solidFill>
+                  <a:srgbClr val="202122"/>
+                </a:solidFill>
+                <a:latin typeface="Calibri"/>
+              </a:rPr>
+              <a:t>Python convention:</a:t>
+            </a:r>
+            <a:r>
+              <a:rPr sz="2200" b="0">
+                <a:solidFill>
+                  <a:srgbClr val="202122"/>
+                </a:solidFill>
+                <a:latin typeface="Calibri"/>
+              </a:rPr>
+              <a:t> capitals, e.g. VAT_RATE = 0.2</a:t>
+            </a:r>
+          </a:p>
+          <a:p>
+            <a:pPr marL="274320" indent="-274320">
+              <a:spcAft>
+                <a:spcPts val="990"/>
+              </a:spcAft>
+              <a:buClr>
+                <a:srgbClr val="0645AD"/>
+              </a:buClr>
+              <a:buFont typeface="Arial"/>
+              <a:buChar char="•"/>
+            </a:pPr>
+            <a:r>
+              <a:rPr sz="2200" b="0">
+                <a:solidFill>
+                  <a:srgbClr val="202122"/>
+                </a:solidFill>
+                <a:latin typeface="Calibri"/>
+              </a:rPr>
+              <a:t>Makes code easier to read and update</a:t>
             </a:r>
           </a:p>
         </p:txBody>
@@ -7512,7 +10857,7 @@
                 </a:solidFill>
                 <a:latin typeface="Cambria"/>
               </a:rPr>
-              <a:t>Check your understanding</a:t>
+              <a:t>Scope and conversion</a:t>
             </a:r>
           </a:p>
         </p:txBody>
@@ -7585,14 +10930,129 @@
       </p:sp>
       <p:sp>
         <p:nvSpPr>
-          <p:cNvPr id="6" name="Oval 5"/>
+          <p:cNvPr id="6" name="TextBox 5"/>
+          <p:cNvSpPr txBox="1"/>
+          <p:nvPr/>
+        </p:nvSpPr>
+        <p:spPr>
+          <a:xfrm>
+            <a:off x="548640" y="1554480"/>
+            <a:ext cx="6720840" cy="4617720"/>
+          </a:xfrm>
+          <a:prstGeom prst="rect">
+            <a:avLst/>
+          </a:prstGeom>
+          <a:noFill/>
+        </p:spPr>
+        <p:txBody>
+          <a:bodyPr wrap="square" lIns="0" rIns="0" tIns="0" bIns="0">
+            <a:spAutoFit/>
+          </a:bodyPr>
+          <a:lstStyle/>
+          <a:p>
+            <a:pPr>
+              <a:spcAft>
+                <a:spcPts val="1260"/>
+              </a:spcAft>
+            </a:pPr>
+            <a:r>
+              <a:rPr sz="2100" b="0">
+                <a:solidFill>
+                  <a:srgbClr val="202122"/>
+                </a:solidFill>
+                <a:latin typeface="Calibri"/>
+              </a:rPr>
+              <a:t>Scope is where in a program a variable can be used.</a:t>
+            </a:r>
+          </a:p>
+          <a:p>
+            <a:pPr>
+              <a:spcAft>
+                <a:spcPts val="1260"/>
+              </a:spcAft>
+            </a:pPr>
+            <a:r>
+              <a:rPr sz="2100" b="0">
+                <a:solidFill>
+                  <a:srgbClr val="202122"/>
+                </a:solidFill>
+                <a:latin typeface="Calibri"/>
+              </a:rPr>
+              <a:t>A local variable is created inside a function and only exists there. A global variable is created outside functions and can be read anywhere. Using mostly local variables makes code safer, because one function can't accidentally change another's data.</a:t>
+            </a:r>
+          </a:p>
+          <a:p>
+            <a:pPr>
+              <a:spcAft>
+                <a:spcPts val="1260"/>
+              </a:spcAft>
+            </a:pPr>
+            <a:r>
+              <a:rPr sz="2100" b="0">
+                <a:solidFill>
+                  <a:srgbClr val="202122"/>
+                </a:solidFill>
+                <a:latin typeface="Calibri"/>
+              </a:rPr>
+              <a:t>Type conversion changes a value's type. input() always returns a string, so convert it before doing maths: int() for whole numbers, float() for decimals, str() to turn a number into text, bool() for True or False.</a:t>
+            </a:r>
+          </a:p>
+        </p:txBody>
+      </p:sp>
+      <p:sp>
+        <p:nvSpPr>
+          <p:cNvPr id="7" name="Rounded Rectangle 6"/>
           <p:cNvSpPr/>
           <p:nvPr/>
         </p:nvSpPr>
         <p:spPr>
           <a:xfrm>
-            <a:off x="548640" y="1618488"/>
-            <a:ext cx="411480" cy="411480"/>
+            <a:off x="7772400" y="1554480"/>
+            <a:ext cx="3867912" cy="4526280"/>
+          </a:xfrm>
+          <a:prstGeom prst="roundRect">
+            <a:avLst>
+              <a:gd name="adj" fmla="val 8000"/>
+            </a:avLst>
+          </a:prstGeom>
+          <a:solidFill>
+            <a:srgbClr val="03306E"/>
+          </a:solidFill>
+          <a:ln>
+            <a:noFill/>
+          </a:ln>
+          <a:effectLst/>
+        </p:spPr>
+        <p:style>
+          <a:lnRef idx="1">
+            <a:schemeClr val="accent1"/>
+          </a:lnRef>
+          <a:fillRef idx="3">
+            <a:schemeClr val="accent1"/>
+          </a:fillRef>
+          <a:effectRef idx="2">
+            <a:schemeClr val="accent1"/>
+          </a:effectRef>
+          <a:fontRef idx="minor">
+            <a:schemeClr val="lt1"/>
+          </a:fontRef>
+        </p:style>
+        <p:txBody>
+          <a:bodyPr rtlCol="0" anchor="ctr"/>
+          <a:lstStyle/>
+          <a:p/>
+        </p:txBody>
+      </p:sp>
+      <p:sp>
+        <p:nvSpPr>
+          <p:cNvPr id="8" name="Oval 7"/>
+          <p:cNvSpPr/>
+          <p:nvPr/>
+        </p:nvSpPr>
+        <p:spPr>
+          <a:xfrm>
+            <a:off x="8046720" y="1828800"/>
+            <a:ext cx="548640" cy="548640"/>
           </a:xfrm>
           <a:prstGeom prst="ellipse">
             <a:avLst/>
@@ -7625,99 +11085,13 @@
           <a:p>
             <a:pPr algn="ctr"/>
             <a:r>
-              <a:rPr sz="1400" b="1">
+              <a:rPr sz="1300" b="1">
                 <a:solidFill>
                   <a:srgbClr val="202122"/>
                 </a:solidFill>
                 <a:latin typeface="Calibri"/>
               </a:rPr>
-              <a:t>1</a:t>
-            </a:r>
-          </a:p>
-        </p:txBody>
-      </p:sp>
-      <p:sp>
-        <p:nvSpPr>
-          <p:cNvPr id="7" name="TextBox 6"/>
-          <p:cNvSpPr txBox="1"/>
-          <p:nvPr/>
-        </p:nvSpPr>
-        <p:spPr>
-          <a:xfrm>
-            <a:off x="1234440" y="1600200"/>
-            <a:ext cx="10408615" cy="791870"/>
-          </a:xfrm>
-          <a:prstGeom prst="rect">
-            <a:avLst/>
-          </a:prstGeom>
-          <a:noFill/>
-        </p:spPr>
-        <p:txBody>
-          <a:bodyPr wrap="square" anchor="t" lIns="0" rIns="0" tIns="0" bIns="0"/>
-          <a:lstStyle/>
-          <a:p>
-            <a:pPr algn="l"/>
-            <a:r>
-              <a:rPr sz="2200" b="0" i="0">
-                <a:solidFill>
-                  <a:srgbClr val="202122"/>
-                </a:solidFill>
-                <a:latin typeface="Calibri"/>
-              </a:rPr>
-              <a:t>What data type should store a price?</a:t>
-            </a:r>
-          </a:p>
-        </p:txBody>
-      </p:sp>
-      <p:sp>
-        <p:nvSpPr>
-          <p:cNvPr id="8" name="Oval 7"/>
-          <p:cNvSpPr/>
-          <p:nvPr/>
-        </p:nvSpPr>
-        <p:spPr>
-          <a:xfrm>
-            <a:off x="548640" y="2574950"/>
-            <a:ext cx="411480" cy="411480"/>
-          </a:xfrm>
-          <a:prstGeom prst="ellipse">
-            <a:avLst/>
-          </a:prstGeom>
-          <a:solidFill>
-            <a:srgbClr val="F2B705"/>
-          </a:solidFill>
-          <a:ln>
-            <a:noFill/>
-          </a:ln>
-          <a:effectLst/>
-        </p:spPr>
-        <p:style>
-          <a:lnRef idx="1">
-            <a:schemeClr val="accent1"/>
-          </a:lnRef>
-          <a:fillRef idx="3">
-            <a:schemeClr val="accent1"/>
-          </a:fillRef>
-          <a:effectRef idx="2">
-            <a:schemeClr val="accent1"/>
-          </a:effectRef>
-          <a:fontRef idx="minor">
-            <a:schemeClr val="lt1"/>
-          </a:fontRef>
-        </p:style>
-        <p:txBody>
-          <a:bodyPr rtlCol="0" anchor="ctr" lIns="0" rIns="0" tIns="0" bIns="0"/>
-          <a:lstStyle/>
-          <a:p>
-            <a:pPr algn="ctr"/>
-            <a:r>
-              <a:rPr sz="1400" b="1">
-                <a:solidFill>
-                  <a:srgbClr val="202122"/>
-                </a:solidFill>
-                <a:latin typeface="Calibri"/>
-              </a:rPr>
-              <a:t>2</a:t>
+              <a:t>e.g.</a:t>
             </a:r>
           </a:p>
         </p:txBody>
@@ -7730,8 +11104,8 @@
         </p:nvSpPr>
         <p:spPr>
           <a:xfrm>
-            <a:off x="1234440" y="2556662"/>
-            <a:ext cx="10408615" cy="791870"/>
+            <a:off x="8046720" y="2560320"/>
+            <a:ext cx="3291840" cy="365760"/>
           </a:xfrm>
           <a:prstGeom prst="rect">
             <a:avLst/>
@@ -7744,80 +11118,27 @@
           <a:p>
             <a:pPr algn="l"/>
             <a:r>
-              <a:rPr sz="2200" b="0" i="0">
-                <a:solidFill>
-                  <a:srgbClr val="202122"/>
-                </a:solidFill>
-                <a:latin typeface="Calibri"/>
-              </a:rPr>
-              <a:t>What does input() always return?</a:t>
-            </a:r>
-          </a:p>
-        </p:txBody>
-      </p:sp>
-      <p:sp>
-        <p:nvSpPr>
-          <p:cNvPr id="10" name="Oval 9"/>
-          <p:cNvSpPr/>
-          <p:nvPr/>
-        </p:nvSpPr>
-        <p:spPr>
-          <a:xfrm>
-            <a:off x="548640" y="3531412"/>
-            <a:ext cx="411480" cy="411480"/>
-          </a:xfrm>
-          <a:prstGeom prst="ellipse">
-            <a:avLst/>
-          </a:prstGeom>
-          <a:solidFill>
-            <a:srgbClr val="F2B705"/>
-          </a:solidFill>
-          <a:ln>
-            <a:noFill/>
-          </a:ln>
-          <a:effectLst/>
-        </p:spPr>
-        <p:style>
-          <a:lnRef idx="1">
-            <a:schemeClr val="accent1"/>
-          </a:lnRef>
-          <a:fillRef idx="3">
-            <a:schemeClr val="accent1"/>
-          </a:fillRef>
-          <a:effectRef idx="2">
-            <a:schemeClr val="accent1"/>
-          </a:effectRef>
-          <a:fontRef idx="minor">
-            <a:schemeClr val="lt1"/>
-          </a:fontRef>
-        </p:style>
-        <p:txBody>
-          <a:bodyPr rtlCol="0" anchor="ctr" lIns="0" rIns="0" tIns="0" bIns="0"/>
-          <a:lstStyle/>
-          <a:p>
-            <a:pPr algn="ctr"/>
-            <a:r>
-              <a:rPr sz="1400" b="1">
-                <a:solidFill>
-                  <a:srgbClr val="202122"/>
-                </a:solidFill>
-                <a:latin typeface="Calibri"/>
-              </a:rPr>
-              <a:t>3</a:t>
-            </a:r>
-          </a:p>
-        </p:txBody>
-      </p:sp>
-      <p:sp>
-        <p:nvSpPr>
-          <p:cNvPr id="11" name="TextBox 10"/>
+              <a:rPr sz="1300" b="1" i="0">
+                <a:solidFill>
+                  <a:srgbClr val="A9C8F0"/>
+                </a:solidFill>
+                <a:latin typeface="Calibri"/>
+              </a:rPr>
+              <a:t>EXAMPLE</a:t>
+            </a:r>
+          </a:p>
+        </p:txBody>
+      </p:sp>
+      <p:sp>
+        <p:nvSpPr>
+          <p:cNvPr id="10" name="TextBox 9"/>
           <p:cNvSpPr txBox="1"/>
           <p:nvPr/>
         </p:nvSpPr>
         <p:spPr>
           <a:xfrm>
-            <a:off x="1234440" y="3513124"/>
-            <a:ext cx="10408615" cy="791870"/>
+            <a:off x="8046720" y="2971800"/>
+            <a:ext cx="3291840" cy="2971800"/>
           </a:xfrm>
           <a:prstGeom prst="rect">
             <a:avLst/>
@@ -7830,185 +11151,13 @@
           <a:p>
             <a:pPr algn="l"/>
             <a:r>
-              <a:rPr sz="2200" b="0" i="0">
-                <a:solidFill>
-                  <a:srgbClr val="202122"/>
-                </a:solidFill>
-                <a:latin typeface="Calibri"/>
-              </a:rPr>
-              <a:t>What is a local variable?</a:t>
-            </a:r>
-          </a:p>
-        </p:txBody>
-      </p:sp>
-      <p:sp>
-        <p:nvSpPr>
-          <p:cNvPr id="12" name="Oval 11"/>
-          <p:cNvSpPr/>
-          <p:nvPr/>
-        </p:nvSpPr>
-        <p:spPr>
-          <a:xfrm>
-            <a:off x="548640" y="4487875"/>
-            <a:ext cx="411480" cy="411480"/>
-          </a:xfrm>
-          <a:prstGeom prst="ellipse">
-            <a:avLst/>
-          </a:prstGeom>
-          <a:solidFill>
-            <a:srgbClr val="F2B705"/>
-          </a:solidFill>
-          <a:ln>
-            <a:noFill/>
-          </a:ln>
-          <a:effectLst/>
-        </p:spPr>
-        <p:style>
-          <a:lnRef idx="1">
-            <a:schemeClr val="accent1"/>
-          </a:lnRef>
-          <a:fillRef idx="3">
-            <a:schemeClr val="accent1"/>
-          </a:fillRef>
-          <a:effectRef idx="2">
-            <a:schemeClr val="accent1"/>
-          </a:effectRef>
-          <a:fontRef idx="minor">
-            <a:schemeClr val="lt1"/>
-          </a:fontRef>
-        </p:style>
-        <p:txBody>
-          <a:bodyPr rtlCol="0" anchor="ctr" lIns="0" rIns="0" tIns="0" bIns="0"/>
-          <a:lstStyle/>
-          <a:p>
-            <a:pPr algn="ctr"/>
-            <a:r>
-              <a:rPr sz="1400" b="1">
-                <a:solidFill>
-                  <a:srgbClr val="202122"/>
-                </a:solidFill>
-                <a:latin typeface="Calibri"/>
-              </a:rPr>
-              <a:t>4</a:t>
-            </a:r>
-          </a:p>
-        </p:txBody>
-      </p:sp>
-      <p:sp>
-        <p:nvSpPr>
-          <p:cNvPr id="13" name="TextBox 12"/>
-          <p:cNvSpPr txBox="1"/>
-          <p:nvPr/>
-        </p:nvSpPr>
-        <p:spPr>
-          <a:xfrm>
-            <a:off x="1234440" y="4469587"/>
-            <a:ext cx="10408615" cy="791870"/>
-          </a:xfrm>
-          <a:prstGeom prst="rect">
-            <a:avLst/>
-          </a:prstGeom>
-          <a:noFill/>
-        </p:spPr>
-        <p:txBody>
-          <a:bodyPr wrap="square" anchor="t" lIns="0" rIns="0" tIns="0" bIns="0"/>
-          <a:lstStyle/>
-          <a:p>
-            <a:pPr algn="l"/>
-            <a:r>
-              <a:rPr sz="2200" b="0" i="0">
-                <a:solidFill>
-                  <a:srgbClr val="202122"/>
-                </a:solidFill>
-                <a:latin typeface="Calibri"/>
-              </a:rPr>
-              <a:t>How do you add an item to the end of a list?</a:t>
-            </a:r>
-          </a:p>
-        </p:txBody>
-      </p:sp>
-      <p:sp>
-        <p:nvSpPr>
-          <p:cNvPr id="14" name="Oval 13"/>
-          <p:cNvSpPr/>
-          <p:nvPr/>
-        </p:nvSpPr>
-        <p:spPr>
-          <a:xfrm>
-            <a:off x="548640" y="5444337"/>
-            <a:ext cx="411480" cy="411480"/>
-          </a:xfrm>
-          <a:prstGeom prst="ellipse">
-            <a:avLst/>
-          </a:prstGeom>
-          <a:solidFill>
-            <a:srgbClr val="F2B705"/>
-          </a:solidFill>
-          <a:ln>
-            <a:noFill/>
-          </a:ln>
-          <a:effectLst/>
-        </p:spPr>
-        <p:style>
-          <a:lnRef idx="1">
-            <a:schemeClr val="accent1"/>
-          </a:lnRef>
-          <a:fillRef idx="3">
-            <a:schemeClr val="accent1"/>
-          </a:fillRef>
-          <a:effectRef idx="2">
-            <a:schemeClr val="accent1"/>
-          </a:effectRef>
-          <a:fontRef idx="minor">
-            <a:schemeClr val="lt1"/>
-          </a:fontRef>
-        </p:style>
-        <p:txBody>
-          <a:bodyPr rtlCol="0" anchor="ctr" lIns="0" rIns="0" tIns="0" bIns="0"/>
-          <a:lstStyle/>
-          <a:p>
-            <a:pPr algn="ctr"/>
-            <a:r>
-              <a:rPr sz="1400" b="1">
-                <a:solidFill>
-                  <a:srgbClr val="202122"/>
-                </a:solidFill>
-                <a:latin typeface="Calibri"/>
-              </a:rPr>
-              <a:t>5</a:t>
-            </a:r>
-          </a:p>
-        </p:txBody>
-      </p:sp>
-      <p:sp>
-        <p:nvSpPr>
-          <p:cNvPr id="15" name="TextBox 14"/>
-          <p:cNvSpPr txBox="1"/>
-          <p:nvPr/>
-        </p:nvSpPr>
-        <p:spPr>
-          <a:xfrm>
-            <a:off x="1234440" y="5426049"/>
-            <a:ext cx="10408615" cy="791870"/>
-          </a:xfrm>
-          <a:prstGeom prst="rect">
-            <a:avLst/>
-          </a:prstGeom>
-          <a:noFill/>
-        </p:spPr>
-        <p:txBody>
-          <a:bodyPr wrap="square" anchor="t" lIns="0" rIns="0" tIns="0" bIns="0"/>
-          <a:lstStyle/>
-          <a:p>
-            <a:pPr algn="l"/>
-            <a:r>
-              <a:rPr sz="2200" b="0" i="0">
-                <a:solidFill>
-                  <a:srgbClr val="202122"/>
-                </a:solidFill>
-                <a:latin typeface="Calibri"/>
-              </a:rPr>
-              <a:t>When is a dictionary better than a list?</a:t>
+              <a:rPr sz="1900" b="0" i="0">
+                <a:solidFill>
+                  <a:srgbClr val="FFFFFF"/>
+                </a:solidFill>
+                <a:latin typeface="Cambria"/>
+              </a:rPr>
+              <a:t>age = int(input('Age? ')) converts the text '17' into the number 17. Without int(), age + 1 would cause an error.</a:t>
             </a:r>
           </a:p>
         </p:txBody>
@@ -8100,7 +11249,7 @@
                 </a:solidFill>
                 <a:latin typeface="Cambria"/>
               </a:rPr>
-              <a:t>Answers</a:t>
+              <a:t>Scope and conversion</a:t>
             </a:r>
           </a:p>
         </p:txBody>
@@ -8173,20 +11322,22 @@
       </p:sp>
       <p:sp>
         <p:nvSpPr>
-          <p:cNvPr id="6" name="Oval 5"/>
+          <p:cNvPr id="6" name="Rounded Rectangle 5"/>
           <p:cNvSpPr/>
           <p:nvPr/>
         </p:nvSpPr>
         <p:spPr>
           <a:xfrm>
-            <a:off x="548640" y="1618488"/>
-            <a:ext cx="411480" cy="411480"/>
-          </a:xfrm>
-          <a:prstGeom prst="ellipse">
-            <a:avLst/>
+            <a:off x="548640" y="1600200"/>
+            <a:ext cx="5364327" cy="640080"/>
+          </a:xfrm>
+          <a:prstGeom prst="roundRect">
+            <a:avLst>
+              <a:gd name="adj" fmla="val 15000"/>
+            </a:avLst>
           </a:prstGeom>
           <a:solidFill>
-            <a:srgbClr val="F2B705"/>
+            <a:srgbClr val="03306E"/>
           </a:solidFill>
           <a:ln>
             <a:noFill/>
@@ -8208,20 +11359,9 @@
           </a:fontRef>
         </p:style>
         <p:txBody>
-          <a:bodyPr rtlCol="0" anchor="ctr" lIns="0" rIns="0" tIns="0" bIns="0"/>
-          <a:lstStyle/>
-          <a:p>
-            <a:pPr algn="ctr"/>
-            <a:r>
-              <a:rPr sz="1400" b="1">
-                <a:solidFill>
-                  <a:srgbClr val="202122"/>
-                </a:solidFill>
-                <a:latin typeface="Calibri"/>
-              </a:rPr>
-              <a:t>1</a:t>
-            </a:r>
-          </a:p>
+          <a:bodyPr rtlCol="0" anchor="ctr"/>
+          <a:lstStyle/>
+          <a:p/>
         </p:txBody>
       </p:sp>
       <p:sp>
@@ -8232,8 +11372,8 @@
         </p:nvSpPr>
         <p:spPr>
           <a:xfrm>
-            <a:off x="1234440" y="1600200"/>
-            <a:ext cx="10408615" cy="791870"/>
+            <a:off x="777240" y="1600200"/>
+            <a:ext cx="4907127" cy="640080"/>
           </a:xfrm>
           <a:prstGeom prst="rect">
             <a:avLst/>
@@ -8241,49 +11381,40 @@
           <a:noFill/>
         </p:spPr>
         <p:txBody>
-          <a:bodyPr wrap="square" anchor="t" lIns="0" rIns="0" tIns="0" bIns="0"/>
+          <a:bodyPr wrap="square" anchor="ctr" lIns="0" rIns="0" tIns="0" bIns="0"/>
           <a:lstStyle/>
           <a:p>
             <a:pPr algn="l"/>
             <a:r>
-              <a:rPr sz="1800" b="0" i="0">
-                <a:solidFill>
-                  <a:srgbClr val="54595D"/>
-                </a:solidFill>
-                <a:latin typeface="Calibri"/>
-              </a:rPr>
-              <a:t>What data type should store a price?</a:t>
-            </a:r>
-          </a:p>
-          <a:p>
-            <a:r>
-              <a:rPr sz="1800" b="1">
-                <a:solidFill>
-                  <a:srgbClr val="03306E"/>
-                </a:solidFill>
-                <a:latin typeface="Calibri"/>
-              </a:rPr>
-              <a:t>Float.</a:t>
-            </a:r>
-          </a:p>
-        </p:txBody>
-      </p:sp>
-      <p:sp>
-        <p:nvSpPr>
-          <p:cNvPr id="8" name="Oval 7"/>
+              <a:rPr sz="2000" b="1" i="0">
+                <a:solidFill>
+                  <a:srgbClr val="FFFFFF"/>
+                </a:solidFill>
+                <a:latin typeface="Calibri"/>
+              </a:rPr>
+              <a:t>Scope</a:t>
+            </a:r>
+          </a:p>
+        </p:txBody>
+      </p:sp>
+      <p:sp>
+        <p:nvSpPr>
+          <p:cNvPr id="8" name="Rounded Rectangle 7"/>
           <p:cNvSpPr/>
           <p:nvPr/>
         </p:nvSpPr>
         <p:spPr>
           <a:xfrm>
-            <a:off x="548640" y="2574950"/>
-            <a:ext cx="411480" cy="411480"/>
-          </a:xfrm>
-          <a:prstGeom prst="ellipse">
-            <a:avLst/>
+            <a:off x="548640" y="2377440"/>
+            <a:ext cx="5364327" cy="3794760"/>
+          </a:xfrm>
+          <a:prstGeom prst="roundRect">
+            <a:avLst>
+              <a:gd name="adj" fmla="val 4000"/>
+            </a:avLst>
           </a:prstGeom>
           <a:solidFill>
-            <a:srgbClr val="F2B705"/>
+            <a:srgbClr val="EAF3FF"/>
           </a:solidFill>
           <a:ln>
             <a:noFill/>
@@ -8305,20 +11436,9 @@
           </a:fontRef>
         </p:style>
         <p:txBody>
-          <a:bodyPr rtlCol="0" anchor="ctr" lIns="0" rIns="0" tIns="0" bIns="0"/>
-          <a:lstStyle/>
-          <a:p>
-            <a:pPr algn="ctr"/>
-            <a:r>
-              <a:rPr sz="1400" b="1">
-                <a:solidFill>
-                  <a:srgbClr val="202122"/>
-                </a:solidFill>
-                <a:latin typeface="Calibri"/>
-              </a:rPr>
-              <a:t>2</a:t>
-            </a:r>
-          </a:p>
+          <a:bodyPr rtlCol="0" anchor="ctr"/>
+          <a:lstStyle/>
+          <a:p/>
         </p:txBody>
       </p:sp>
       <p:sp>
@@ -8329,8 +11449,8 @@
         </p:nvSpPr>
         <p:spPr>
           <a:xfrm>
-            <a:off x="1234440" y="2556662"/>
-            <a:ext cx="10408615" cy="791870"/>
+            <a:off x="822959" y="2606040"/>
+            <a:ext cx="4815687" cy="3337560"/>
           </a:xfrm>
           <a:prstGeom prst="rect">
             <a:avLst/>
@@ -8338,49 +11458,120 @@
           <a:noFill/>
         </p:spPr>
         <p:txBody>
-          <a:bodyPr wrap="square" anchor="t" lIns="0" rIns="0" tIns="0" bIns="0"/>
-          <a:lstStyle/>
-          <a:p>
-            <a:pPr algn="l"/>
-            <a:r>
-              <a:rPr sz="1800" b="0" i="0">
-                <a:solidFill>
-                  <a:srgbClr val="54595D"/>
-                </a:solidFill>
-                <a:latin typeface="Calibri"/>
-              </a:rPr>
-              <a:t>What does input() always return?</a:t>
-            </a:r>
-          </a:p>
-          <a:p>
-            <a:r>
-              <a:rPr sz="1800" b="1">
-                <a:solidFill>
-                  <a:srgbClr val="03306E"/>
-                </a:solidFill>
-                <a:latin typeface="Calibri"/>
-              </a:rPr>
-              <a:t>A string.</a:t>
-            </a:r>
-          </a:p>
-        </p:txBody>
-      </p:sp>
-      <p:sp>
-        <p:nvSpPr>
-          <p:cNvPr id="10" name="Oval 9"/>
+          <a:bodyPr wrap="square" lIns="0" rIns="0" tIns="0" bIns="0">
+            <a:spAutoFit/>
+          </a:bodyPr>
+          <a:lstStyle/>
+          <a:p>
+            <a:pPr marL="274320" indent="-274320">
+              <a:spcAft>
+                <a:spcPts val="990"/>
+              </a:spcAft>
+              <a:buClr>
+                <a:srgbClr val="0645AD"/>
+              </a:buClr>
+              <a:buFont typeface="Arial"/>
+              <a:buChar char="•"/>
+            </a:pPr>
+            <a:r>
+              <a:rPr sz="2200" b="1">
+                <a:solidFill>
+                  <a:srgbClr val="202122"/>
+                </a:solidFill>
+                <a:latin typeface="Calibri"/>
+              </a:rPr>
+              <a:t>Local:</a:t>
+            </a:r>
+            <a:r>
+              <a:rPr sz="2200" b="0">
+                <a:solidFill>
+                  <a:srgbClr val="202122"/>
+                </a:solidFill>
+                <a:latin typeface="Calibri"/>
+              </a:rPr>
+              <a:t> created inside a function, only usable there</a:t>
+            </a:r>
+          </a:p>
+          <a:p>
+            <a:pPr marL="274320" indent="-274320">
+              <a:spcAft>
+                <a:spcPts val="990"/>
+              </a:spcAft>
+              <a:buClr>
+                <a:srgbClr val="0645AD"/>
+              </a:buClr>
+              <a:buFont typeface="Arial"/>
+              <a:buChar char="•"/>
+            </a:pPr>
+            <a:r>
+              <a:rPr sz="2200" b="1">
+                <a:solidFill>
+                  <a:srgbClr val="202122"/>
+                </a:solidFill>
+                <a:latin typeface="Calibri"/>
+              </a:rPr>
+              <a:t>Global:</a:t>
+            </a:r>
+            <a:r>
+              <a:rPr sz="2200" b="0">
+                <a:solidFill>
+                  <a:srgbClr val="202122"/>
+                </a:solidFill>
+                <a:latin typeface="Calibri"/>
+              </a:rPr>
+              <a:t> created outside functions, usable anywhere</a:t>
+            </a:r>
+          </a:p>
+          <a:p>
+            <a:pPr marL="274320" indent="-274320">
+              <a:spcAft>
+                <a:spcPts val="990"/>
+              </a:spcAft>
+              <a:buClr>
+                <a:srgbClr val="0645AD"/>
+              </a:buClr>
+              <a:buFont typeface="Arial"/>
+              <a:buChar char="•"/>
+            </a:pPr>
+            <a:r>
+              <a:rPr sz="2200" b="1">
+                <a:solidFill>
+                  <a:srgbClr val="202122"/>
+                </a:solidFill>
+                <a:latin typeface="Calibri"/>
+              </a:rPr>
+              <a:t>Prefer local variables:</a:t>
+            </a:r>
+            <a:r>
+              <a:rPr sz="2200" b="0">
+                <a:solidFill>
+                  <a:srgbClr val="202122"/>
+                </a:solidFill>
+                <a:latin typeface="Calibri"/>
+              </a:rPr>
+              <a:t> fewer side effects</a:t>
+            </a:r>
+          </a:p>
+        </p:txBody>
+      </p:sp>
+      <p:sp>
+        <p:nvSpPr>
+          <p:cNvPr id="10" name="Rounded Rectangle 9"/>
           <p:cNvSpPr/>
           <p:nvPr/>
         </p:nvSpPr>
         <p:spPr>
           <a:xfrm>
-            <a:off x="548640" y="3531412"/>
-            <a:ext cx="411480" cy="411480"/>
-          </a:xfrm>
-          <a:prstGeom prst="ellipse">
-            <a:avLst/>
+            <a:off x="6278727" y="1600200"/>
+            <a:ext cx="5364327" cy="640080"/>
+          </a:xfrm>
+          <a:prstGeom prst="roundRect">
+            <a:avLst>
+              <a:gd name="adj" fmla="val 15000"/>
+            </a:avLst>
           </a:prstGeom>
           <a:solidFill>
-            <a:srgbClr val="F2B705"/>
+            <a:srgbClr val="0645AD"/>
           </a:solidFill>
           <a:ln>
             <a:noFill/>
@@ -8402,20 +11593,9 @@
           </a:fontRef>
         </p:style>
         <p:txBody>
-          <a:bodyPr rtlCol="0" anchor="ctr" lIns="0" rIns="0" tIns="0" bIns="0"/>
-          <a:lstStyle/>
-          <a:p>
-            <a:pPr algn="ctr"/>
-            <a:r>
-              <a:rPr sz="1400" b="1">
-                <a:solidFill>
-                  <a:srgbClr val="202122"/>
-                </a:solidFill>
-                <a:latin typeface="Calibri"/>
-              </a:rPr>
-              <a:t>3</a:t>
-            </a:r>
-          </a:p>
+          <a:bodyPr rtlCol="0" anchor="ctr"/>
+          <a:lstStyle/>
+          <a:p/>
         </p:txBody>
       </p:sp>
       <p:sp>
@@ -8426,8 +11606,8 @@
         </p:nvSpPr>
         <p:spPr>
           <a:xfrm>
-            <a:off x="1234440" y="3513124"/>
-            <a:ext cx="10408615" cy="791870"/>
+            <a:off x="6507327" y="1600200"/>
+            <a:ext cx="4907127" cy="640080"/>
           </a:xfrm>
           <a:prstGeom prst="rect">
             <a:avLst/>
@@ -8435,49 +11615,40 @@
           <a:noFill/>
         </p:spPr>
         <p:txBody>
-          <a:bodyPr wrap="square" anchor="t" lIns="0" rIns="0" tIns="0" bIns="0"/>
+          <a:bodyPr wrap="square" anchor="ctr" lIns="0" rIns="0" tIns="0" bIns="0"/>
           <a:lstStyle/>
           <a:p>
             <a:pPr algn="l"/>
             <a:r>
-              <a:rPr sz="1800" b="0" i="0">
-                <a:solidFill>
-                  <a:srgbClr val="54595D"/>
-                </a:solidFill>
-                <a:latin typeface="Calibri"/>
-              </a:rPr>
-              <a:t>What is a local variable?</a:t>
-            </a:r>
-          </a:p>
-          <a:p>
-            <a:r>
-              <a:rPr sz="1800" b="1">
-                <a:solidFill>
-                  <a:srgbClr val="03306E"/>
-                </a:solidFill>
-                <a:latin typeface="Calibri"/>
-              </a:rPr>
-              <a:t>A variable created inside a function and only usable there.</a:t>
-            </a:r>
-          </a:p>
-        </p:txBody>
-      </p:sp>
-      <p:sp>
-        <p:nvSpPr>
-          <p:cNvPr id="12" name="Oval 11"/>
+              <a:rPr sz="2000" b="1" i="0">
+                <a:solidFill>
+                  <a:srgbClr val="FFFFFF"/>
+                </a:solidFill>
+                <a:latin typeface="Calibri"/>
+              </a:rPr>
+              <a:t>Type conversion functions</a:t>
+            </a:r>
+          </a:p>
+        </p:txBody>
+      </p:sp>
+      <p:sp>
+        <p:nvSpPr>
+          <p:cNvPr id="12" name="Rounded Rectangle 11"/>
           <p:cNvSpPr/>
           <p:nvPr/>
         </p:nvSpPr>
         <p:spPr>
           <a:xfrm>
-            <a:off x="548640" y="4487875"/>
-            <a:ext cx="411480" cy="411480"/>
-          </a:xfrm>
-          <a:prstGeom prst="ellipse">
-            <a:avLst/>
+            <a:off x="6278727" y="2377440"/>
+            <a:ext cx="5364327" cy="3794760"/>
+          </a:xfrm>
+          <a:prstGeom prst="roundRect">
+            <a:avLst>
+              <a:gd name="adj" fmla="val 4000"/>
+            </a:avLst>
           </a:prstGeom>
           <a:solidFill>
-            <a:srgbClr val="F2B705"/>
+            <a:srgbClr val="EAF3FF"/>
           </a:solidFill>
           <a:ln>
             <a:noFill/>
@@ -8499,20 +11670,9 @@
           </a:fontRef>
         </p:style>
         <p:txBody>
-          <a:bodyPr rtlCol="0" anchor="ctr" lIns="0" rIns="0" tIns="0" bIns="0"/>
-          <a:lstStyle/>
-          <a:p>
-            <a:pPr algn="ctr"/>
-            <a:r>
-              <a:rPr sz="1400" b="1">
-                <a:solidFill>
-                  <a:srgbClr val="202122"/>
-                </a:solidFill>
-                <a:latin typeface="Calibri"/>
-              </a:rPr>
-              <a:t>4</a:t>
-            </a:r>
-          </a:p>
+          <a:bodyPr rtlCol="0" anchor="ctr"/>
+          <a:lstStyle/>
+          <a:p/>
         </p:txBody>
       </p:sp>
       <p:sp>
@@ -8523,8 +11683,8 @@
         </p:nvSpPr>
         <p:spPr>
           <a:xfrm>
-            <a:off x="1234440" y="4469587"/>
-            <a:ext cx="10408615" cy="791870"/>
+            <a:off x="6553047" y="2606040"/>
+            <a:ext cx="4815687" cy="3337560"/>
           </a:xfrm>
           <a:prstGeom prst="rect">
             <a:avLst/>
@@ -8532,126 +11692,113 @@
           <a:noFill/>
         </p:spPr>
         <p:txBody>
-          <a:bodyPr wrap="square" anchor="t" lIns="0" rIns="0" tIns="0" bIns="0"/>
-          <a:lstStyle/>
-          <a:p>
-            <a:pPr algn="l"/>
-            <a:r>
-              <a:rPr sz="1800" b="0" i="0">
-                <a:solidFill>
-                  <a:srgbClr val="54595D"/>
-                </a:solidFill>
-                <a:latin typeface="Calibri"/>
-              </a:rPr>
-              <a:t>How do you add an item to the end of a list?</a:t>
-            </a:r>
-          </a:p>
-          <a:p>
-            <a:r>
-              <a:rPr sz="1800" b="1">
-                <a:solidFill>
-                  <a:srgbClr val="03306E"/>
-                </a:solidFill>
-                <a:latin typeface="Calibri"/>
-              </a:rPr>
-              <a:t>list.append(item).</a:t>
-            </a:r>
-          </a:p>
-        </p:txBody>
-      </p:sp>
-      <p:sp>
-        <p:nvSpPr>
-          <p:cNvPr id="14" name="Oval 13"/>
-          <p:cNvSpPr/>
-          <p:nvPr/>
-        </p:nvSpPr>
-        <p:spPr>
-          <a:xfrm>
-            <a:off x="548640" y="5444337"/>
-            <a:ext cx="411480" cy="411480"/>
-          </a:xfrm>
-          <a:prstGeom prst="ellipse">
-            <a:avLst/>
-          </a:prstGeom>
-          <a:solidFill>
-            <a:srgbClr val="F2B705"/>
-          </a:solidFill>
-          <a:ln>
-            <a:noFill/>
-          </a:ln>
-          <a:effectLst/>
-        </p:spPr>
-        <p:style>
-          <a:lnRef idx="1">
-            <a:schemeClr val="accent1"/>
-          </a:lnRef>
-          <a:fillRef idx="3">
-            <a:schemeClr val="accent1"/>
-          </a:fillRef>
-          <a:effectRef idx="2">
-            <a:schemeClr val="accent1"/>
-          </a:effectRef>
-          <a:fontRef idx="minor">
-            <a:schemeClr val="lt1"/>
-          </a:fontRef>
-        </p:style>
-        <p:txBody>
-          <a:bodyPr rtlCol="0" anchor="ctr" lIns="0" rIns="0" tIns="0" bIns="0"/>
-          <a:lstStyle/>
-          <a:p>
-            <a:pPr algn="ctr"/>
-            <a:r>
-              <a:rPr sz="1400" b="1">
+          <a:bodyPr wrap="square" lIns="0" rIns="0" tIns="0" bIns="0">
+            <a:spAutoFit/>
+          </a:bodyPr>
+          <a:lstStyle/>
+          <a:p>
+            <a:pPr marL="274320" indent="-274320">
+              <a:spcAft>
+                <a:spcPts val="990"/>
+              </a:spcAft>
+              <a:buClr>
+                <a:srgbClr val="0645AD"/>
+              </a:buClr>
+              <a:buFont typeface="Arial"/>
+              <a:buChar char="•"/>
+            </a:pPr>
+            <a:r>
+              <a:rPr sz="2200" b="0">
                 <a:solidFill>
                   <a:srgbClr val="202122"/>
                 </a:solidFill>
                 <a:latin typeface="Calibri"/>
               </a:rPr>
-              <a:t>5</a:t>
-            </a:r>
-          </a:p>
-        </p:txBody>
-      </p:sp>
-      <p:sp>
-        <p:nvSpPr>
-          <p:cNvPr id="15" name="TextBox 14"/>
-          <p:cNvSpPr txBox="1"/>
-          <p:nvPr/>
-        </p:nvSpPr>
-        <p:spPr>
-          <a:xfrm>
-            <a:off x="1234440" y="5426049"/>
-            <a:ext cx="10408615" cy="791870"/>
-          </a:xfrm>
-          <a:prstGeom prst="rect">
-            <a:avLst/>
-          </a:prstGeom>
-          <a:noFill/>
-        </p:spPr>
-        <p:txBody>
-          <a:bodyPr wrap="square" anchor="t" lIns="0" rIns="0" tIns="0" bIns="0"/>
-          <a:lstStyle/>
-          <a:p>
-            <a:pPr algn="l"/>
-            <a:r>
-              <a:rPr sz="1800" b="0" i="0">
-                <a:solidFill>
-                  <a:srgbClr val="54595D"/>
-                </a:solidFill>
-                <a:latin typeface="Calibri"/>
-              </a:rPr>
-              <a:t>When is a dictionary better than a list?</a:t>
-            </a:r>
-          </a:p>
-          <a:p>
-            <a:r>
-              <a:rPr sz="1800" b="1">
-                <a:solidFill>
-                  <a:srgbClr val="03306E"/>
-                </a:solidFill>
-                <a:latin typeface="Calibri"/>
-              </a:rPr>
-              <a:t>When you need to look values up by a key.</a:t>
+              <a:t>int('42') gives 42</a:t>
+            </a:r>
+          </a:p>
+          <a:p>
+            <a:pPr marL="274320" indent="-274320">
+              <a:spcAft>
+                <a:spcPts val="990"/>
+              </a:spcAft>
+              <a:buClr>
+                <a:srgbClr val="0645AD"/>
+              </a:buClr>
+              <a:buFont typeface="Arial"/>
+              <a:buChar char="•"/>
+            </a:pPr>
+            <a:r>
+              <a:rPr sz="2200" b="0">
+                <a:solidFill>
+                  <a:srgbClr val="202122"/>
+                </a:solidFill>
+                <a:latin typeface="Calibri"/>
+              </a:rPr>
+              <a:t>float('3.5') gives 3.5</a:t>
+            </a:r>
+          </a:p>
+          <a:p>
+            <a:pPr marL="274320" indent="-274320">
+              <a:spcAft>
+                <a:spcPts val="990"/>
+              </a:spcAft>
+              <a:buClr>
+                <a:srgbClr val="0645AD"/>
+              </a:buClr>
+              <a:buFont typeface="Arial"/>
+              <a:buChar char="•"/>
+            </a:pPr>
+            <a:r>
+              <a:rPr sz="2200" b="0">
+                <a:solidFill>
+                  <a:srgbClr val="202122"/>
+                </a:solidFill>
+                <a:latin typeface="Calibri"/>
+              </a:rPr>
+              <a:t>str(99) gives '99'</a:t>
+            </a:r>
+          </a:p>
+          <a:p>
+            <a:pPr marL="274320" indent="-274320">
+              <a:spcAft>
+                <a:spcPts val="990"/>
+              </a:spcAft>
+              <a:buClr>
+                <a:srgbClr val="0645AD"/>
+              </a:buClr>
+              <a:buFont typeface="Arial"/>
+              <a:buChar char="•"/>
+            </a:pPr>
+            <a:r>
+              <a:rPr sz="2200" b="0">
+                <a:solidFill>
+                  <a:srgbClr val="202122"/>
+                </a:solidFill>
+                <a:latin typeface="Calibri"/>
+              </a:rPr>
+              <a:t>bool(0) gives False</a:t>
+            </a:r>
+          </a:p>
+          <a:p>
+            <a:pPr marL="274320" indent="-274320">
+              <a:spcAft>
+                <a:spcPts val="990"/>
+              </a:spcAft>
+              <a:buClr>
+                <a:srgbClr val="0645AD"/>
+              </a:buClr>
+              <a:buFont typeface="Arial"/>
+              <a:buChar char="•"/>
+            </a:pPr>
+            <a:r>
+              <a:rPr sz="2200" b="0">
+                <a:solidFill>
+                  <a:srgbClr val="202122"/>
+                </a:solidFill>
+                <a:latin typeface="Calibri"/>
+              </a:rPr>
+              <a:t>input() always returns a string</a:t>
             </a:r>
           </a:p>
         </p:txBody>
@@ -8743,7 +11890,7 @@
                 </a:solidFill>
                 <a:latin typeface="Cambria"/>
               </a:rPr>
-              <a:t>Activity: Build a gradebook</a:t>
+              <a:t>Quick check: Scope and conversion</a:t>
             </a:r>
           </a:p>
         </p:txBody>
@@ -8816,19 +11963,17 @@
       </p:sp>
       <p:sp>
         <p:nvSpPr>
-          <p:cNvPr id="6" name="Rounded Rectangle 5"/>
+          <p:cNvPr id="6" name="Oval 5"/>
           <p:cNvSpPr/>
           <p:nvPr/>
         </p:nvSpPr>
         <p:spPr>
           <a:xfrm>
-            <a:off x="548640" y="1508760"/>
-            <a:ext cx="2011680" cy="457200"/>
-          </a:xfrm>
-          <a:prstGeom prst="roundRect">
-            <a:avLst>
-              <a:gd name="adj" fmla="val 50000"/>
-            </a:avLst>
+            <a:off x="548640" y="1691640"/>
+            <a:ext cx="502920" cy="502920"/>
+          </a:xfrm>
+          <a:prstGeom prst="ellipse">
+            <a:avLst/>
           </a:prstGeom>
           <a:solidFill>
             <a:srgbClr val="F2B705"/>
@@ -8853,9 +11998,20 @@
           </a:fontRef>
         </p:style>
         <p:txBody>
-          <a:bodyPr rtlCol="0" anchor="ctr"/>
-          <a:lstStyle/>
-          <a:p/>
+          <a:bodyPr rtlCol="0" anchor="ctr" lIns="0" rIns="0" tIns="0" bIns="0"/>
+          <a:lstStyle/>
+          <a:p>
+            <a:pPr algn="ctr"/>
+            <a:r>
+              <a:rPr sz="1600" b="1">
+                <a:solidFill>
+                  <a:srgbClr val="202122"/>
+                </a:solidFill>
+                <a:latin typeface="Calibri"/>
+              </a:rPr>
+              <a:t>1</a:t>
+            </a:r>
+          </a:p>
         </p:txBody>
       </p:sp>
       <p:sp>
@@ -8866,8 +12022,8 @@
         </p:nvSpPr>
         <p:spPr>
           <a:xfrm>
-            <a:off x="548640" y="1508760"/>
-            <a:ext cx="2011680" cy="457200"/>
+            <a:off x="1371600" y="1645920"/>
+            <a:ext cx="10271455" cy="1188720"/>
           </a:xfrm>
           <a:prstGeom prst="rect">
             <a:avLst/>
@@ -8875,71 +12031,38 @@
           <a:noFill/>
         </p:spPr>
         <p:txBody>
-          <a:bodyPr wrap="square" anchor="ctr" lIns="0" rIns="0" tIns="0" bIns="0"/>
-          <a:lstStyle/>
-          <a:p>
-            <a:pPr algn="ctr"/>
-            <a:r>
-              <a:rPr sz="1400" b="1" i="0">
+          <a:bodyPr wrap="square" anchor="t" lIns="0" rIns="0" tIns="0" bIns="0"/>
+          <a:lstStyle/>
+          <a:p>
+            <a:pPr algn="l"/>
+            <a:r>
+              <a:rPr sz="2400" b="0" i="0">
                 <a:solidFill>
                   <a:srgbClr val="202122"/>
                 </a:solidFill>
                 <a:latin typeface="Calibri"/>
               </a:rPr>
-              <a:t>25 minutes</a:t>
-            </a:r>
-          </a:p>
-        </p:txBody>
-      </p:sp>
-      <p:sp>
-        <p:nvSpPr>
-          <p:cNvPr id="8" name="TextBox 7"/>
-          <p:cNvSpPr txBox="1"/>
-          <p:nvPr/>
-        </p:nvSpPr>
-        <p:spPr>
-          <a:xfrm>
-            <a:off x="2743200" y="1508760"/>
-            <a:ext cx="4754880" cy="457200"/>
-          </a:xfrm>
-          <a:prstGeom prst="rect">
-            <a:avLst/>
-          </a:prstGeom>
-          <a:noFill/>
-        </p:spPr>
-        <p:txBody>
-          <a:bodyPr wrap="square" anchor="ctr" lIns="0" rIns="0" tIns="0" bIns="0"/>
-          <a:lstStyle/>
-          <a:p>
-            <a:pPr algn="l"/>
-            <a:r>
-              <a:rPr sz="1400" b="0" i="1">
-                <a:solidFill>
-                  <a:srgbClr val="54595D"/>
-                </a:solidFill>
-                <a:latin typeface="Calibri"/>
-              </a:rPr>
-              <a:t>Individual, in Python</a:t>
-            </a:r>
-          </a:p>
-        </p:txBody>
-      </p:sp>
-      <p:sp>
-        <p:nvSpPr>
-          <p:cNvPr id="9" name="Oval 8"/>
+              <a:t>What does input() always return?</a:t>
+            </a:r>
+          </a:p>
+        </p:txBody>
+      </p:sp>
+      <p:sp>
+        <p:nvSpPr>
+          <p:cNvPr id="8" name="Oval 7"/>
           <p:cNvSpPr/>
           <p:nvPr/>
         </p:nvSpPr>
         <p:spPr>
           <a:xfrm>
-            <a:off x="548640" y="2482596"/>
-            <a:ext cx="384048" cy="384048"/>
+            <a:off x="548640" y="3108960"/>
+            <a:ext cx="502920" cy="502920"/>
           </a:xfrm>
           <a:prstGeom prst="ellipse">
             <a:avLst/>
           </a:prstGeom>
           <a:solidFill>
-            <a:srgbClr val="0645AD"/>
+            <a:srgbClr val="F2B705"/>
           </a:solidFill>
           <a:ln>
             <a:noFill/>
@@ -8966,27 +12089,27 @@
           <a:p>
             <a:pPr algn="ctr"/>
             <a:r>
-              <a:rPr sz="1300" b="1">
-                <a:solidFill>
-                  <a:srgbClr val="FFFFFF"/>
-                </a:solidFill>
-                <a:latin typeface="Calibri"/>
-              </a:rPr>
-              <a:t>1</a:t>
-            </a:r>
-          </a:p>
-        </p:txBody>
-      </p:sp>
-      <p:sp>
-        <p:nvSpPr>
-          <p:cNvPr id="10" name="TextBox 9"/>
+              <a:rPr sz="1600" b="1">
+                <a:solidFill>
+                  <a:srgbClr val="202122"/>
+                </a:solidFill>
+                <a:latin typeface="Calibri"/>
+              </a:rPr>
+              <a:t>2</a:t>
+            </a:r>
+          </a:p>
+        </p:txBody>
+      </p:sp>
+      <p:sp>
+        <p:nvSpPr>
+          <p:cNvPr id="9" name="TextBox 8"/>
           <p:cNvSpPr txBox="1"/>
           <p:nvPr/>
         </p:nvSpPr>
         <p:spPr>
           <a:xfrm>
-            <a:off x="1143000" y="2240280"/>
-            <a:ext cx="5943600" cy="868680"/>
+            <a:off x="1371600" y="3063240"/>
+            <a:ext cx="10271455" cy="1188720"/>
           </a:xfrm>
           <a:prstGeom prst="rect">
             <a:avLst/>
@@ -8994,38 +12117,38 @@
           <a:noFill/>
         </p:spPr>
         <p:txBody>
-          <a:bodyPr wrap="square" anchor="ctr" lIns="0" rIns="0" tIns="0" bIns="0"/>
+          <a:bodyPr wrap="square" anchor="t" lIns="0" rIns="0" tIns="0" bIns="0"/>
           <a:lstStyle/>
           <a:p>
             <a:pPr algn="l"/>
             <a:r>
-              <a:rPr sz="1700" b="0" i="0">
+              <a:rPr sz="2400" b="0" i="0">
                 <a:solidFill>
                   <a:srgbClr val="202122"/>
                 </a:solidFill>
                 <a:latin typeface="Calibri"/>
               </a:rPr>
-              <a:t>Create a dictionary mapping five student names to a list of marks.</a:t>
-            </a:r>
-          </a:p>
-        </p:txBody>
-      </p:sp>
-      <p:sp>
-        <p:nvSpPr>
-          <p:cNvPr id="11" name="Oval 10"/>
+              <a:t>What is a local variable?</a:t>
+            </a:r>
+          </a:p>
+        </p:txBody>
+      </p:sp>
+      <p:sp>
+        <p:nvSpPr>
+          <p:cNvPr id="10" name="Oval 9"/>
           <p:cNvSpPr/>
           <p:nvPr/>
         </p:nvSpPr>
         <p:spPr>
           <a:xfrm>
-            <a:off x="548640" y="3461004"/>
-            <a:ext cx="384048" cy="384048"/>
+            <a:off x="548640" y="4526280"/>
+            <a:ext cx="502920" cy="502920"/>
           </a:xfrm>
           <a:prstGeom prst="ellipse">
             <a:avLst/>
           </a:prstGeom>
           <a:solidFill>
-            <a:srgbClr val="0645AD"/>
+            <a:srgbClr val="F2B705"/>
           </a:solidFill>
           <a:ln>
             <a:noFill/>
@@ -9052,13 +12175,46 @@
           <a:p>
             <a:pPr algn="ctr"/>
             <a:r>
-              <a:rPr sz="1300" b="1">
-                <a:solidFill>
-                  <a:srgbClr val="FFFFFF"/>
-                </a:solidFill>
-                <a:latin typeface="Calibri"/>
-              </a:rPr>
-              <a:t>2</a:t>
+              <a:rPr sz="1600" b="1">
+                <a:solidFill>
+                  <a:srgbClr val="202122"/>
+                </a:solidFill>
+                <a:latin typeface="Calibri"/>
+              </a:rPr>
+              <a:t>3</a:t>
+            </a:r>
+          </a:p>
+        </p:txBody>
+      </p:sp>
+      <p:sp>
+        <p:nvSpPr>
+          <p:cNvPr id="11" name="TextBox 10"/>
+          <p:cNvSpPr txBox="1"/>
+          <p:nvPr/>
+        </p:nvSpPr>
+        <p:spPr>
+          <a:xfrm>
+            <a:off x="1371600" y="4480560"/>
+            <a:ext cx="10271455" cy="1188720"/>
+          </a:xfrm>
+          <a:prstGeom prst="rect">
+            <a:avLst/>
+          </a:prstGeom>
+          <a:noFill/>
+        </p:spPr>
+        <p:txBody>
+          <a:bodyPr wrap="square" anchor="t" lIns="0" rIns="0" tIns="0" bIns="0"/>
+          <a:lstStyle/>
+          <a:p>
+            <a:pPr algn="l"/>
+            <a:r>
+              <a:rPr sz="2400" b="0" i="0">
+                <a:solidFill>
+                  <a:srgbClr val="202122"/>
+                </a:solidFill>
+                <a:latin typeface="Calibri"/>
+              </a:rPr>
+              <a:t>Why prefer local variables?</a:t>
             </a:r>
           </a:p>
         </p:txBody>
@@ -9071,8 +12227,8 @@
         </p:nvSpPr>
         <p:spPr>
           <a:xfrm>
-            <a:off x="1143000" y="3218688"/>
-            <a:ext cx="5943600" cy="868680"/>
+            <a:off x="548640" y="5852160"/>
+            <a:ext cx="11094415" cy="365760"/>
           </a:xfrm>
           <a:prstGeom prst="rect">
             <a:avLst/>
@@ -9080,374 +12236,18 @@
           <a:noFill/>
         </p:spPr>
         <p:txBody>
-          <a:bodyPr wrap="square" anchor="ctr" lIns="0" rIns="0" tIns="0" bIns="0"/>
+          <a:bodyPr wrap="square" anchor="t" lIns="0" rIns="0" tIns="0" bIns="0"/>
           <a:lstStyle/>
           <a:p>
             <a:pPr algn="l"/>
             <a:r>
-              <a:rPr sz="1700" b="0" i="0">
-                <a:solidFill>
-                  <a:srgbClr val="202122"/>
-                </a:solidFill>
-                <a:latin typeface="Calibri"/>
-              </a:rPr>
-              <a:t>Ask the user for a name and a new mark, converting the input correctly.</a:t>
-            </a:r>
-          </a:p>
-        </p:txBody>
-      </p:sp>
-      <p:sp>
-        <p:nvSpPr>
-          <p:cNvPr id="13" name="Oval 12"/>
-          <p:cNvSpPr/>
-          <p:nvPr/>
-        </p:nvSpPr>
-        <p:spPr>
-          <a:xfrm>
-            <a:off x="548640" y="4439412"/>
-            <a:ext cx="384048" cy="384048"/>
-          </a:xfrm>
-          <a:prstGeom prst="ellipse">
-            <a:avLst/>
-          </a:prstGeom>
-          <a:solidFill>
-            <a:srgbClr val="0645AD"/>
-          </a:solidFill>
-          <a:ln>
-            <a:noFill/>
-          </a:ln>
-          <a:effectLst/>
-        </p:spPr>
-        <p:style>
-          <a:lnRef idx="1">
-            <a:schemeClr val="accent1"/>
-          </a:lnRef>
-          <a:fillRef idx="3">
-            <a:schemeClr val="accent1"/>
-          </a:fillRef>
-          <a:effectRef idx="2">
-            <a:schemeClr val="accent1"/>
-          </a:effectRef>
-          <a:fontRef idx="minor">
-            <a:schemeClr val="lt1"/>
-          </a:fontRef>
-        </p:style>
-        <p:txBody>
-          <a:bodyPr rtlCol="0" anchor="ctr" lIns="0" rIns="0" tIns="0" bIns="0"/>
-          <a:lstStyle/>
-          <a:p>
-            <a:pPr algn="ctr"/>
-            <a:r>
-              <a:rPr sz="1300" b="1">
-                <a:solidFill>
-                  <a:srgbClr val="FFFFFF"/>
-                </a:solidFill>
-                <a:latin typeface="Calibri"/>
-              </a:rPr>
-              <a:t>3</a:t>
-            </a:r>
-          </a:p>
-        </p:txBody>
-      </p:sp>
-      <p:sp>
-        <p:nvSpPr>
-          <p:cNvPr id="14" name="TextBox 13"/>
-          <p:cNvSpPr txBox="1"/>
-          <p:nvPr/>
-        </p:nvSpPr>
-        <p:spPr>
-          <a:xfrm>
-            <a:off x="1143000" y="4197096"/>
-            <a:ext cx="5943600" cy="868680"/>
-          </a:xfrm>
-          <a:prstGeom prst="rect">
-            <a:avLst/>
-          </a:prstGeom>
-          <a:noFill/>
-        </p:spPr>
-        <p:txBody>
-          <a:bodyPr wrap="square" anchor="ctr" lIns="0" rIns="0" tIns="0" bIns="0"/>
-          <a:lstStyle/>
-          <a:p>
-            <a:pPr algn="l"/>
-            <a:r>
-              <a:rPr sz="1700" b="0" i="0">
-                <a:solidFill>
-                  <a:srgbClr val="202122"/>
-                </a:solidFill>
-                <a:latin typeface="Calibri"/>
-              </a:rPr>
-              <a:t>Append the mark to that student's list.</a:t>
-            </a:r>
-          </a:p>
-        </p:txBody>
-      </p:sp>
-      <p:sp>
-        <p:nvSpPr>
-          <p:cNvPr id="15" name="Oval 14"/>
-          <p:cNvSpPr/>
-          <p:nvPr/>
-        </p:nvSpPr>
-        <p:spPr>
-          <a:xfrm>
-            <a:off x="548640" y="5417820"/>
-            <a:ext cx="384048" cy="384048"/>
-          </a:xfrm>
-          <a:prstGeom prst="ellipse">
-            <a:avLst/>
-          </a:prstGeom>
-          <a:solidFill>
-            <a:srgbClr val="0645AD"/>
-          </a:solidFill>
-          <a:ln>
-            <a:noFill/>
-          </a:ln>
-          <a:effectLst/>
-        </p:spPr>
-        <p:style>
-          <a:lnRef idx="1">
-            <a:schemeClr val="accent1"/>
-          </a:lnRef>
-          <a:fillRef idx="3">
-            <a:schemeClr val="accent1"/>
-          </a:fillRef>
-          <a:effectRef idx="2">
-            <a:schemeClr val="accent1"/>
-          </a:effectRef>
-          <a:fontRef idx="minor">
-            <a:schemeClr val="lt1"/>
-          </a:fontRef>
-        </p:style>
-        <p:txBody>
-          <a:bodyPr rtlCol="0" anchor="ctr" lIns="0" rIns="0" tIns="0" bIns="0"/>
-          <a:lstStyle/>
-          <a:p>
-            <a:pPr algn="ctr"/>
-            <a:r>
-              <a:rPr sz="1300" b="1">
-                <a:solidFill>
-                  <a:srgbClr val="FFFFFF"/>
-                </a:solidFill>
-                <a:latin typeface="Calibri"/>
-              </a:rPr>
-              <a:t>4</a:t>
-            </a:r>
-          </a:p>
-        </p:txBody>
-      </p:sp>
-      <p:sp>
-        <p:nvSpPr>
-          <p:cNvPr id="16" name="TextBox 15"/>
-          <p:cNvSpPr txBox="1"/>
-          <p:nvPr/>
-        </p:nvSpPr>
-        <p:spPr>
-          <a:xfrm>
-            <a:off x="1143000" y="5175504"/>
-            <a:ext cx="5943600" cy="868680"/>
-          </a:xfrm>
-          <a:prstGeom prst="rect">
-            <a:avLst/>
-          </a:prstGeom>
-          <a:noFill/>
-        </p:spPr>
-        <p:txBody>
-          <a:bodyPr wrap="square" anchor="ctr" lIns="0" rIns="0" tIns="0" bIns="0"/>
-          <a:lstStyle/>
-          <a:p>
-            <a:pPr algn="l"/>
-            <a:r>
-              <a:rPr sz="1700" b="0" i="0">
-                <a:solidFill>
-                  <a:srgbClr val="202122"/>
-                </a:solidFill>
-                <a:latin typeface="Calibri"/>
-              </a:rPr>
-              <a:t>Output each student's highest mark using max().</a:t>
-            </a:r>
-          </a:p>
-        </p:txBody>
-      </p:sp>
-      <p:sp>
-        <p:nvSpPr>
-          <p:cNvPr id="17" name="Rounded Rectangle 16"/>
-          <p:cNvSpPr/>
-          <p:nvPr/>
-        </p:nvSpPr>
-        <p:spPr>
-          <a:xfrm>
-            <a:off x="7772400" y="1508760"/>
-            <a:ext cx="3867912" cy="4572000"/>
-          </a:xfrm>
-          <a:prstGeom prst="roundRect">
-            <a:avLst>
-              <a:gd name="adj" fmla="val 8000"/>
-            </a:avLst>
-          </a:prstGeom>
-          <a:solidFill>
-            <a:srgbClr val="EAF3FF"/>
-          </a:solidFill>
-          <a:ln>
-            <a:noFill/>
-          </a:ln>
-          <a:effectLst/>
-        </p:spPr>
-        <p:style>
-          <a:lnRef idx="1">
-            <a:schemeClr val="accent1"/>
-          </a:lnRef>
-          <a:fillRef idx="3">
-            <a:schemeClr val="accent1"/>
-          </a:fillRef>
-          <a:effectRef idx="2">
-            <a:schemeClr val="accent1"/>
-          </a:effectRef>
-          <a:fontRef idx="minor">
-            <a:schemeClr val="lt1"/>
-          </a:fontRef>
-        </p:style>
-        <p:txBody>
-          <a:bodyPr rtlCol="0" anchor="ctr"/>
-          <a:lstStyle/>
-          <a:p/>
-        </p:txBody>
-      </p:sp>
-      <p:sp>
-        <p:nvSpPr>
-          <p:cNvPr id="18" name="TextBox 17"/>
-          <p:cNvSpPr txBox="1"/>
-          <p:nvPr/>
-        </p:nvSpPr>
-        <p:spPr>
-          <a:xfrm>
-            <a:off x="8046720" y="1737360"/>
-            <a:ext cx="3291840" cy="365760"/>
-          </a:xfrm>
-          <a:prstGeom prst="rect">
-            <a:avLst/>
-          </a:prstGeom>
-          <a:noFill/>
-        </p:spPr>
-        <p:txBody>
-          <a:bodyPr wrap="square" anchor="t" lIns="0" rIns="0" tIns="0" bIns="0"/>
-          <a:lstStyle/>
-          <a:p>
-            <a:pPr algn="l"/>
-            <a:r>
-              <a:rPr sz="1300" b="1" i="0">
-                <a:solidFill>
-                  <a:srgbClr val="0645AD"/>
-                </a:solidFill>
-                <a:latin typeface="Calibri"/>
-              </a:rPr>
-              <a:t>SUCCESS CRITERIA</a:t>
-            </a:r>
-          </a:p>
-        </p:txBody>
-      </p:sp>
-      <p:sp>
-        <p:nvSpPr>
-          <p:cNvPr id="19" name="TextBox 18"/>
-          <p:cNvSpPr txBox="1"/>
-          <p:nvPr/>
-        </p:nvSpPr>
-        <p:spPr>
-          <a:xfrm>
-            <a:off x="8046720" y="2240280"/>
-            <a:ext cx="3337560" cy="3657600"/>
-          </a:xfrm>
-          <a:prstGeom prst="rect">
-            <a:avLst/>
-          </a:prstGeom>
-          <a:noFill/>
-        </p:spPr>
-        <p:txBody>
-          <a:bodyPr wrap="square" lIns="0" rIns="0" tIns="0" bIns="0">
-            <a:spAutoFit/>
-          </a:bodyPr>
-          <a:lstStyle/>
-          <a:p>
-            <a:pPr marL="274320" indent="-274320">
-              <a:spcAft>
-                <a:spcPts val="810"/>
-              </a:spcAft>
-              <a:buClr>
-                <a:srgbClr val="0645AD"/>
-              </a:buClr>
-              <a:buFont typeface="Arial"/>
-              <a:buChar char="•"/>
-            </a:pPr>
-            <a:r>
-              <a:rPr sz="1800" b="0">
-                <a:solidFill>
-                  <a:srgbClr val="202122"/>
-                </a:solidFill>
-                <a:latin typeface="Calibri"/>
-              </a:rPr>
-              <a:t>Correct data types used</a:t>
-            </a:r>
-          </a:p>
-          <a:p>
-            <a:pPr marL="274320" indent="-274320">
-              <a:spcAft>
-                <a:spcPts val="810"/>
-              </a:spcAft>
-              <a:buClr>
-                <a:srgbClr val="0645AD"/>
-              </a:buClr>
-              <a:buFont typeface="Arial"/>
-              <a:buChar char="•"/>
-            </a:pPr>
-            <a:r>
-              <a:rPr sz="1800" b="0">
-                <a:solidFill>
-                  <a:srgbClr val="202122"/>
-                </a:solidFill>
-                <a:latin typeface="Calibri"/>
-              </a:rPr>
-              <a:t>Input is converted with int()</a:t>
-            </a:r>
-          </a:p>
-          <a:p>
-            <a:pPr marL="274320" indent="-274320">
-              <a:spcAft>
-                <a:spcPts val="810"/>
-              </a:spcAft>
-              <a:buClr>
-                <a:srgbClr val="0645AD"/>
-              </a:buClr>
-              <a:buFont typeface="Arial"/>
-              <a:buChar char="•"/>
-            </a:pPr>
-            <a:r>
-              <a:rPr sz="1800" b="0">
-                <a:solidFill>
-                  <a:srgbClr val="202122"/>
-                </a:solidFill>
-                <a:latin typeface="Calibri"/>
-              </a:rPr>
-              <a:t>Unknown names handled</a:t>
-            </a:r>
-          </a:p>
-          <a:p>
-            <a:pPr marL="274320" indent="-274320">
-              <a:spcAft>
-                <a:spcPts val="810"/>
-              </a:spcAft>
-              <a:buClr>
-                <a:srgbClr val="0645AD"/>
-              </a:buClr>
-              <a:buFont typeface="Arial"/>
-              <a:buChar char="•"/>
-            </a:pPr>
-            <a:r>
-              <a:rPr sz="1800" b="0">
-                <a:solidFill>
-                  <a:srgbClr val="202122"/>
-                </a:solidFill>
-                <a:latin typeface="Calibri"/>
-              </a:rPr>
-              <a:t>Output is clearly labelled</a:t>
+              <a:rPr sz="1300" b="0" i="1">
+                <a:solidFill>
+                  <a:srgbClr val="54595D"/>
+                </a:solidFill>
+                <a:latin typeface="Calibri"/>
+              </a:rPr>
+              <a:t>Answer on mini whiteboards or in your book. Answers are in the speaker notes.</a:t>
             </a:r>
           </a:p>
         </p:txBody>
